--- a/working-output.pptx
+++ b/working-output.pptx
@@ -247,7 +247,7 @@
           <a:p>
             <a:fld id="{0F9C1CCF-B725-44A7-AA57-5E433BD85C9F}" type="datetimeFigureOut">
               <a:rPr lang="en-US" smtClean="0"/>
-              <a:t>9/23/26</a:t>
+              <a:t>10/6/26</a:t>
             </a:fld>
             <a:endParaRPr lang="en-US"/>
           </a:p>
@@ -4561,10 +4561,10 @@
       </p:sp>
       <p:sp>
         <p:nvSpPr>
-          <p:cNvPr id="7" name="Date Placeholder 6">
+          <p:cNvPr id="13" name="Date Placeholder 12">
             <a:extLst>
               <a:ext uri="{FF2B5EF4-FFF2-40B4-BE49-F238E27FC236}">
-                <a16:creationId xmlns:a16="http://schemas.microsoft.com/office/drawing/2014/main" id="{061B09C1-B224-518F-0685-9136C57B0AAB}"/>
+                <a16:creationId xmlns:a16="http://schemas.microsoft.com/office/drawing/2014/main" id="{A98AF039-CAB9-D195-284D-DDC75DFBA39C}"/>
               </a:ext>
             </a:extLst>
           </p:cNvPr>
@@ -4591,10 +4591,10 @@
       </p:sp>
       <p:sp>
         <p:nvSpPr>
-          <p:cNvPr id="8" name="Footer Placeholder 7">
+          <p:cNvPr id="14" name="Footer Placeholder 13">
             <a:extLst>
               <a:ext uri="{FF2B5EF4-FFF2-40B4-BE49-F238E27FC236}">
-                <a16:creationId xmlns:a16="http://schemas.microsoft.com/office/drawing/2014/main" id="{DF1B80E6-457B-EDED-0211-B71E2739445B}"/>
+                <a16:creationId xmlns:a16="http://schemas.microsoft.com/office/drawing/2014/main" id="{92325642-A61C-3078-0A08-00C186300EA9}"/>
               </a:ext>
             </a:extLst>
           </p:cNvPr>
@@ -4620,10 +4620,10 @@
       </p:sp>
       <p:sp>
         <p:nvSpPr>
-          <p:cNvPr id="9" name="Slide Number Placeholder 8">
+          <p:cNvPr id="15" name="Slide Number Placeholder 14">
             <a:extLst>
               <a:ext uri="{FF2B5EF4-FFF2-40B4-BE49-F238E27FC236}">
-                <a16:creationId xmlns:a16="http://schemas.microsoft.com/office/drawing/2014/main" id="{9A738F11-4DF9-41BE-57C0-5A8B98080E05}"/>
+                <a16:creationId xmlns:a16="http://schemas.microsoft.com/office/drawing/2014/main" id="{68E9BE78-1F37-C669-71F3-F3AC2F8BB498}"/>
               </a:ext>
             </a:extLst>
           </p:cNvPr>
@@ -4639,14 +4639,9 @@
           <a:bodyPr/>
           <a:lstStyle/>
           <a:p>
-            <a:pPr algn="ctr"/>
-            <a:r>
-              <a:rPr lang="en-US"/>
-              <a:t>Slide </a:t>
-            </a:r>
             <a:fld id="{C5EF2332-01BF-834F-8236-50238282D533}" type="slidenum">
               <a:rPr lang="en-US" smtClean="0"/>
-              <a:pPr algn="ctr"/>
+              <a:pPr/>
               <a:t>‹#›</a:t>
             </a:fld>
             <a:endParaRPr lang="en-US" dirty="0"/>
@@ -4774,100 +4769,6 @@
       </p:sp>
       <p:sp>
         <p:nvSpPr>
-          <p:cNvPr id="7" name="Date Placeholder 6">
-            <a:extLst>
-              <a:ext uri="{FF2B5EF4-FFF2-40B4-BE49-F238E27FC236}">
-                <a16:creationId xmlns:a16="http://schemas.microsoft.com/office/drawing/2014/main" id="{1633ABB9-0FD6-00F4-2186-D3425C9073F8}"/>
-              </a:ext>
-            </a:extLst>
-          </p:cNvPr>
-          <p:cNvSpPr>
-            <a:spLocks noGrp="1"/>
-          </p:cNvSpPr>
-          <p:nvPr>
-            <p:ph type="dt" sz="half" idx="10"/>
-          </p:nvPr>
-        </p:nvSpPr>
-        <p:spPr/>
-        <p:txBody>
-          <a:bodyPr/>
-          <a:lstStyle/>
-          <a:p>
-            <a:pPr algn="ctr"/>
-            <a:r>
-              <a:rPr lang="en-US"/>
-              <a:t>DATE</a:t>
-            </a:r>
-            <a:endParaRPr lang="en-US" dirty="0"/>
-          </a:p>
-        </p:txBody>
-      </p:sp>
-      <p:sp>
-        <p:nvSpPr>
-          <p:cNvPr id="8" name="Footer Placeholder 7">
-            <a:extLst>
-              <a:ext uri="{FF2B5EF4-FFF2-40B4-BE49-F238E27FC236}">
-                <a16:creationId xmlns:a16="http://schemas.microsoft.com/office/drawing/2014/main" id="{2CF2A15A-E38D-BBA2-F6E5-F54E8EE4FC5E}"/>
-              </a:ext>
-            </a:extLst>
-          </p:cNvPr>
-          <p:cNvSpPr>
-            <a:spLocks noGrp="1"/>
-          </p:cNvSpPr>
-          <p:nvPr>
-            <p:ph type="ftr" sz="quarter" idx="11"/>
-          </p:nvPr>
-        </p:nvSpPr>
-        <p:spPr/>
-        <p:txBody>
-          <a:bodyPr/>
-          <a:lstStyle/>
-          <a:p>
-            <a:r>
-              <a:rPr lang="en-US"/>
-              <a:t>© LMU Open Science Center</a:t>
-            </a:r>
-            <a:endParaRPr lang="en-US" dirty="0"/>
-          </a:p>
-        </p:txBody>
-      </p:sp>
-      <p:sp>
-        <p:nvSpPr>
-          <p:cNvPr id="9" name="Slide Number Placeholder 8">
-            <a:extLst>
-              <a:ext uri="{FF2B5EF4-FFF2-40B4-BE49-F238E27FC236}">
-                <a16:creationId xmlns:a16="http://schemas.microsoft.com/office/drawing/2014/main" id="{C752F930-079C-2B09-0620-3D5F46770B5E}"/>
-              </a:ext>
-            </a:extLst>
-          </p:cNvPr>
-          <p:cNvSpPr>
-            <a:spLocks noGrp="1"/>
-          </p:cNvSpPr>
-          <p:nvPr>
-            <p:ph type="sldNum" sz="quarter" idx="12"/>
-          </p:nvPr>
-        </p:nvSpPr>
-        <p:spPr/>
-        <p:txBody>
-          <a:bodyPr/>
-          <a:lstStyle/>
-          <a:p>
-            <a:pPr algn="ctr"/>
-            <a:r>
-              <a:rPr lang="en-US"/>
-              <a:t>Slide </a:t>
-            </a:r>
-            <a:fld id="{C5EF2332-01BF-834F-8236-50238282D533}" type="slidenum">
-              <a:rPr lang="en-US" smtClean="0"/>
-              <a:pPr algn="ctr"/>
-              <a:t>‹#›</a:t>
-            </a:fld>
-            <a:endParaRPr lang="en-US" dirty="0"/>
-          </a:p>
-        </p:txBody>
-      </p:sp>
-      <p:sp>
-        <p:nvSpPr>
           <p:cNvPr id="4" name="Rectangle 3">
             <a:extLst>
               <a:ext uri="{FF2B5EF4-FFF2-40B4-BE49-F238E27FC236}">
@@ -4913,6 +4814,95 @@
           <a:p>
             <a:pPr algn="ctr"/>
             <a:endParaRPr lang="en-US" sz="3200"/>
+          </a:p>
+        </p:txBody>
+      </p:sp>
+      <p:sp>
+        <p:nvSpPr>
+          <p:cNvPr id="5" name="Date Placeholder 4">
+            <a:extLst>
+              <a:ext uri="{FF2B5EF4-FFF2-40B4-BE49-F238E27FC236}">
+                <a16:creationId xmlns:a16="http://schemas.microsoft.com/office/drawing/2014/main" id="{D2DF6E15-AA63-3763-7F86-DACADBA35FC9}"/>
+              </a:ext>
+            </a:extLst>
+          </p:cNvPr>
+          <p:cNvSpPr>
+            <a:spLocks noGrp="1"/>
+          </p:cNvSpPr>
+          <p:nvPr>
+            <p:ph type="dt" sz="half" idx="10"/>
+          </p:nvPr>
+        </p:nvSpPr>
+        <p:spPr/>
+        <p:txBody>
+          <a:bodyPr/>
+          <a:lstStyle/>
+          <a:p>
+            <a:pPr algn="ctr"/>
+            <a:r>
+              <a:rPr lang="en-US"/>
+              <a:t>DATE</a:t>
+            </a:r>
+            <a:endParaRPr lang="en-US" dirty="0"/>
+          </a:p>
+        </p:txBody>
+      </p:sp>
+      <p:sp>
+        <p:nvSpPr>
+          <p:cNvPr id="6" name="Footer Placeholder 5">
+            <a:extLst>
+              <a:ext uri="{FF2B5EF4-FFF2-40B4-BE49-F238E27FC236}">
+                <a16:creationId xmlns:a16="http://schemas.microsoft.com/office/drawing/2014/main" id="{2FD9BD05-D78E-3984-8BF6-5DC5BAB2C98D}"/>
+              </a:ext>
+            </a:extLst>
+          </p:cNvPr>
+          <p:cNvSpPr>
+            <a:spLocks noGrp="1"/>
+          </p:cNvSpPr>
+          <p:nvPr>
+            <p:ph type="ftr" sz="quarter" idx="11"/>
+          </p:nvPr>
+        </p:nvSpPr>
+        <p:spPr/>
+        <p:txBody>
+          <a:bodyPr/>
+          <a:lstStyle/>
+          <a:p>
+            <a:r>
+              <a:rPr lang="en-US"/>
+              <a:t>© LMU Open Science Center</a:t>
+            </a:r>
+            <a:endParaRPr lang="en-US" dirty="0"/>
+          </a:p>
+        </p:txBody>
+      </p:sp>
+      <p:sp>
+        <p:nvSpPr>
+          <p:cNvPr id="10" name="Slide Number Placeholder 9">
+            <a:extLst>
+              <a:ext uri="{FF2B5EF4-FFF2-40B4-BE49-F238E27FC236}">
+                <a16:creationId xmlns:a16="http://schemas.microsoft.com/office/drawing/2014/main" id="{84583088-CCF2-B670-1C52-71D2A0DA5FBC}"/>
+              </a:ext>
+            </a:extLst>
+          </p:cNvPr>
+          <p:cNvSpPr>
+            <a:spLocks noGrp="1"/>
+          </p:cNvSpPr>
+          <p:nvPr>
+            <p:ph type="sldNum" sz="quarter" idx="12"/>
+          </p:nvPr>
+        </p:nvSpPr>
+        <p:spPr/>
+        <p:txBody>
+          <a:bodyPr/>
+          <a:lstStyle/>
+          <a:p>
+            <a:fld id="{C5EF2332-01BF-834F-8236-50238282D533}" type="slidenum">
+              <a:rPr lang="en-US" smtClean="0"/>
+              <a:pPr/>
+              <a:t>‹#›</a:t>
+            </a:fld>
+            <a:endParaRPr lang="en-US" dirty="0"/>
           </a:p>
         </p:txBody>
       </p:sp>
@@ -5031,100 +5021,6 @@
       </p:sp>
       <p:sp>
         <p:nvSpPr>
-          <p:cNvPr id="7" name="Date Placeholder 6">
-            <a:extLst>
-              <a:ext uri="{FF2B5EF4-FFF2-40B4-BE49-F238E27FC236}">
-                <a16:creationId xmlns:a16="http://schemas.microsoft.com/office/drawing/2014/main" id="{DE35559A-56D2-4FD7-4D20-D71F4C8215E0}"/>
-              </a:ext>
-            </a:extLst>
-          </p:cNvPr>
-          <p:cNvSpPr>
-            <a:spLocks noGrp="1"/>
-          </p:cNvSpPr>
-          <p:nvPr>
-            <p:ph type="dt" sz="half" idx="10"/>
-          </p:nvPr>
-        </p:nvSpPr>
-        <p:spPr/>
-        <p:txBody>
-          <a:bodyPr/>
-          <a:lstStyle/>
-          <a:p>
-            <a:pPr algn="ctr"/>
-            <a:r>
-              <a:rPr lang="en-US"/>
-              <a:t>DATE</a:t>
-            </a:r>
-            <a:endParaRPr lang="en-US" dirty="0"/>
-          </a:p>
-        </p:txBody>
-      </p:sp>
-      <p:sp>
-        <p:nvSpPr>
-          <p:cNvPr id="8" name="Footer Placeholder 7">
-            <a:extLst>
-              <a:ext uri="{FF2B5EF4-FFF2-40B4-BE49-F238E27FC236}">
-                <a16:creationId xmlns:a16="http://schemas.microsoft.com/office/drawing/2014/main" id="{4E340C61-838A-D2E9-36F0-C1EB6496D16C}"/>
-              </a:ext>
-            </a:extLst>
-          </p:cNvPr>
-          <p:cNvSpPr>
-            <a:spLocks noGrp="1"/>
-          </p:cNvSpPr>
-          <p:nvPr>
-            <p:ph type="ftr" sz="quarter" idx="11"/>
-          </p:nvPr>
-        </p:nvSpPr>
-        <p:spPr/>
-        <p:txBody>
-          <a:bodyPr/>
-          <a:lstStyle/>
-          <a:p>
-            <a:r>
-              <a:rPr lang="en-US"/>
-              <a:t>© LMU Open Science Center</a:t>
-            </a:r>
-            <a:endParaRPr lang="en-US" dirty="0"/>
-          </a:p>
-        </p:txBody>
-      </p:sp>
-      <p:sp>
-        <p:nvSpPr>
-          <p:cNvPr id="9" name="Slide Number Placeholder 8">
-            <a:extLst>
-              <a:ext uri="{FF2B5EF4-FFF2-40B4-BE49-F238E27FC236}">
-                <a16:creationId xmlns:a16="http://schemas.microsoft.com/office/drawing/2014/main" id="{C0F46CA0-DC5C-0E94-9C04-A3785DB5CE53}"/>
-              </a:ext>
-            </a:extLst>
-          </p:cNvPr>
-          <p:cNvSpPr>
-            <a:spLocks noGrp="1"/>
-          </p:cNvSpPr>
-          <p:nvPr>
-            <p:ph type="sldNum" sz="quarter" idx="12"/>
-          </p:nvPr>
-        </p:nvSpPr>
-        <p:spPr/>
-        <p:txBody>
-          <a:bodyPr/>
-          <a:lstStyle/>
-          <a:p>
-            <a:pPr algn="ctr"/>
-            <a:r>
-              <a:rPr lang="en-US"/>
-              <a:t>Slide </a:t>
-            </a:r>
-            <a:fld id="{C5EF2332-01BF-834F-8236-50238282D533}" type="slidenum">
-              <a:rPr lang="en-US" smtClean="0"/>
-              <a:pPr algn="ctr"/>
-              <a:t>‹#›</a:t>
-            </a:fld>
-            <a:endParaRPr lang="en-US" dirty="0"/>
-          </a:p>
-        </p:txBody>
-      </p:sp>
-      <p:sp>
-        <p:nvSpPr>
           <p:cNvPr id="4" name="Rectangle 3">
             <a:extLst>
               <a:ext uri="{FF2B5EF4-FFF2-40B4-BE49-F238E27FC236}">
@@ -5170,6 +5066,95 @@
           <a:p>
             <a:pPr algn="ctr"/>
             <a:endParaRPr lang="en-US" sz="3200"/>
+          </a:p>
+        </p:txBody>
+      </p:sp>
+      <p:sp>
+        <p:nvSpPr>
+          <p:cNvPr id="5" name="Date Placeholder 4">
+            <a:extLst>
+              <a:ext uri="{FF2B5EF4-FFF2-40B4-BE49-F238E27FC236}">
+                <a16:creationId xmlns:a16="http://schemas.microsoft.com/office/drawing/2014/main" id="{5BF45B85-27C4-5A2F-EC81-52FBC9699338}"/>
+              </a:ext>
+            </a:extLst>
+          </p:cNvPr>
+          <p:cNvSpPr>
+            <a:spLocks noGrp="1"/>
+          </p:cNvSpPr>
+          <p:nvPr>
+            <p:ph type="dt" sz="half" idx="10"/>
+          </p:nvPr>
+        </p:nvSpPr>
+        <p:spPr/>
+        <p:txBody>
+          <a:bodyPr/>
+          <a:lstStyle/>
+          <a:p>
+            <a:pPr algn="ctr"/>
+            <a:r>
+              <a:rPr lang="en-US"/>
+              <a:t>DATE</a:t>
+            </a:r>
+            <a:endParaRPr lang="en-US" dirty="0"/>
+          </a:p>
+        </p:txBody>
+      </p:sp>
+      <p:sp>
+        <p:nvSpPr>
+          <p:cNvPr id="6" name="Footer Placeholder 5">
+            <a:extLst>
+              <a:ext uri="{FF2B5EF4-FFF2-40B4-BE49-F238E27FC236}">
+                <a16:creationId xmlns:a16="http://schemas.microsoft.com/office/drawing/2014/main" id="{8F83EC60-CE7B-06F0-476B-80CB9CE1F2F7}"/>
+              </a:ext>
+            </a:extLst>
+          </p:cNvPr>
+          <p:cNvSpPr>
+            <a:spLocks noGrp="1"/>
+          </p:cNvSpPr>
+          <p:nvPr>
+            <p:ph type="ftr" sz="quarter" idx="11"/>
+          </p:nvPr>
+        </p:nvSpPr>
+        <p:spPr/>
+        <p:txBody>
+          <a:bodyPr/>
+          <a:lstStyle/>
+          <a:p>
+            <a:r>
+              <a:rPr lang="en-US"/>
+              <a:t>© LMU Open Science Center</a:t>
+            </a:r>
+            <a:endParaRPr lang="en-US" dirty="0"/>
+          </a:p>
+        </p:txBody>
+      </p:sp>
+      <p:sp>
+        <p:nvSpPr>
+          <p:cNvPr id="10" name="Slide Number Placeholder 9">
+            <a:extLst>
+              <a:ext uri="{FF2B5EF4-FFF2-40B4-BE49-F238E27FC236}">
+                <a16:creationId xmlns:a16="http://schemas.microsoft.com/office/drawing/2014/main" id="{8A9AB982-9F02-36B3-80ED-6CFB05C75363}"/>
+              </a:ext>
+            </a:extLst>
+          </p:cNvPr>
+          <p:cNvSpPr>
+            <a:spLocks noGrp="1"/>
+          </p:cNvSpPr>
+          <p:nvPr>
+            <p:ph type="sldNum" sz="quarter" idx="12"/>
+          </p:nvPr>
+        </p:nvSpPr>
+        <p:spPr/>
+        <p:txBody>
+          <a:bodyPr/>
+          <a:lstStyle/>
+          <a:p>
+            <a:fld id="{C5EF2332-01BF-834F-8236-50238282D533}" type="slidenum">
+              <a:rPr lang="en-US" smtClean="0"/>
+              <a:pPr/>
+              <a:t>‹#›</a:t>
+            </a:fld>
+            <a:endParaRPr lang="en-US" dirty="0"/>
           </a:p>
         </p:txBody>
       </p:sp>
@@ -5278,100 +5263,6 @@
       </p:sp>
       <p:sp>
         <p:nvSpPr>
-          <p:cNvPr id="7" name="Date Placeholder 6">
-            <a:extLst>
-              <a:ext uri="{FF2B5EF4-FFF2-40B4-BE49-F238E27FC236}">
-                <a16:creationId xmlns:a16="http://schemas.microsoft.com/office/drawing/2014/main" id="{E2ED1F55-3CE9-F618-3510-EE96FDC54304}"/>
-              </a:ext>
-            </a:extLst>
-          </p:cNvPr>
-          <p:cNvSpPr>
-            <a:spLocks noGrp="1"/>
-          </p:cNvSpPr>
-          <p:nvPr>
-            <p:ph type="dt" sz="half" idx="10"/>
-          </p:nvPr>
-        </p:nvSpPr>
-        <p:spPr/>
-        <p:txBody>
-          <a:bodyPr/>
-          <a:lstStyle/>
-          <a:p>
-            <a:pPr algn="ctr"/>
-            <a:r>
-              <a:rPr lang="en-US"/>
-              <a:t>DATE</a:t>
-            </a:r>
-            <a:endParaRPr lang="en-US" dirty="0"/>
-          </a:p>
-        </p:txBody>
-      </p:sp>
-      <p:sp>
-        <p:nvSpPr>
-          <p:cNvPr id="8" name="Footer Placeholder 7">
-            <a:extLst>
-              <a:ext uri="{FF2B5EF4-FFF2-40B4-BE49-F238E27FC236}">
-                <a16:creationId xmlns:a16="http://schemas.microsoft.com/office/drawing/2014/main" id="{0616AEA6-DD6E-40D4-2DDA-E355C068ABA2}"/>
-              </a:ext>
-            </a:extLst>
-          </p:cNvPr>
-          <p:cNvSpPr>
-            <a:spLocks noGrp="1"/>
-          </p:cNvSpPr>
-          <p:nvPr>
-            <p:ph type="ftr" sz="quarter" idx="11"/>
-          </p:nvPr>
-        </p:nvSpPr>
-        <p:spPr/>
-        <p:txBody>
-          <a:bodyPr/>
-          <a:lstStyle/>
-          <a:p>
-            <a:r>
-              <a:rPr lang="en-US"/>
-              <a:t>© LMU Open Science Center</a:t>
-            </a:r>
-            <a:endParaRPr lang="en-US" dirty="0"/>
-          </a:p>
-        </p:txBody>
-      </p:sp>
-      <p:sp>
-        <p:nvSpPr>
-          <p:cNvPr id="9" name="Slide Number Placeholder 8">
-            <a:extLst>
-              <a:ext uri="{FF2B5EF4-FFF2-40B4-BE49-F238E27FC236}">
-                <a16:creationId xmlns:a16="http://schemas.microsoft.com/office/drawing/2014/main" id="{BD632E70-5D06-CAE0-ED30-149A6C1E3F1E}"/>
-              </a:ext>
-            </a:extLst>
-          </p:cNvPr>
-          <p:cNvSpPr>
-            <a:spLocks noGrp="1"/>
-          </p:cNvSpPr>
-          <p:nvPr>
-            <p:ph type="sldNum" sz="quarter" idx="12"/>
-          </p:nvPr>
-        </p:nvSpPr>
-        <p:spPr/>
-        <p:txBody>
-          <a:bodyPr/>
-          <a:lstStyle/>
-          <a:p>
-            <a:pPr algn="ctr"/>
-            <a:r>
-              <a:rPr lang="en-US"/>
-              <a:t>Slide </a:t>
-            </a:r>
-            <a:fld id="{C5EF2332-01BF-834F-8236-50238282D533}" type="slidenum">
-              <a:rPr lang="en-US" smtClean="0"/>
-              <a:pPr algn="ctr"/>
-              <a:t>‹#›</a:t>
-            </a:fld>
-            <a:endParaRPr lang="en-US" dirty="0"/>
-          </a:p>
-        </p:txBody>
-      </p:sp>
-      <p:sp>
-        <p:nvSpPr>
           <p:cNvPr id="4" name="Rectangle 3">
             <a:extLst>
               <a:ext uri="{FF2B5EF4-FFF2-40B4-BE49-F238E27FC236}">
@@ -5417,6 +5308,95 @@
           <a:p>
             <a:pPr algn="ctr"/>
             <a:endParaRPr lang="en-US" sz="3200"/>
+          </a:p>
+        </p:txBody>
+      </p:sp>
+      <p:sp>
+        <p:nvSpPr>
+          <p:cNvPr id="11" name="Date Placeholder 10">
+            <a:extLst>
+              <a:ext uri="{FF2B5EF4-FFF2-40B4-BE49-F238E27FC236}">
+                <a16:creationId xmlns:a16="http://schemas.microsoft.com/office/drawing/2014/main" id="{CE3B72D0-0A08-8401-1102-DC8B6D528889}"/>
+              </a:ext>
+            </a:extLst>
+          </p:cNvPr>
+          <p:cNvSpPr>
+            <a:spLocks noGrp="1"/>
+          </p:cNvSpPr>
+          <p:nvPr>
+            <p:ph type="dt" sz="half" idx="10"/>
+          </p:nvPr>
+        </p:nvSpPr>
+        <p:spPr/>
+        <p:txBody>
+          <a:bodyPr/>
+          <a:lstStyle/>
+          <a:p>
+            <a:pPr algn="ctr"/>
+            <a:r>
+              <a:rPr lang="en-US"/>
+              <a:t>DATE</a:t>
+            </a:r>
+            <a:endParaRPr lang="en-US" dirty="0"/>
+          </a:p>
+        </p:txBody>
+      </p:sp>
+      <p:sp>
+        <p:nvSpPr>
+          <p:cNvPr id="12" name="Footer Placeholder 11">
+            <a:extLst>
+              <a:ext uri="{FF2B5EF4-FFF2-40B4-BE49-F238E27FC236}">
+                <a16:creationId xmlns:a16="http://schemas.microsoft.com/office/drawing/2014/main" id="{06FDA1F9-F2A3-54A6-D8DB-F94C2CD5C623}"/>
+              </a:ext>
+            </a:extLst>
+          </p:cNvPr>
+          <p:cNvSpPr>
+            <a:spLocks noGrp="1"/>
+          </p:cNvSpPr>
+          <p:nvPr>
+            <p:ph type="ftr" sz="quarter" idx="11"/>
+          </p:nvPr>
+        </p:nvSpPr>
+        <p:spPr/>
+        <p:txBody>
+          <a:bodyPr/>
+          <a:lstStyle/>
+          <a:p>
+            <a:r>
+              <a:rPr lang="en-US"/>
+              <a:t>© LMU Open Science Center</a:t>
+            </a:r>
+            <a:endParaRPr lang="en-US" dirty="0"/>
+          </a:p>
+        </p:txBody>
+      </p:sp>
+      <p:sp>
+        <p:nvSpPr>
+          <p:cNvPr id="13" name="Slide Number Placeholder 12">
+            <a:extLst>
+              <a:ext uri="{FF2B5EF4-FFF2-40B4-BE49-F238E27FC236}">
+                <a16:creationId xmlns:a16="http://schemas.microsoft.com/office/drawing/2014/main" id="{7FE0A592-9ACE-2460-AAA6-BCEAFC660CD2}"/>
+              </a:ext>
+            </a:extLst>
+          </p:cNvPr>
+          <p:cNvSpPr>
+            <a:spLocks noGrp="1"/>
+          </p:cNvSpPr>
+          <p:nvPr>
+            <p:ph type="sldNum" sz="quarter" idx="12"/>
+          </p:nvPr>
+        </p:nvSpPr>
+        <p:spPr/>
+        <p:txBody>
+          <a:bodyPr/>
+          <a:lstStyle/>
+          <a:p>
+            <a:fld id="{C5EF2332-01BF-834F-8236-50238282D533}" type="slidenum">
+              <a:rPr lang="en-US" smtClean="0"/>
+              <a:pPr/>
+              <a:t>‹#›</a:t>
+            </a:fld>
+            <a:endParaRPr lang="en-US" dirty="0"/>
           </a:p>
         </p:txBody>
       </p:sp>
@@ -5602,100 +5582,6 @@
       </p:sp>
       <p:sp>
         <p:nvSpPr>
-          <p:cNvPr id="7" name="Date Placeholder 6">
-            <a:extLst>
-              <a:ext uri="{FF2B5EF4-FFF2-40B4-BE49-F238E27FC236}">
-                <a16:creationId xmlns:a16="http://schemas.microsoft.com/office/drawing/2014/main" id="{7A3D4B62-A9D4-A224-853C-F47B5EEC33A2}"/>
-              </a:ext>
-            </a:extLst>
-          </p:cNvPr>
-          <p:cNvSpPr>
-            <a:spLocks noGrp="1"/>
-          </p:cNvSpPr>
-          <p:nvPr>
-            <p:ph type="dt" sz="half" idx="10"/>
-          </p:nvPr>
-        </p:nvSpPr>
-        <p:spPr/>
-        <p:txBody>
-          <a:bodyPr/>
-          <a:lstStyle/>
-          <a:p>
-            <a:pPr algn="ctr"/>
-            <a:r>
-              <a:rPr lang="en-US"/>
-              <a:t>DATE</a:t>
-            </a:r>
-            <a:endParaRPr lang="en-US" dirty="0"/>
-          </a:p>
-        </p:txBody>
-      </p:sp>
-      <p:sp>
-        <p:nvSpPr>
-          <p:cNvPr id="8" name="Footer Placeholder 7">
-            <a:extLst>
-              <a:ext uri="{FF2B5EF4-FFF2-40B4-BE49-F238E27FC236}">
-                <a16:creationId xmlns:a16="http://schemas.microsoft.com/office/drawing/2014/main" id="{FC227C7C-21CB-0721-ADC3-A51EEAD51D56}"/>
-              </a:ext>
-            </a:extLst>
-          </p:cNvPr>
-          <p:cNvSpPr>
-            <a:spLocks noGrp="1"/>
-          </p:cNvSpPr>
-          <p:nvPr>
-            <p:ph type="ftr" sz="quarter" idx="11"/>
-          </p:nvPr>
-        </p:nvSpPr>
-        <p:spPr/>
-        <p:txBody>
-          <a:bodyPr/>
-          <a:lstStyle/>
-          <a:p>
-            <a:r>
-              <a:rPr lang="en-US"/>
-              <a:t>© LMU Open Science Center</a:t>
-            </a:r>
-            <a:endParaRPr lang="en-US" dirty="0"/>
-          </a:p>
-        </p:txBody>
-      </p:sp>
-      <p:sp>
-        <p:nvSpPr>
-          <p:cNvPr id="9" name="Slide Number Placeholder 8">
-            <a:extLst>
-              <a:ext uri="{FF2B5EF4-FFF2-40B4-BE49-F238E27FC236}">
-                <a16:creationId xmlns:a16="http://schemas.microsoft.com/office/drawing/2014/main" id="{E630E53C-392D-BD97-174E-961B24066A76}"/>
-              </a:ext>
-            </a:extLst>
-          </p:cNvPr>
-          <p:cNvSpPr>
-            <a:spLocks noGrp="1"/>
-          </p:cNvSpPr>
-          <p:nvPr>
-            <p:ph type="sldNum" sz="quarter" idx="12"/>
-          </p:nvPr>
-        </p:nvSpPr>
-        <p:spPr/>
-        <p:txBody>
-          <a:bodyPr/>
-          <a:lstStyle/>
-          <a:p>
-            <a:pPr algn="ctr"/>
-            <a:r>
-              <a:rPr lang="en-US"/>
-              <a:t>Slide </a:t>
-            </a:r>
-            <a:fld id="{C5EF2332-01BF-834F-8236-50238282D533}" type="slidenum">
-              <a:rPr lang="en-US" smtClean="0"/>
-              <a:pPr algn="ctr"/>
-              <a:t>‹#›</a:t>
-            </a:fld>
-            <a:endParaRPr lang="en-US" dirty="0"/>
-          </a:p>
-        </p:txBody>
-      </p:sp>
-      <p:sp>
-        <p:nvSpPr>
           <p:cNvPr id="4" name="Rectangle 3">
             <a:extLst>
               <a:ext uri="{FF2B5EF4-FFF2-40B4-BE49-F238E27FC236}">
@@ -5741,6 +5627,95 @@
           <a:p>
             <a:pPr algn="ctr"/>
             <a:endParaRPr lang="en-US" sz="3200"/>
+          </a:p>
+        </p:txBody>
+      </p:sp>
+      <p:sp>
+        <p:nvSpPr>
+          <p:cNvPr id="5" name="Date Placeholder 4">
+            <a:extLst>
+              <a:ext uri="{FF2B5EF4-FFF2-40B4-BE49-F238E27FC236}">
+                <a16:creationId xmlns:a16="http://schemas.microsoft.com/office/drawing/2014/main" id="{CA956807-87AD-1B61-6635-A4BD697312DD}"/>
+              </a:ext>
+            </a:extLst>
+          </p:cNvPr>
+          <p:cNvSpPr>
+            <a:spLocks noGrp="1"/>
+          </p:cNvSpPr>
+          <p:nvPr>
+            <p:ph type="dt" sz="half" idx="10"/>
+          </p:nvPr>
+        </p:nvSpPr>
+        <p:spPr/>
+        <p:txBody>
+          <a:bodyPr/>
+          <a:lstStyle/>
+          <a:p>
+            <a:pPr algn="ctr"/>
+            <a:r>
+              <a:rPr lang="en-US"/>
+              <a:t>DATE</a:t>
+            </a:r>
+            <a:endParaRPr lang="en-US" dirty="0"/>
+          </a:p>
+        </p:txBody>
+      </p:sp>
+      <p:sp>
+        <p:nvSpPr>
+          <p:cNvPr id="6" name="Footer Placeholder 5">
+            <a:extLst>
+              <a:ext uri="{FF2B5EF4-FFF2-40B4-BE49-F238E27FC236}">
+                <a16:creationId xmlns:a16="http://schemas.microsoft.com/office/drawing/2014/main" id="{A848E190-73C6-8A24-D8B9-FC7B080DD00D}"/>
+              </a:ext>
+            </a:extLst>
+          </p:cNvPr>
+          <p:cNvSpPr>
+            <a:spLocks noGrp="1"/>
+          </p:cNvSpPr>
+          <p:nvPr>
+            <p:ph type="ftr" sz="quarter" idx="11"/>
+          </p:nvPr>
+        </p:nvSpPr>
+        <p:spPr/>
+        <p:txBody>
+          <a:bodyPr/>
+          <a:lstStyle/>
+          <a:p>
+            <a:r>
+              <a:rPr lang="en-US"/>
+              <a:t>© LMU Open Science Center</a:t>
+            </a:r>
+            <a:endParaRPr lang="en-US" dirty="0"/>
+          </a:p>
+        </p:txBody>
+      </p:sp>
+      <p:sp>
+        <p:nvSpPr>
+          <p:cNvPr id="10" name="Slide Number Placeholder 9">
+            <a:extLst>
+              <a:ext uri="{FF2B5EF4-FFF2-40B4-BE49-F238E27FC236}">
+                <a16:creationId xmlns:a16="http://schemas.microsoft.com/office/drawing/2014/main" id="{A4B39B83-B2B9-A607-75FD-CC4196FDAB48}"/>
+              </a:ext>
+            </a:extLst>
+          </p:cNvPr>
+          <p:cNvSpPr>
+            <a:spLocks noGrp="1"/>
+          </p:cNvSpPr>
+          <p:nvPr>
+            <p:ph type="sldNum" sz="quarter" idx="12"/>
+          </p:nvPr>
+        </p:nvSpPr>
+        <p:spPr/>
+        <p:txBody>
+          <a:bodyPr/>
+          <a:lstStyle/>
+          <a:p>
+            <a:fld id="{C5EF2332-01BF-834F-8236-50238282D533}" type="slidenum">
+              <a:rPr lang="en-US" smtClean="0"/>
+              <a:pPr/>
+              <a:t>‹#›</a:t>
+            </a:fld>
+            <a:endParaRPr lang="en-US" dirty="0"/>
           </a:p>
         </p:txBody>
       </p:sp>
@@ -5966,100 +5941,6 @@
       </p:sp>
       <p:sp>
         <p:nvSpPr>
-          <p:cNvPr id="8" name="Date Placeholder 7">
-            <a:extLst>
-              <a:ext uri="{FF2B5EF4-FFF2-40B4-BE49-F238E27FC236}">
-                <a16:creationId xmlns:a16="http://schemas.microsoft.com/office/drawing/2014/main" id="{53BFD42A-B99F-B332-F96E-677E56BC9A77}"/>
-              </a:ext>
-            </a:extLst>
-          </p:cNvPr>
-          <p:cNvSpPr>
-            <a:spLocks noGrp="1"/>
-          </p:cNvSpPr>
-          <p:nvPr>
-            <p:ph type="dt" sz="half" idx="10"/>
-          </p:nvPr>
-        </p:nvSpPr>
-        <p:spPr/>
-        <p:txBody>
-          <a:bodyPr/>
-          <a:lstStyle/>
-          <a:p>
-            <a:pPr algn="ctr"/>
-            <a:r>
-              <a:rPr lang="en-US"/>
-              <a:t>DATE</a:t>
-            </a:r>
-            <a:endParaRPr lang="en-US" dirty="0"/>
-          </a:p>
-        </p:txBody>
-      </p:sp>
-      <p:sp>
-        <p:nvSpPr>
-          <p:cNvPr id="9" name="Footer Placeholder 8">
-            <a:extLst>
-              <a:ext uri="{FF2B5EF4-FFF2-40B4-BE49-F238E27FC236}">
-                <a16:creationId xmlns:a16="http://schemas.microsoft.com/office/drawing/2014/main" id="{E7917CDB-D8CE-FB9A-9950-24117F9B85CA}"/>
-              </a:ext>
-            </a:extLst>
-          </p:cNvPr>
-          <p:cNvSpPr>
-            <a:spLocks noGrp="1"/>
-          </p:cNvSpPr>
-          <p:nvPr>
-            <p:ph type="ftr" sz="quarter" idx="11"/>
-          </p:nvPr>
-        </p:nvSpPr>
-        <p:spPr/>
-        <p:txBody>
-          <a:bodyPr/>
-          <a:lstStyle/>
-          <a:p>
-            <a:r>
-              <a:rPr lang="en-US"/>
-              <a:t>© LMU Open Science Center</a:t>
-            </a:r>
-            <a:endParaRPr lang="en-US" dirty="0"/>
-          </a:p>
-        </p:txBody>
-      </p:sp>
-      <p:sp>
-        <p:nvSpPr>
-          <p:cNvPr id="10" name="Slide Number Placeholder 9">
-            <a:extLst>
-              <a:ext uri="{FF2B5EF4-FFF2-40B4-BE49-F238E27FC236}">
-                <a16:creationId xmlns:a16="http://schemas.microsoft.com/office/drawing/2014/main" id="{761EF569-90C9-0E39-2DB2-EBF7BACC7581}"/>
-              </a:ext>
-            </a:extLst>
-          </p:cNvPr>
-          <p:cNvSpPr>
-            <a:spLocks noGrp="1"/>
-          </p:cNvSpPr>
-          <p:nvPr>
-            <p:ph type="sldNum" sz="quarter" idx="12"/>
-          </p:nvPr>
-        </p:nvSpPr>
-        <p:spPr/>
-        <p:txBody>
-          <a:bodyPr/>
-          <a:lstStyle/>
-          <a:p>
-            <a:pPr algn="ctr"/>
-            <a:r>
-              <a:rPr lang="en-US"/>
-              <a:t>Slide </a:t>
-            </a:r>
-            <a:fld id="{C5EF2332-01BF-834F-8236-50238282D533}" type="slidenum">
-              <a:rPr lang="en-US" smtClean="0"/>
-              <a:pPr algn="ctr"/>
-              <a:t>‹#›</a:t>
-            </a:fld>
-            <a:endParaRPr lang="en-US" dirty="0"/>
-          </a:p>
-        </p:txBody>
-      </p:sp>
-      <p:sp>
-        <p:nvSpPr>
           <p:cNvPr id="5" name="Rectangle 4">
             <a:extLst>
               <a:ext uri="{FF2B5EF4-FFF2-40B4-BE49-F238E27FC236}">
@@ -6105,6 +5986,95 @@
           <a:p>
             <a:pPr algn="ctr"/>
             <a:endParaRPr lang="en-US" sz="3200"/>
+          </a:p>
+        </p:txBody>
+      </p:sp>
+      <p:sp>
+        <p:nvSpPr>
+          <p:cNvPr id="6" name="Date Placeholder 5">
+            <a:extLst>
+              <a:ext uri="{FF2B5EF4-FFF2-40B4-BE49-F238E27FC236}">
+                <a16:creationId xmlns:a16="http://schemas.microsoft.com/office/drawing/2014/main" id="{DB9C105D-2DC4-B9F4-C1FE-2CAFAE38DB01}"/>
+              </a:ext>
+            </a:extLst>
+          </p:cNvPr>
+          <p:cNvSpPr>
+            <a:spLocks noGrp="1"/>
+          </p:cNvSpPr>
+          <p:nvPr>
+            <p:ph type="dt" sz="half" idx="10"/>
+          </p:nvPr>
+        </p:nvSpPr>
+        <p:spPr/>
+        <p:txBody>
+          <a:bodyPr/>
+          <a:lstStyle/>
+          <a:p>
+            <a:pPr algn="ctr"/>
+            <a:r>
+              <a:rPr lang="en-US"/>
+              <a:t>DATE</a:t>
+            </a:r>
+            <a:endParaRPr lang="en-US" dirty="0"/>
+          </a:p>
+        </p:txBody>
+      </p:sp>
+      <p:sp>
+        <p:nvSpPr>
+          <p:cNvPr id="7" name="Footer Placeholder 6">
+            <a:extLst>
+              <a:ext uri="{FF2B5EF4-FFF2-40B4-BE49-F238E27FC236}">
+                <a16:creationId xmlns:a16="http://schemas.microsoft.com/office/drawing/2014/main" id="{B6159A58-99BB-FD20-30B4-B65A749EE7DB}"/>
+              </a:ext>
+            </a:extLst>
+          </p:cNvPr>
+          <p:cNvSpPr>
+            <a:spLocks noGrp="1"/>
+          </p:cNvSpPr>
+          <p:nvPr>
+            <p:ph type="ftr" sz="quarter" idx="11"/>
+          </p:nvPr>
+        </p:nvSpPr>
+        <p:spPr/>
+        <p:txBody>
+          <a:bodyPr/>
+          <a:lstStyle/>
+          <a:p>
+            <a:r>
+              <a:rPr lang="en-US"/>
+              <a:t>© LMU Open Science Center</a:t>
+            </a:r>
+            <a:endParaRPr lang="en-US" dirty="0"/>
+          </a:p>
+        </p:txBody>
+      </p:sp>
+      <p:sp>
+        <p:nvSpPr>
+          <p:cNvPr id="11" name="Slide Number Placeholder 10">
+            <a:extLst>
+              <a:ext uri="{FF2B5EF4-FFF2-40B4-BE49-F238E27FC236}">
+                <a16:creationId xmlns:a16="http://schemas.microsoft.com/office/drawing/2014/main" id="{91EB764C-C70A-BBB6-D634-50E6464DB304}"/>
+              </a:ext>
+            </a:extLst>
+          </p:cNvPr>
+          <p:cNvSpPr>
+            <a:spLocks noGrp="1"/>
+          </p:cNvSpPr>
+          <p:nvPr>
+            <p:ph type="sldNum" sz="quarter" idx="12"/>
+          </p:nvPr>
+        </p:nvSpPr>
+        <p:spPr/>
+        <p:txBody>
+          <a:bodyPr/>
+          <a:lstStyle/>
+          <a:p>
+            <a:fld id="{C5EF2332-01BF-834F-8236-50238282D533}" type="slidenum">
+              <a:rPr lang="en-US" smtClean="0"/>
+              <a:pPr/>
+              <a:t>‹#›</a:t>
+            </a:fld>
+            <a:endParaRPr lang="en-US" dirty="0"/>
           </a:p>
         </p:txBody>
       </p:sp>
@@ -6464,100 +6434,6 @@
       </p:sp>
       <p:sp>
         <p:nvSpPr>
-          <p:cNvPr id="10" name="Date Placeholder 9">
-            <a:extLst>
-              <a:ext uri="{FF2B5EF4-FFF2-40B4-BE49-F238E27FC236}">
-                <a16:creationId xmlns:a16="http://schemas.microsoft.com/office/drawing/2014/main" id="{C6779744-BA8A-1AED-290E-865E62914D1E}"/>
-              </a:ext>
-            </a:extLst>
-          </p:cNvPr>
-          <p:cNvSpPr>
-            <a:spLocks noGrp="1"/>
-          </p:cNvSpPr>
-          <p:nvPr>
-            <p:ph type="dt" sz="half" idx="10"/>
-          </p:nvPr>
-        </p:nvSpPr>
-        <p:spPr/>
-        <p:txBody>
-          <a:bodyPr/>
-          <a:lstStyle/>
-          <a:p>
-            <a:pPr algn="ctr"/>
-            <a:r>
-              <a:rPr lang="en-US"/>
-              <a:t>DATE</a:t>
-            </a:r>
-            <a:endParaRPr lang="en-US" dirty="0"/>
-          </a:p>
-        </p:txBody>
-      </p:sp>
-      <p:sp>
-        <p:nvSpPr>
-          <p:cNvPr id="11" name="Footer Placeholder 10">
-            <a:extLst>
-              <a:ext uri="{FF2B5EF4-FFF2-40B4-BE49-F238E27FC236}">
-                <a16:creationId xmlns:a16="http://schemas.microsoft.com/office/drawing/2014/main" id="{1848E229-50B2-977A-CF44-3D42D1183372}"/>
-              </a:ext>
-            </a:extLst>
-          </p:cNvPr>
-          <p:cNvSpPr>
-            <a:spLocks noGrp="1"/>
-          </p:cNvSpPr>
-          <p:nvPr>
-            <p:ph type="ftr" sz="quarter" idx="11"/>
-          </p:nvPr>
-        </p:nvSpPr>
-        <p:spPr/>
-        <p:txBody>
-          <a:bodyPr/>
-          <a:lstStyle/>
-          <a:p>
-            <a:r>
-              <a:rPr lang="en-US"/>
-              <a:t>© LMU Open Science Center</a:t>
-            </a:r>
-            <a:endParaRPr lang="en-US" dirty="0"/>
-          </a:p>
-        </p:txBody>
-      </p:sp>
-      <p:sp>
-        <p:nvSpPr>
-          <p:cNvPr id="12" name="Slide Number Placeholder 11">
-            <a:extLst>
-              <a:ext uri="{FF2B5EF4-FFF2-40B4-BE49-F238E27FC236}">
-                <a16:creationId xmlns:a16="http://schemas.microsoft.com/office/drawing/2014/main" id="{20842B77-B6EE-65F3-DC92-E2534256F029}"/>
-              </a:ext>
-            </a:extLst>
-          </p:cNvPr>
-          <p:cNvSpPr>
-            <a:spLocks noGrp="1"/>
-          </p:cNvSpPr>
-          <p:nvPr>
-            <p:ph type="sldNum" sz="quarter" idx="12"/>
-          </p:nvPr>
-        </p:nvSpPr>
-        <p:spPr/>
-        <p:txBody>
-          <a:bodyPr/>
-          <a:lstStyle/>
-          <a:p>
-            <a:pPr algn="ctr"/>
-            <a:r>
-              <a:rPr lang="en-US"/>
-              <a:t>Slide </a:t>
-            </a:r>
-            <a:fld id="{C5EF2332-01BF-834F-8236-50238282D533}" type="slidenum">
-              <a:rPr lang="en-US" smtClean="0"/>
-              <a:pPr algn="ctr"/>
-              <a:t>‹#›</a:t>
-            </a:fld>
-            <a:endParaRPr lang="en-US" dirty="0"/>
-          </a:p>
-        </p:txBody>
-      </p:sp>
-      <p:sp>
-        <p:nvSpPr>
           <p:cNvPr id="7" name="Rectangle 6">
             <a:extLst>
               <a:ext uri="{FF2B5EF4-FFF2-40B4-BE49-F238E27FC236}">
@@ -6603,6 +6479,95 @@
           <a:p>
             <a:pPr algn="ctr"/>
             <a:endParaRPr lang="en-US" sz="3200"/>
+          </a:p>
+        </p:txBody>
+      </p:sp>
+      <p:sp>
+        <p:nvSpPr>
+          <p:cNvPr id="8" name="Date Placeholder 7">
+            <a:extLst>
+              <a:ext uri="{FF2B5EF4-FFF2-40B4-BE49-F238E27FC236}">
+                <a16:creationId xmlns:a16="http://schemas.microsoft.com/office/drawing/2014/main" id="{58100809-C7AD-AA37-7E54-5E07B4142DB5}"/>
+              </a:ext>
+            </a:extLst>
+          </p:cNvPr>
+          <p:cNvSpPr>
+            <a:spLocks noGrp="1"/>
+          </p:cNvSpPr>
+          <p:nvPr>
+            <p:ph type="dt" sz="half" idx="10"/>
+          </p:nvPr>
+        </p:nvSpPr>
+        <p:spPr/>
+        <p:txBody>
+          <a:bodyPr/>
+          <a:lstStyle/>
+          <a:p>
+            <a:pPr algn="ctr"/>
+            <a:r>
+              <a:rPr lang="en-US"/>
+              <a:t>DATE</a:t>
+            </a:r>
+            <a:endParaRPr lang="en-US" dirty="0"/>
+          </a:p>
+        </p:txBody>
+      </p:sp>
+      <p:sp>
+        <p:nvSpPr>
+          <p:cNvPr id="9" name="Footer Placeholder 8">
+            <a:extLst>
+              <a:ext uri="{FF2B5EF4-FFF2-40B4-BE49-F238E27FC236}">
+                <a16:creationId xmlns:a16="http://schemas.microsoft.com/office/drawing/2014/main" id="{780EC85D-71EC-E3EF-4192-AAB31D7B0AC3}"/>
+              </a:ext>
+            </a:extLst>
+          </p:cNvPr>
+          <p:cNvSpPr>
+            <a:spLocks noGrp="1"/>
+          </p:cNvSpPr>
+          <p:nvPr>
+            <p:ph type="ftr" sz="quarter" idx="11"/>
+          </p:nvPr>
+        </p:nvSpPr>
+        <p:spPr/>
+        <p:txBody>
+          <a:bodyPr/>
+          <a:lstStyle/>
+          <a:p>
+            <a:r>
+              <a:rPr lang="en-US"/>
+              <a:t>© LMU Open Science Center</a:t>
+            </a:r>
+            <a:endParaRPr lang="en-US" dirty="0"/>
+          </a:p>
+        </p:txBody>
+      </p:sp>
+      <p:sp>
+        <p:nvSpPr>
+          <p:cNvPr id="13" name="Slide Number Placeholder 12">
+            <a:extLst>
+              <a:ext uri="{FF2B5EF4-FFF2-40B4-BE49-F238E27FC236}">
+                <a16:creationId xmlns:a16="http://schemas.microsoft.com/office/drawing/2014/main" id="{76473786-B1D7-CA2F-C7C4-09172E081B28}"/>
+              </a:ext>
+            </a:extLst>
+          </p:cNvPr>
+          <p:cNvSpPr>
+            <a:spLocks noGrp="1"/>
+          </p:cNvSpPr>
+          <p:nvPr>
+            <p:ph type="sldNum" sz="quarter" idx="12"/>
+          </p:nvPr>
+        </p:nvSpPr>
+        <p:spPr/>
+        <p:txBody>
+          <a:bodyPr/>
+          <a:lstStyle/>
+          <a:p>
+            <a:fld id="{C5EF2332-01BF-834F-8236-50238282D533}" type="slidenum">
+              <a:rPr lang="en-US" smtClean="0"/>
+              <a:pPr/>
+              <a:t>‹#›</a:t>
+            </a:fld>
+            <a:endParaRPr lang="en-US" dirty="0"/>
           </a:p>
         </p:txBody>
       </p:sp>
@@ -6660,100 +6625,6 @@
       </p:sp>
       <p:sp>
         <p:nvSpPr>
-          <p:cNvPr id="6" name="Date Placeholder 5">
-            <a:extLst>
-              <a:ext uri="{FF2B5EF4-FFF2-40B4-BE49-F238E27FC236}">
-                <a16:creationId xmlns:a16="http://schemas.microsoft.com/office/drawing/2014/main" id="{EBAFF52C-BDE9-B757-3F2E-97BB80768043}"/>
-              </a:ext>
-            </a:extLst>
-          </p:cNvPr>
-          <p:cNvSpPr>
-            <a:spLocks noGrp="1"/>
-          </p:cNvSpPr>
-          <p:nvPr>
-            <p:ph type="dt" sz="half" idx="10"/>
-          </p:nvPr>
-        </p:nvSpPr>
-        <p:spPr/>
-        <p:txBody>
-          <a:bodyPr/>
-          <a:lstStyle/>
-          <a:p>
-            <a:pPr algn="ctr"/>
-            <a:r>
-              <a:rPr lang="en-US"/>
-              <a:t>DATE</a:t>
-            </a:r>
-            <a:endParaRPr lang="en-US" dirty="0"/>
-          </a:p>
-        </p:txBody>
-      </p:sp>
-      <p:sp>
-        <p:nvSpPr>
-          <p:cNvPr id="7" name="Footer Placeholder 6">
-            <a:extLst>
-              <a:ext uri="{FF2B5EF4-FFF2-40B4-BE49-F238E27FC236}">
-                <a16:creationId xmlns:a16="http://schemas.microsoft.com/office/drawing/2014/main" id="{E5405DF6-2DBE-DEB9-2870-BF132FA011E6}"/>
-              </a:ext>
-            </a:extLst>
-          </p:cNvPr>
-          <p:cNvSpPr>
-            <a:spLocks noGrp="1"/>
-          </p:cNvSpPr>
-          <p:nvPr>
-            <p:ph type="ftr" sz="quarter" idx="11"/>
-          </p:nvPr>
-        </p:nvSpPr>
-        <p:spPr/>
-        <p:txBody>
-          <a:bodyPr/>
-          <a:lstStyle/>
-          <a:p>
-            <a:r>
-              <a:rPr lang="en-US"/>
-              <a:t>© LMU Open Science Center</a:t>
-            </a:r>
-            <a:endParaRPr lang="en-US" dirty="0"/>
-          </a:p>
-        </p:txBody>
-      </p:sp>
-      <p:sp>
-        <p:nvSpPr>
-          <p:cNvPr id="8" name="Slide Number Placeholder 7">
-            <a:extLst>
-              <a:ext uri="{FF2B5EF4-FFF2-40B4-BE49-F238E27FC236}">
-                <a16:creationId xmlns:a16="http://schemas.microsoft.com/office/drawing/2014/main" id="{2168DBF4-2CFD-1E51-8AC7-982150A40374}"/>
-              </a:ext>
-            </a:extLst>
-          </p:cNvPr>
-          <p:cNvSpPr>
-            <a:spLocks noGrp="1"/>
-          </p:cNvSpPr>
-          <p:nvPr>
-            <p:ph type="sldNum" sz="quarter" idx="12"/>
-          </p:nvPr>
-        </p:nvSpPr>
-        <p:spPr/>
-        <p:txBody>
-          <a:bodyPr/>
-          <a:lstStyle/>
-          <a:p>
-            <a:pPr algn="ctr"/>
-            <a:r>
-              <a:rPr lang="en-US"/>
-              <a:t>Slide </a:t>
-            </a:r>
-            <a:fld id="{C5EF2332-01BF-834F-8236-50238282D533}" type="slidenum">
-              <a:rPr lang="en-US" smtClean="0"/>
-              <a:pPr algn="ctr"/>
-              <a:t>‹#›</a:t>
-            </a:fld>
-            <a:endParaRPr lang="en-US" dirty="0"/>
-          </a:p>
-        </p:txBody>
-      </p:sp>
-      <p:sp>
-        <p:nvSpPr>
           <p:cNvPr id="3" name="Rectangle 2">
             <a:extLst>
               <a:ext uri="{FF2B5EF4-FFF2-40B4-BE49-F238E27FC236}">
@@ -6799,6 +6670,95 @@
           <a:p>
             <a:pPr algn="ctr"/>
             <a:endParaRPr lang="en-US" sz="3200"/>
+          </a:p>
+        </p:txBody>
+      </p:sp>
+      <p:sp>
+        <p:nvSpPr>
+          <p:cNvPr id="4" name="Date Placeholder 3">
+            <a:extLst>
+              <a:ext uri="{FF2B5EF4-FFF2-40B4-BE49-F238E27FC236}">
+                <a16:creationId xmlns:a16="http://schemas.microsoft.com/office/drawing/2014/main" id="{B77221D3-5266-DD6F-83AC-F0960F93CB40}"/>
+              </a:ext>
+            </a:extLst>
+          </p:cNvPr>
+          <p:cNvSpPr>
+            <a:spLocks noGrp="1"/>
+          </p:cNvSpPr>
+          <p:nvPr>
+            <p:ph type="dt" sz="half" idx="10"/>
+          </p:nvPr>
+        </p:nvSpPr>
+        <p:spPr/>
+        <p:txBody>
+          <a:bodyPr/>
+          <a:lstStyle/>
+          <a:p>
+            <a:pPr algn="ctr"/>
+            <a:r>
+              <a:rPr lang="en-US"/>
+              <a:t>DATE</a:t>
+            </a:r>
+            <a:endParaRPr lang="en-US" dirty="0"/>
+          </a:p>
+        </p:txBody>
+      </p:sp>
+      <p:sp>
+        <p:nvSpPr>
+          <p:cNvPr id="5" name="Footer Placeholder 4">
+            <a:extLst>
+              <a:ext uri="{FF2B5EF4-FFF2-40B4-BE49-F238E27FC236}">
+                <a16:creationId xmlns:a16="http://schemas.microsoft.com/office/drawing/2014/main" id="{DDEB8BF7-B98F-B2C1-BBC4-836DAD84D3E3}"/>
+              </a:ext>
+            </a:extLst>
+          </p:cNvPr>
+          <p:cNvSpPr>
+            <a:spLocks noGrp="1"/>
+          </p:cNvSpPr>
+          <p:nvPr>
+            <p:ph type="ftr" sz="quarter" idx="11"/>
+          </p:nvPr>
+        </p:nvSpPr>
+        <p:spPr/>
+        <p:txBody>
+          <a:bodyPr/>
+          <a:lstStyle/>
+          <a:p>
+            <a:r>
+              <a:rPr lang="en-US"/>
+              <a:t>© LMU Open Science Center</a:t>
+            </a:r>
+            <a:endParaRPr lang="en-US" dirty="0"/>
+          </a:p>
+        </p:txBody>
+      </p:sp>
+      <p:sp>
+        <p:nvSpPr>
+          <p:cNvPr id="9" name="Slide Number Placeholder 8">
+            <a:extLst>
+              <a:ext uri="{FF2B5EF4-FFF2-40B4-BE49-F238E27FC236}">
+                <a16:creationId xmlns:a16="http://schemas.microsoft.com/office/drawing/2014/main" id="{65B4E053-B4BD-4273-20F1-F1F6E73ED32B}"/>
+              </a:ext>
+            </a:extLst>
+          </p:cNvPr>
+          <p:cNvSpPr>
+            <a:spLocks noGrp="1"/>
+          </p:cNvSpPr>
+          <p:nvPr>
+            <p:ph type="sldNum" sz="quarter" idx="12"/>
+          </p:nvPr>
+        </p:nvSpPr>
+        <p:spPr/>
+        <p:txBody>
+          <a:bodyPr/>
+          <a:lstStyle/>
+          <a:p>
+            <a:fld id="{C5EF2332-01BF-834F-8236-50238282D533}" type="slidenum">
+              <a:rPr lang="en-US" smtClean="0"/>
+              <a:pPr/>
+              <a:t>‹#›</a:t>
+            </a:fld>
+            <a:endParaRPr lang="en-US" dirty="0"/>
           </a:p>
         </p:txBody>
       </p:sp>
@@ -6834,100 +6794,6 @@
       </p:grpSpPr>
       <p:sp>
         <p:nvSpPr>
-          <p:cNvPr id="5" name="Date Placeholder 4">
-            <a:extLst>
-              <a:ext uri="{FF2B5EF4-FFF2-40B4-BE49-F238E27FC236}">
-                <a16:creationId xmlns:a16="http://schemas.microsoft.com/office/drawing/2014/main" id="{809DEAED-D9B3-6E1B-0491-58CD791C90BA}"/>
-              </a:ext>
-            </a:extLst>
-          </p:cNvPr>
-          <p:cNvSpPr>
-            <a:spLocks noGrp="1"/>
-          </p:cNvSpPr>
-          <p:nvPr>
-            <p:ph type="dt" sz="half" idx="10"/>
-          </p:nvPr>
-        </p:nvSpPr>
-        <p:spPr/>
-        <p:txBody>
-          <a:bodyPr/>
-          <a:lstStyle/>
-          <a:p>
-            <a:pPr algn="ctr"/>
-            <a:r>
-              <a:rPr lang="en-US"/>
-              <a:t>DATE</a:t>
-            </a:r>
-            <a:endParaRPr lang="en-US" dirty="0"/>
-          </a:p>
-        </p:txBody>
-      </p:sp>
-      <p:sp>
-        <p:nvSpPr>
-          <p:cNvPr id="6" name="Footer Placeholder 5">
-            <a:extLst>
-              <a:ext uri="{FF2B5EF4-FFF2-40B4-BE49-F238E27FC236}">
-                <a16:creationId xmlns:a16="http://schemas.microsoft.com/office/drawing/2014/main" id="{77F0CD55-CE9E-DB6C-0EC3-1B10A9E5C45B}"/>
-              </a:ext>
-            </a:extLst>
-          </p:cNvPr>
-          <p:cNvSpPr>
-            <a:spLocks noGrp="1"/>
-          </p:cNvSpPr>
-          <p:nvPr>
-            <p:ph type="ftr" sz="quarter" idx="11"/>
-          </p:nvPr>
-        </p:nvSpPr>
-        <p:spPr/>
-        <p:txBody>
-          <a:bodyPr/>
-          <a:lstStyle/>
-          <a:p>
-            <a:r>
-              <a:rPr lang="en-US"/>
-              <a:t>© LMU Open Science Center</a:t>
-            </a:r>
-            <a:endParaRPr lang="en-US" dirty="0"/>
-          </a:p>
-        </p:txBody>
-      </p:sp>
-      <p:sp>
-        <p:nvSpPr>
-          <p:cNvPr id="7" name="Slide Number Placeholder 6">
-            <a:extLst>
-              <a:ext uri="{FF2B5EF4-FFF2-40B4-BE49-F238E27FC236}">
-                <a16:creationId xmlns:a16="http://schemas.microsoft.com/office/drawing/2014/main" id="{E9FEDD56-48D3-8D4B-FA52-B62AB7006E2A}"/>
-              </a:ext>
-            </a:extLst>
-          </p:cNvPr>
-          <p:cNvSpPr>
-            <a:spLocks noGrp="1"/>
-          </p:cNvSpPr>
-          <p:nvPr>
-            <p:ph type="sldNum" sz="quarter" idx="12"/>
-          </p:nvPr>
-        </p:nvSpPr>
-        <p:spPr/>
-        <p:txBody>
-          <a:bodyPr/>
-          <a:lstStyle/>
-          <a:p>
-            <a:pPr algn="ctr"/>
-            <a:r>
-              <a:rPr lang="en-US"/>
-              <a:t>Slide </a:t>
-            </a:r>
-            <a:fld id="{C5EF2332-01BF-834F-8236-50238282D533}" type="slidenum">
-              <a:rPr lang="en-US" smtClean="0"/>
-              <a:pPr algn="ctr"/>
-              <a:t>‹#›</a:t>
-            </a:fld>
-            <a:endParaRPr lang="en-US" dirty="0"/>
-          </a:p>
-        </p:txBody>
-      </p:sp>
-      <p:sp>
-        <p:nvSpPr>
           <p:cNvPr id="2" name="Rectangle 1">
             <a:extLst>
               <a:ext uri="{FF2B5EF4-FFF2-40B4-BE49-F238E27FC236}">
@@ -6973,6 +6839,95 @@
           <a:p>
             <a:pPr algn="ctr"/>
             <a:endParaRPr lang="en-US" sz="3200"/>
+          </a:p>
+        </p:txBody>
+      </p:sp>
+      <p:sp>
+        <p:nvSpPr>
+          <p:cNvPr id="3" name="Date Placeholder 2">
+            <a:extLst>
+              <a:ext uri="{FF2B5EF4-FFF2-40B4-BE49-F238E27FC236}">
+                <a16:creationId xmlns:a16="http://schemas.microsoft.com/office/drawing/2014/main" id="{A524AD1A-09DE-80F2-211E-50D2602CBB2F}"/>
+              </a:ext>
+            </a:extLst>
+          </p:cNvPr>
+          <p:cNvSpPr>
+            <a:spLocks noGrp="1"/>
+          </p:cNvSpPr>
+          <p:nvPr>
+            <p:ph type="dt" sz="half" idx="10"/>
+          </p:nvPr>
+        </p:nvSpPr>
+        <p:spPr/>
+        <p:txBody>
+          <a:bodyPr/>
+          <a:lstStyle/>
+          <a:p>
+            <a:pPr algn="ctr"/>
+            <a:r>
+              <a:rPr lang="en-US"/>
+              <a:t>DATE</a:t>
+            </a:r>
+            <a:endParaRPr lang="en-US" dirty="0"/>
+          </a:p>
+        </p:txBody>
+      </p:sp>
+      <p:sp>
+        <p:nvSpPr>
+          <p:cNvPr id="4" name="Footer Placeholder 3">
+            <a:extLst>
+              <a:ext uri="{FF2B5EF4-FFF2-40B4-BE49-F238E27FC236}">
+                <a16:creationId xmlns:a16="http://schemas.microsoft.com/office/drawing/2014/main" id="{C64D603C-1DE0-937A-1F64-CF31D2545F5B}"/>
+              </a:ext>
+            </a:extLst>
+          </p:cNvPr>
+          <p:cNvSpPr>
+            <a:spLocks noGrp="1"/>
+          </p:cNvSpPr>
+          <p:nvPr>
+            <p:ph type="ftr" sz="quarter" idx="11"/>
+          </p:nvPr>
+        </p:nvSpPr>
+        <p:spPr/>
+        <p:txBody>
+          <a:bodyPr/>
+          <a:lstStyle/>
+          <a:p>
+            <a:r>
+              <a:rPr lang="en-US"/>
+              <a:t>© LMU Open Science Center</a:t>
+            </a:r>
+            <a:endParaRPr lang="en-US" dirty="0"/>
+          </a:p>
+        </p:txBody>
+      </p:sp>
+      <p:sp>
+        <p:nvSpPr>
+          <p:cNvPr id="8" name="Slide Number Placeholder 7">
+            <a:extLst>
+              <a:ext uri="{FF2B5EF4-FFF2-40B4-BE49-F238E27FC236}">
+                <a16:creationId xmlns:a16="http://schemas.microsoft.com/office/drawing/2014/main" id="{659CFA45-E807-CF9C-9148-21ED45D59DB5}"/>
+              </a:ext>
+            </a:extLst>
+          </p:cNvPr>
+          <p:cNvSpPr>
+            <a:spLocks noGrp="1"/>
+          </p:cNvSpPr>
+          <p:nvPr>
+            <p:ph type="sldNum" sz="quarter" idx="12"/>
+          </p:nvPr>
+        </p:nvSpPr>
+        <p:spPr/>
+        <p:txBody>
+          <a:bodyPr/>
+          <a:lstStyle/>
+          <a:p>
+            <a:fld id="{C5EF2332-01BF-834F-8236-50238282D533}" type="slidenum">
+              <a:rPr lang="en-US" smtClean="0"/>
+              <a:pPr/>
+              <a:t>‹#›</a:t>
+            </a:fld>
+            <a:endParaRPr lang="en-US" dirty="0"/>
           </a:p>
         </p:txBody>
       </p:sp>
@@ -7188,100 +7143,6 @@
       </p:sp>
       <p:sp>
         <p:nvSpPr>
-          <p:cNvPr id="8" name="Date Placeholder 7">
-            <a:extLst>
-              <a:ext uri="{FF2B5EF4-FFF2-40B4-BE49-F238E27FC236}">
-                <a16:creationId xmlns:a16="http://schemas.microsoft.com/office/drawing/2014/main" id="{E6D5126F-053F-910F-7F76-D928AC61372D}"/>
-              </a:ext>
-            </a:extLst>
-          </p:cNvPr>
-          <p:cNvSpPr>
-            <a:spLocks noGrp="1"/>
-          </p:cNvSpPr>
-          <p:nvPr>
-            <p:ph type="dt" sz="half" idx="10"/>
-          </p:nvPr>
-        </p:nvSpPr>
-        <p:spPr/>
-        <p:txBody>
-          <a:bodyPr/>
-          <a:lstStyle/>
-          <a:p>
-            <a:pPr algn="ctr"/>
-            <a:r>
-              <a:rPr lang="en-US"/>
-              <a:t>DATE</a:t>
-            </a:r>
-            <a:endParaRPr lang="en-US" dirty="0"/>
-          </a:p>
-        </p:txBody>
-      </p:sp>
-      <p:sp>
-        <p:nvSpPr>
-          <p:cNvPr id="9" name="Footer Placeholder 8">
-            <a:extLst>
-              <a:ext uri="{FF2B5EF4-FFF2-40B4-BE49-F238E27FC236}">
-                <a16:creationId xmlns:a16="http://schemas.microsoft.com/office/drawing/2014/main" id="{8EEF7D04-FF72-0698-CE48-A9A4F70D774F}"/>
-              </a:ext>
-            </a:extLst>
-          </p:cNvPr>
-          <p:cNvSpPr>
-            <a:spLocks noGrp="1"/>
-          </p:cNvSpPr>
-          <p:nvPr>
-            <p:ph type="ftr" sz="quarter" idx="11"/>
-          </p:nvPr>
-        </p:nvSpPr>
-        <p:spPr/>
-        <p:txBody>
-          <a:bodyPr/>
-          <a:lstStyle/>
-          <a:p>
-            <a:r>
-              <a:rPr lang="en-US"/>
-              <a:t>© LMU Open Science Center</a:t>
-            </a:r>
-            <a:endParaRPr lang="en-US" dirty="0"/>
-          </a:p>
-        </p:txBody>
-      </p:sp>
-      <p:sp>
-        <p:nvSpPr>
-          <p:cNvPr id="10" name="Slide Number Placeholder 9">
-            <a:extLst>
-              <a:ext uri="{FF2B5EF4-FFF2-40B4-BE49-F238E27FC236}">
-                <a16:creationId xmlns:a16="http://schemas.microsoft.com/office/drawing/2014/main" id="{C8B1F07D-59FC-87D1-1BB5-7C86711059AF}"/>
-              </a:ext>
-            </a:extLst>
-          </p:cNvPr>
-          <p:cNvSpPr>
-            <a:spLocks noGrp="1"/>
-          </p:cNvSpPr>
-          <p:nvPr>
-            <p:ph type="sldNum" sz="quarter" idx="12"/>
-          </p:nvPr>
-        </p:nvSpPr>
-        <p:spPr/>
-        <p:txBody>
-          <a:bodyPr/>
-          <a:lstStyle/>
-          <a:p>
-            <a:pPr algn="ctr"/>
-            <a:r>
-              <a:rPr lang="en-US"/>
-              <a:t>Slide </a:t>
-            </a:r>
-            <a:fld id="{C5EF2332-01BF-834F-8236-50238282D533}" type="slidenum">
-              <a:rPr lang="en-US" smtClean="0"/>
-              <a:pPr algn="ctr"/>
-              <a:t>‹#›</a:t>
-            </a:fld>
-            <a:endParaRPr lang="en-US" dirty="0"/>
-          </a:p>
-        </p:txBody>
-      </p:sp>
-      <p:sp>
-        <p:nvSpPr>
           <p:cNvPr id="5" name="Rectangle 4">
             <a:extLst>
               <a:ext uri="{FF2B5EF4-FFF2-40B4-BE49-F238E27FC236}">
@@ -7327,6 +7188,95 @@
           <a:p>
             <a:pPr algn="ctr"/>
             <a:endParaRPr lang="en-US" sz="3200"/>
+          </a:p>
+        </p:txBody>
+      </p:sp>
+      <p:sp>
+        <p:nvSpPr>
+          <p:cNvPr id="6" name="Date Placeholder 5">
+            <a:extLst>
+              <a:ext uri="{FF2B5EF4-FFF2-40B4-BE49-F238E27FC236}">
+                <a16:creationId xmlns:a16="http://schemas.microsoft.com/office/drawing/2014/main" id="{4D4823E0-4AC4-556E-D341-7EC0B24627F1}"/>
+              </a:ext>
+            </a:extLst>
+          </p:cNvPr>
+          <p:cNvSpPr>
+            <a:spLocks noGrp="1"/>
+          </p:cNvSpPr>
+          <p:nvPr>
+            <p:ph type="dt" sz="half" idx="10"/>
+          </p:nvPr>
+        </p:nvSpPr>
+        <p:spPr/>
+        <p:txBody>
+          <a:bodyPr/>
+          <a:lstStyle/>
+          <a:p>
+            <a:pPr algn="ctr"/>
+            <a:r>
+              <a:rPr lang="en-US"/>
+              <a:t>DATE</a:t>
+            </a:r>
+            <a:endParaRPr lang="en-US" dirty="0"/>
+          </a:p>
+        </p:txBody>
+      </p:sp>
+      <p:sp>
+        <p:nvSpPr>
+          <p:cNvPr id="7" name="Footer Placeholder 6">
+            <a:extLst>
+              <a:ext uri="{FF2B5EF4-FFF2-40B4-BE49-F238E27FC236}">
+                <a16:creationId xmlns:a16="http://schemas.microsoft.com/office/drawing/2014/main" id="{DA033808-7DA7-BCE5-7841-A080B9791E38}"/>
+              </a:ext>
+            </a:extLst>
+          </p:cNvPr>
+          <p:cNvSpPr>
+            <a:spLocks noGrp="1"/>
+          </p:cNvSpPr>
+          <p:nvPr>
+            <p:ph type="ftr" sz="quarter" idx="11"/>
+          </p:nvPr>
+        </p:nvSpPr>
+        <p:spPr/>
+        <p:txBody>
+          <a:bodyPr/>
+          <a:lstStyle/>
+          <a:p>
+            <a:r>
+              <a:rPr lang="en-US"/>
+              <a:t>© LMU Open Science Center</a:t>
+            </a:r>
+            <a:endParaRPr lang="en-US" dirty="0"/>
+          </a:p>
+        </p:txBody>
+      </p:sp>
+      <p:sp>
+        <p:nvSpPr>
+          <p:cNvPr id="11" name="Slide Number Placeholder 10">
+            <a:extLst>
+              <a:ext uri="{FF2B5EF4-FFF2-40B4-BE49-F238E27FC236}">
+                <a16:creationId xmlns:a16="http://schemas.microsoft.com/office/drawing/2014/main" id="{F114B9F3-9BDF-91CE-CDEA-A368776345DA}"/>
+              </a:ext>
+            </a:extLst>
+          </p:cNvPr>
+          <p:cNvSpPr>
+            <a:spLocks noGrp="1"/>
+          </p:cNvSpPr>
+          <p:nvPr>
+            <p:ph type="sldNum" sz="quarter" idx="12"/>
+          </p:nvPr>
+        </p:nvSpPr>
+        <p:spPr/>
+        <p:txBody>
+          <a:bodyPr/>
+          <a:lstStyle/>
+          <a:p>
+            <a:fld id="{C5EF2332-01BF-834F-8236-50238282D533}" type="slidenum">
+              <a:rPr lang="en-US" smtClean="0"/>
+              <a:pPr/>
+              <a:t>‹#›</a:t>
+            </a:fld>
+            <a:endParaRPr lang="en-US" dirty="0"/>
           </a:p>
         </p:txBody>
       </p:sp>
@@ -7519,100 +7469,6 @@
       </p:sp>
       <p:sp>
         <p:nvSpPr>
-          <p:cNvPr id="8" name="Date Placeholder 7">
-            <a:extLst>
-              <a:ext uri="{FF2B5EF4-FFF2-40B4-BE49-F238E27FC236}">
-                <a16:creationId xmlns:a16="http://schemas.microsoft.com/office/drawing/2014/main" id="{29EE7C5F-ABAD-CC52-7A14-40327B8307C5}"/>
-              </a:ext>
-            </a:extLst>
-          </p:cNvPr>
-          <p:cNvSpPr>
-            <a:spLocks noGrp="1"/>
-          </p:cNvSpPr>
-          <p:nvPr>
-            <p:ph type="dt" sz="half" idx="10"/>
-          </p:nvPr>
-        </p:nvSpPr>
-        <p:spPr/>
-        <p:txBody>
-          <a:bodyPr/>
-          <a:lstStyle/>
-          <a:p>
-            <a:pPr algn="ctr"/>
-            <a:r>
-              <a:rPr lang="en-US"/>
-              <a:t>DATE</a:t>
-            </a:r>
-            <a:endParaRPr lang="en-US" dirty="0"/>
-          </a:p>
-        </p:txBody>
-      </p:sp>
-      <p:sp>
-        <p:nvSpPr>
-          <p:cNvPr id="9" name="Footer Placeholder 8">
-            <a:extLst>
-              <a:ext uri="{FF2B5EF4-FFF2-40B4-BE49-F238E27FC236}">
-                <a16:creationId xmlns:a16="http://schemas.microsoft.com/office/drawing/2014/main" id="{DB013600-FEC1-B326-2FA5-44299E5168AB}"/>
-              </a:ext>
-            </a:extLst>
-          </p:cNvPr>
-          <p:cNvSpPr>
-            <a:spLocks noGrp="1"/>
-          </p:cNvSpPr>
-          <p:nvPr>
-            <p:ph type="ftr" sz="quarter" idx="11"/>
-          </p:nvPr>
-        </p:nvSpPr>
-        <p:spPr/>
-        <p:txBody>
-          <a:bodyPr/>
-          <a:lstStyle/>
-          <a:p>
-            <a:r>
-              <a:rPr lang="en-US"/>
-              <a:t>© LMU Open Science Center</a:t>
-            </a:r>
-            <a:endParaRPr lang="en-US" dirty="0"/>
-          </a:p>
-        </p:txBody>
-      </p:sp>
-      <p:sp>
-        <p:nvSpPr>
-          <p:cNvPr id="10" name="Slide Number Placeholder 9">
-            <a:extLst>
-              <a:ext uri="{FF2B5EF4-FFF2-40B4-BE49-F238E27FC236}">
-                <a16:creationId xmlns:a16="http://schemas.microsoft.com/office/drawing/2014/main" id="{15CA6B3C-BACA-8A65-B5EF-54019213DBD8}"/>
-              </a:ext>
-            </a:extLst>
-          </p:cNvPr>
-          <p:cNvSpPr>
-            <a:spLocks noGrp="1"/>
-          </p:cNvSpPr>
-          <p:nvPr>
-            <p:ph type="sldNum" sz="quarter" idx="12"/>
-          </p:nvPr>
-        </p:nvSpPr>
-        <p:spPr/>
-        <p:txBody>
-          <a:bodyPr/>
-          <a:lstStyle/>
-          <a:p>
-            <a:pPr algn="ctr"/>
-            <a:r>
-              <a:rPr lang="en-US"/>
-              <a:t>Slide </a:t>
-            </a:r>
-            <a:fld id="{C5EF2332-01BF-834F-8236-50238282D533}" type="slidenum">
-              <a:rPr lang="en-US" smtClean="0"/>
-              <a:pPr algn="ctr"/>
-              <a:t>‹#›</a:t>
-            </a:fld>
-            <a:endParaRPr lang="en-US" dirty="0"/>
-          </a:p>
-        </p:txBody>
-      </p:sp>
-      <p:sp>
-        <p:nvSpPr>
           <p:cNvPr id="5" name="Rectangle 4">
             <a:extLst>
               <a:ext uri="{FF2B5EF4-FFF2-40B4-BE49-F238E27FC236}">
@@ -7658,6 +7514,95 @@
           <a:p>
             <a:pPr algn="ctr"/>
             <a:endParaRPr lang="en-US" sz="3200"/>
+          </a:p>
+        </p:txBody>
+      </p:sp>
+      <p:sp>
+        <p:nvSpPr>
+          <p:cNvPr id="6" name="Date Placeholder 5">
+            <a:extLst>
+              <a:ext uri="{FF2B5EF4-FFF2-40B4-BE49-F238E27FC236}">
+                <a16:creationId xmlns:a16="http://schemas.microsoft.com/office/drawing/2014/main" id="{BEDD9C9F-3905-36C7-15CB-BACF4406BE2F}"/>
+              </a:ext>
+            </a:extLst>
+          </p:cNvPr>
+          <p:cNvSpPr>
+            <a:spLocks noGrp="1"/>
+          </p:cNvSpPr>
+          <p:nvPr>
+            <p:ph type="dt" sz="half" idx="10"/>
+          </p:nvPr>
+        </p:nvSpPr>
+        <p:spPr/>
+        <p:txBody>
+          <a:bodyPr/>
+          <a:lstStyle/>
+          <a:p>
+            <a:pPr algn="ctr"/>
+            <a:r>
+              <a:rPr lang="en-US"/>
+              <a:t>DATE</a:t>
+            </a:r>
+            <a:endParaRPr lang="en-US" dirty="0"/>
+          </a:p>
+        </p:txBody>
+      </p:sp>
+      <p:sp>
+        <p:nvSpPr>
+          <p:cNvPr id="7" name="Footer Placeholder 6">
+            <a:extLst>
+              <a:ext uri="{FF2B5EF4-FFF2-40B4-BE49-F238E27FC236}">
+                <a16:creationId xmlns:a16="http://schemas.microsoft.com/office/drawing/2014/main" id="{FB50E993-3E74-7605-4B1C-089FC5994AF0}"/>
+              </a:ext>
+            </a:extLst>
+          </p:cNvPr>
+          <p:cNvSpPr>
+            <a:spLocks noGrp="1"/>
+          </p:cNvSpPr>
+          <p:nvPr>
+            <p:ph type="ftr" sz="quarter" idx="11"/>
+          </p:nvPr>
+        </p:nvSpPr>
+        <p:spPr/>
+        <p:txBody>
+          <a:bodyPr/>
+          <a:lstStyle/>
+          <a:p>
+            <a:r>
+              <a:rPr lang="en-US"/>
+              <a:t>© LMU Open Science Center</a:t>
+            </a:r>
+            <a:endParaRPr lang="en-US" dirty="0"/>
+          </a:p>
+        </p:txBody>
+      </p:sp>
+      <p:sp>
+        <p:nvSpPr>
+          <p:cNvPr id="11" name="Slide Number Placeholder 10">
+            <a:extLst>
+              <a:ext uri="{FF2B5EF4-FFF2-40B4-BE49-F238E27FC236}">
+                <a16:creationId xmlns:a16="http://schemas.microsoft.com/office/drawing/2014/main" id="{AA2A021D-E01D-7241-598C-56E146616C09}"/>
+              </a:ext>
+            </a:extLst>
+          </p:cNvPr>
+          <p:cNvSpPr>
+            <a:spLocks noGrp="1"/>
+          </p:cNvSpPr>
+          <p:nvPr>
+            <p:ph type="sldNum" sz="quarter" idx="12"/>
+          </p:nvPr>
+        </p:nvSpPr>
+        <p:spPr/>
+        <p:txBody>
+          <a:bodyPr/>
+          <a:lstStyle/>
+          <a:p>
+            <a:fld id="{C5EF2332-01BF-834F-8236-50238282D533}" type="slidenum">
+              <a:rPr lang="en-US" smtClean="0"/>
+              <a:pPr/>
+              <a:t>‹#›</a:t>
+            </a:fld>
+            <a:endParaRPr lang="en-US" dirty="0"/>
           </a:p>
         </p:txBody>
       </p:sp>
@@ -7883,7 +7828,7 @@
         </p:nvSpPr>
         <p:spPr>
           <a:xfrm>
-            <a:off x="7712559" y="6365488"/>
+            <a:off x="9763932" y="6365488"/>
             <a:ext cx="1818468" cy="298453"/>
           </a:xfrm>
           <a:prstGeom prst="rect">
@@ -7904,14 +7849,9 @@
             </a:lvl1pPr>
           </a:lstStyle>
           <a:p>
-            <a:pPr algn="ctr"/>
-            <a:r>
-              <a:rPr dirty="0" lang="en-US"/>
-              <a:t>Slide </a:t>
-            </a:r>
             <a:fld id="{C5EF2332-01BF-834F-8236-50238282D533}" type="slidenum">
               <a:rPr lang="en-US" smtClean="0"/>
-              <a:pPr algn="ctr"/>
+              <a:pPr/>
               <a:t>‹#›</a:t>
             </a:fld>
             <a:endParaRPr dirty="0" lang="en-US"/>
@@ -8418,10 +8358,10 @@
       </p:sp>
       <p:sp>
         <p:nvSpPr>
-          <p:cNvPr id="7" name="Date Placeholder 6">
+          <p:cNvPr id="11" name="Date Placeholder 10">
             <a:extLst>
               <a:ext uri="{FF2B5EF4-FFF2-40B4-BE49-F238E27FC236}">
-                <a16:creationId xmlns:a16="http://schemas.microsoft.com/office/drawing/2014/main" id="{E2ED1F55-3CE9-F618-3510-EE96FDC54304}"/>
+                <a16:creationId xmlns:a16="http://schemas.microsoft.com/office/drawing/2014/main" id="{CE3B72D0-0A08-8401-1102-DC8B6D528889}"/>
               </a:ext>
             </a:extLst>
           </p:cNvPr>
@@ -8448,10 +8388,10 @@
       </p:sp>
       <p:sp>
         <p:nvSpPr>
-          <p:cNvPr id="8" name="Footer Placeholder 7">
+          <p:cNvPr id="12" name="Footer Placeholder 11">
             <a:extLst>
               <a:ext uri="{FF2B5EF4-FFF2-40B4-BE49-F238E27FC236}">
-                <a16:creationId xmlns:a16="http://schemas.microsoft.com/office/drawing/2014/main" id="{0616AEA6-DD6E-40D4-2DDA-E355C068ABA2}"/>
+                <a16:creationId xmlns:a16="http://schemas.microsoft.com/office/drawing/2014/main" id="{06FDA1F9-F2A3-54A6-D8DB-F94C2CD5C623}"/>
               </a:ext>
             </a:extLst>
           </p:cNvPr>
@@ -8477,10 +8417,10 @@
       </p:sp>
       <p:sp>
         <p:nvSpPr>
-          <p:cNvPr id="9" name="Slide Number Placeholder 8">
+          <p:cNvPr id="13" name="Slide Number Placeholder 12">
             <a:extLst>
               <a:ext uri="{FF2B5EF4-FFF2-40B4-BE49-F238E27FC236}">
-                <a16:creationId xmlns:a16="http://schemas.microsoft.com/office/drawing/2014/main" id="{BD632E70-5D06-CAE0-ED30-149A6C1E3F1E}"/>
+                <a16:creationId xmlns:a16="http://schemas.microsoft.com/office/drawing/2014/main" id="{7FE0A592-9ACE-2460-AAA6-BCEAFC660CD2}"/>
               </a:ext>
             </a:extLst>
           </p:cNvPr>
@@ -8496,14 +8436,9 @@
           <a:bodyPr/>
           <a:lstStyle/>
           <a:p>
-            <a:pPr algn="ctr"/>
-            <a:r>
-              <a:rPr lang="en-US"/>
-              <a:t>Slide </a:t>
-            </a:r>
             <a:fld id="{C5EF2332-01BF-834F-8236-50238282D533}" type="slidenum">
               <a:rPr lang="en-US" smtClean="0"/>
-              <a:pPr algn="ctr"/>
+              <a:pPr/>
               <a:t>‹#›</a:t>
             </a:fld>
             <a:endParaRPr dirty="0" lang="en-US"/>
@@ -8650,10 +8585,10 @@
       </p:sp>
       <p:sp>
         <p:nvSpPr>
-          <p:cNvPr id="7" name="Date Placeholder 6">
+          <p:cNvPr id="11" name="Date Placeholder 10">
             <a:extLst>
               <a:ext uri="{FF2B5EF4-FFF2-40B4-BE49-F238E27FC236}">
-                <a16:creationId xmlns:a16="http://schemas.microsoft.com/office/drawing/2014/main" id="{E2ED1F55-3CE9-F618-3510-EE96FDC54304}"/>
+                <a16:creationId xmlns:a16="http://schemas.microsoft.com/office/drawing/2014/main" id="{CE3B72D0-0A08-8401-1102-DC8B6D528889}"/>
               </a:ext>
             </a:extLst>
           </p:cNvPr>
@@ -8680,10 +8615,10 @@
       </p:sp>
       <p:sp>
         <p:nvSpPr>
-          <p:cNvPr id="8" name="Footer Placeholder 7">
+          <p:cNvPr id="12" name="Footer Placeholder 11">
             <a:extLst>
               <a:ext uri="{FF2B5EF4-FFF2-40B4-BE49-F238E27FC236}">
-                <a16:creationId xmlns:a16="http://schemas.microsoft.com/office/drawing/2014/main" id="{0616AEA6-DD6E-40D4-2DDA-E355C068ABA2}"/>
+                <a16:creationId xmlns:a16="http://schemas.microsoft.com/office/drawing/2014/main" id="{06FDA1F9-F2A3-54A6-D8DB-F94C2CD5C623}"/>
               </a:ext>
             </a:extLst>
           </p:cNvPr>
@@ -8709,10 +8644,10 @@
       </p:sp>
       <p:sp>
         <p:nvSpPr>
-          <p:cNvPr id="9" name="Slide Number Placeholder 8">
+          <p:cNvPr id="13" name="Slide Number Placeholder 12">
             <a:extLst>
               <a:ext uri="{FF2B5EF4-FFF2-40B4-BE49-F238E27FC236}">
-                <a16:creationId xmlns:a16="http://schemas.microsoft.com/office/drawing/2014/main" id="{BD632E70-5D06-CAE0-ED30-149A6C1E3F1E}"/>
+                <a16:creationId xmlns:a16="http://schemas.microsoft.com/office/drawing/2014/main" id="{7FE0A592-9ACE-2460-AAA6-BCEAFC660CD2}"/>
               </a:ext>
             </a:extLst>
           </p:cNvPr>
@@ -8728,14 +8663,9 @@
           <a:bodyPr/>
           <a:lstStyle/>
           <a:p>
-            <a:pPr algn="ctr"/>
-            <a:r>
-              <a:rPr lang="en-US"/>
-              <a:t>Slide </a:t>
-            </a:r>
             <a:fld id="{C5EF2332-01BF-834F-8236-50238282D533}" type="slidenum">
               <a:rPr lang="en-US" smtClean="0"/>
-              <a:pPr algn="ctr"/>
+              <a:pPr/>
               <a:t>‹#›</a:t>
             </a:fld>
             <a:endParaRPr dirty="0" lang="en-US"/>
@@ -9238,10 +9168,10 @@
       </p:sp>
       <p:sp>
         <p:nvSpPr>
-          <p:cNvPr id="7" name="Date Placeholder 6">
+          <p:cNvPr id="11" name="Date Placeholder 10">
             <a:extLst>
               <a:ext uri="{FF2B5EF4-FFF2-40B4-BE49-F238E27FC236}">
-                <a16:creationId xmlns:a16="http://schemas.microsoft.com/office/drawing/2014/main" id="{E2ED1F55-3CE9-F618-3510-EE96FDC54304}"/>
+                <a16:creationId xmlns:a16="http://schemas.microsoft.com/office/drawing/2014/main" id="{CE3B72D0-0A08-8401-1102-DC8B6D528889}"/>
               </a:ext>
             </a:extLst>
           </p:cNvPr>
@@ -9268,10 +9198,10 @@
       </p:sp>
       <p:sp>
         <p:nvSpPr>
-          <p:cNvPr id="8" name="Footer Placeholder 7">
+          <p:cNvPr id="12" name="Footer Placeholder 11">
             <a:extLst>
               <a:ext uri="{FF2B5EF4-FFF2-40B4-BE49-F238E27FC236}">
-                <a16:creationId xmlns:a16="http://schemas.microsoft.com/office/drawing/2014/main" id="{0616AEA6-DD6E-40D4-2DDA-E355C068ABA2}"/>
+                <a16:creationId xmlns:a16="http://schemas.microsoft.com/office/drawing/2014/main" id="{06FDA1F9-F2A3-54A6-D8DB-F94C2CD5C623}"/>
               </a:ext>
             </a:extLst>
           </p:cNvPr>
@@ -9297,10 +9227,10 @@
       </p:sp>
       <p:sp>
         <p:nvSpPr>
-          <p:cNvPr id="9" name="Slide Number Placeholder 8">
+          <p:cNvPr id="13" name="Slide Number Placeholder 12">
             <a:extLst>
               <a:ext uri="{FF2B5EF4-FFF2-40B4-BE49-F238E27FC236}">
-                <a16:creationId xmlns:a16="http://schemas.microsoft.com/office/drawing/2014/main" id="{BD632E70-5D06-CAE0-ED30-149A6C1E3F1E}"/>
+                <a16:creationId xmlns:a16="http://schemas.microsoft.com/office/drawing/2014/main" id="{7FE0A592-9ACE-2460-AAA6-BCEAFC660CD2}"/>
               </a:ext>
             </a:extLst>
           </p:cNvPr>
@@ -9316,14 +9246,9 @@
           <a:bodyPr/>
           <a:lstStyle/>
           <a:p>
-            <a:pPr algn="ctr"/>
-            <a:r>
-              <a:rPr lang="en-US"/>
-              <a:t>Slide </a:t>
-            </a:r>
             <a:fld id="{C5EF2332-01BF-834F-8236-50238282D533}" type="slidenum">
               <a:rPr lang="en-US" smtClean="0"/>
-              <a:pPr algn="ctr"/>
+              <a:pPr/>
               <a:t>‹#›</a:t>
             </a:fld>
             <a:endParaRPr dirty="0" lang="en-US"/>
@@ -9803,10 +9728,10 @@
       </p:sp>
       <p:sp>
         <p:nvSpPr>
-          <p:cNvPr id="8" name="Date Placeholder 7">
+          <p:cNvPr id="6" name="Date Placeholder 5">
             <a:extLst>
               <a:ext uri="{FF2B5EF4-FFF2-40B4-BE49-F238E27FC236}">
-                <a16:creationId xmlns:a16="http://schemas.microsoft.com/office/drawing/2014/main" id="{E6D5126F-053F-910F-7F76-D928AC61372D}"/>
+                <a16:creationId xmlns:a16="http://schemas.microsoft.com/office/drawing/2014/main" id="{4D4823E0-4AC4-556E-D341-7EC0B24627F1}"/>
               </a:ext>
             </a:extLst>
           </p:cNvPr>
@@ -9833,10 +9758,10 @@
       </p:sp>
       <p:sp>
         <p:nvSpPr>
-          <p:cNvPr id="9" name="Footer Placeholder 8">
+          <p:cNvPr id="7" name="Footer Placeholder 6">
             <a:extLst>
               <a:ext uri="{FF2B5EF4-FFF2-40B4-BE49-F238E27FC236}">
-                <a16:creationId xmlns:a16="http://schemas.microsoft.com/office/drawing/2014/main" id="{8EEF7D04-FF72-0698-CE48-A9A4F70D774F}"/>
+                <a16:creationId xmlns:a16="http://schemas.microsoft.com/office/drawing/2014/main" id="{DA033808-7DA7-BCE5-7841-A080B9791E38}"/>
               </a:ext>
             </a:extLst>
           </p:cNvPr>
@@ -9862,10 +9787,10 @@
       </p:sp>
       <p:sp>
         <p:nvSpPr>
-          <p:cNvPr id="10" name="Slide Number Placeholder 9">
+          <p:cNvPr id="11" name="Slide Number Placeholder 10">
             <a:extLst>
               <a:ext uri="{FF2B5EF4-FFF2-40B4-BE49-F238E27FC236}">
-                <a16:creationId xmlns:a16="http://schemas.microsoft.com/office/drawing/2014/main" id="{C8B1F07D-59FC-87D1-1BB5-7C86711059AF}"/>
+                <a16:creationId xmlns:a16="http://schemas.microsoft.com/office/drawing/2014/main" id="{F114B9F3-9BDF-91CE-CDEA-A368776345DA}"/>
               </a:ext>
             </a:extLst>
           </p:cNvPr>
@@ -9881,14 +9806,9 @@
           <a:bodyPr/>
           <a:lstStyle/>
           <a:p>
-            <a:pPr algn="ctr"/>
-            <a:r>
-              <a:rPr lang="en-US"/>
-              <a:t>Slide </a:t>
-            </a:r>
             <a:fld id="{C5EF2332-01BF-834F-8236-50238282D533}" type="slidenum">
               <a:rPr lang="en-US" smtClean="0"/>
-              <a:pPr algn="ctr"/>
+              <a:pPr/>
               <a:t>‹#›</a:t>
             </a:fld>
             <a:endParaRPr dirty="0" lang="en-US"/>
@@ -10014,10 +9934,10 @@
       </p:pic>
       <p:sp>
         <p:nvSpPr>
-          <p:cNvPr id="8" name="Date Placeholder 7">
+          <p:cNvPr id="6" name="Date Placeholder 5">
             <a:extLst>
               <a:ext uri="{FF2B5EF4-FFF2-40B4-BE49-F238E27FC236}">
-                <a16:creationId xmlns:a16="http://schemas.microsoft.com/office/drawing/2014/main" id="{E6D5126F-053F-910F-7F76-D928AC61372D}"/>
+                <a16:creationId xmlns:a16="http://schemas.microsoft.com/office/drawing/2014/main" id="{4D4823E0-4AC4-556E-D341-7EC0B24627F1}"/>
               </a:ext>
             </a:extLst>
           </p:cNvPr>
@@ -10044,10 +9964,10 @@
       </p:sp>
       <p:sp>
         <p:nvSpPr>
-          <p:cNvPr id="9" name="Footer Placeholder 8">
+          <p:cNvPr id="7" name="Footer Placeholder 6">
             <a:extLst>
               <a:ext uri="{FF2B5EF4-FFF2-40B4-BE49-F238E27FC236}">
-                <a16:creationId xmlns:a16="http://schemas.microsoft.com/office/drawing/2014/main" id="{8EEF7D04-FF72-0698-CE48-A9A4F70D774F}"/>
+                <a16:creationId xmlns:a16="http://schemas.microsoft.com/office/drawing/2014/main" id="{DA033808-7DA7-BCE5-7841-A080B9791E38}"/>
               </a:ext>
             </a:extLst>
           </p:cNvPr>
@@ -10073,10 +9993,10 @@
       </p:sp>
       <p:sp>
         <p:nvSpPr>
-          <p:cNvPr id="10" name="Slide Number Placeholder 9">
+          <p:cNvPr id="11" name="Slide Number Placeholder 10">
             <a:extLst>
               <a:ext uri="{FF2B5EF4-FFF2-40B4-BE49-F238E27FC236}">
-                <a16:creationId xmlns:a16="http://schemas.microsoft.com/office/drawing/2014/main" id="{C8B1F07D-59FC-87D1-1BB5-7C86711059AF}"/>
+                <a16:creationId xmlns:a16="http://schemas.microsoft.com/office/drawing/2014/main" id="{F114B9F3-9BDF-91CE-CDEA-A368776345DA}"/>
               </a:ext>
             </a:extLst>
           </p:cNvPr>
@@ -10092,14 +10012,9 @@
           <a:bodyPr/>
           <a:lstStyle/>
           <a:p>
-            <a:pPr algn="ctr"/>
-            <a:r>
-              <a:rPr lang="en-US"/>
-              <a:t>Slide </a:t>
-            </a:r>
             <a:fld id="{C5EF2332-01BF-834F-8236-50238282D533}" type="slidenum">
               <a:rPr lang="en-US" smtClean="0"/>
-              <a:pPr algn="ctr"/>
+              <a:pPr/>
               <a:t>‹#›</a:t>
             </a:fld>
             <a:endParaRPr dirty="0" lang="en-US"/>
@@ -10319,10 +10234,10 @@
       </p:pic>
       <p:sp>
         <p:nvSpPr>
-          <p:cNvPr id="8" name="Date Placeholder 7">
+          <p:cNvPr id="6" name="Date Placeholder 5">
             <a:extLst>
               <a:ext uri="{FF2B5EF4-FFF2-40B4-BE49-F238E27FC236}">
-                <a16:creationId xmlns:a16="http://schemas.microsoft.com/office/drawing/2014/main" id="{E6D5126F-053F-910F-7F76-D928AC61372D}"/>
+                <a16:creationId xmlns:a16="http://schemas.microsoft.com/office/drawing/2014/main" id="{4D4823E0-4AC4-556E-D341-7EC0B24627F1}"/>
               </a:ext>
             </a:extLst>
           </p:cNvPr>
@@ -10349,10 +10264,10 @@
       </p:sp>
       <p:sp>
         <p:nvSpPr>
-          <p:cNvPr id="9" name="Footer Placeholder 8">
+          <p:cNvPr id="7" name="Footer Placeholder 6">
             <a:extLst>
               <a:ext uri="{FF2B5EF4-FFF2-40B4-BE49-F238E27FC236}">
-                <a16:creationId xmlns:a16="http://schemas.microsoft.com/office/drawing/2014/main" id="{8EEF7D04-FF72-0698-CE48-A9A4F70D774F}"/>
+                <a16:creationId xmlns:a16="http://schemas.microsoft.com/office/drawing/2014/main" id="{DA033808-7DA7-BCE5-7841-A080B9791E38}"/>
               </a:ext>
             </a:extLst>
           </p:cNvPr>
@@ -10378,10 +10293,10 @@
       </p:sp>
       <p:sp>
         <p:nvSpPr>
-          <p:cNvPr id="10" name="Slide Number Placeholder 9">
+          <p:cNvPr id="11" name="Slide Number Placeholder 10">
             <a:extLst>
               <a:ext uri="{FF2B5EF4-FFF2-40B4-BE49-F238E27FC236}">
-                <a16:creationId xmlns:a16="http://schemas.microsoft.com/office/drawing/2014/main" id="{C8B1F07D-59FC-87D1-1BB5-7C86711059AF}"/>
+                <a16:creationId xmlns:a16="http://schemas.microsoft.com/office/drawing/2014/main" id="{F114B9F3-9BDF-91CE-CDEA-A368776345DA}"/>
               </a:ext>
             </a:extLst>
           </p:cNvPr>
@@ -10397,14 +10312,9 @@
           <a:bodyPr/>
           <a:lstStyle/>
           <a:p>
-            <a:pPr algn="ctr"/>
-            <a:r>
-              <a:rPr lang="en-US"/>
-              <a:t>Slide </a:t>
-            </a:r>
             <a:fld id="{C5EF2332-01BF-834F-8236-50238282D533}" type="slidenum">
               <a:rPr lang="en-US" smtClean="0"/>
-              <a:pPr algn="ctr"/>
+              <a:pPr/>
               <a:t>‹#›</a:t>
             </a:fld>
             <a:endParaRPr dirty="0" lang="en-US"/>
@@ -10619,10 +10529,10 @@
       </p:sp>
       <p:sp>
         <p:nvSpPr>
-          <p:cNvPr id="7" name="Date Placeholder 6">
+          <p:cNvPr id="11" name="Date Placeholder 10">
             <a:extLst>
               <a:ext uri="{FF2B5EF4-FFF2-40B4-BE49-F238E27FC236}">
-                <a16:creationId xmlns:a16="http://schemas.microsoft.com/office/drawing/2014/main" id="{E2ED1F55-3CE9-F618-3510-EE96FDC54304}"/>
+                <a16:creationId xmlns:a16="http://schemas.microsoft.com/office/drawing/2014/main" id="{CE3B72D0-0A08-8401-1102-DC8B6D528889}"/>
               </a:ext>
             </a:extLst>
           </p:cNvPr>
@@ -10649,10 +10559,10 @@
       </p:sp>
       <p:sp>
         <p:nvSpPr>
-          <p:cNvPr id="8" name="Footer Placeholder 7">
+          <p:cNvPr id="12" name="Footer Placeholder 11">
             <a:extLst>
               <a:ext uri="{FF2B5EF4-FFF2-40B4-BE49-F238E27FC236}">
-                <a16:creationId xmlns:a16="http://schemas.microsoft.com/office/drawing/2014/main" id="{0616AEA6-DD6E-40D4-2DDA-E355C068ABA2}"/>
+                <a16:creationId xmlns:a16="http://schemas.microsoft.com/office/drawing/2014/main" id="{06FDA1F9-F2A3-54A6-D8DB-F94C2CD5C623}"/>
               </a:ext>
             </a:extLst>
           </p:cNvPr>
@@ -10678,10 +10588,10 @@
       </p:sp>
       <p:sp>
         <p:nvSpPr>
-          <p:cNvPr id="9" name="Slide Number Placeholder 8">
+          <p:cNvPr id="13" name="Slide Number Placeholder 12">
             <a:extLst>
               <a:ext uri="{FF2B5EF4-FFF2-40B4-BE49-F238E27FC236}">
-                <a16:creationId xmlns:a16="http://schemas.microsoft.com/office/drawing/2014/main" id="{BD632E70-5D06-CAE0-ED30-149A6C1E3F1E}"/>
+                <a16:creationId xmlns:a16="http://schemas.microsoft.com/office/drawing/2014/main" id="{7FE0A592-9ACE-2460-AAA6-BCEAFC660CD2}"/>
               </a:ext>
             </a:extLst>
           </p:cNvPr>
@@ -10697,14 +10607,9 @@
           <a:bodyPr/>
           <a:lstStyle/>
           <a:p>
-            <a:pPr algn="ctr"/>
-            <a:r>
-              <a:rPr lang="en-US"/>
-              <a:t>Slide </a:t>
-            </a:r>
             <a:fld id="{C5EF2332-01BF-834F-8236-50238282D533}" type="slidenum">
               <a:rPr lang="en-US" smtClean="0"/>
-              <a:pPr algn="ctr"/>
+              <a:pPr/>
               <a:t>‹#›</a:t>
             </a:fld>
             <a:endParaRPr dirty="0" lang="en-US"/>
@@ -11091,10 +10996,10 @@
       </p:sp>
       <p:sp>
         <p:nvSpPr>
-          <p:cNvPr id="7" name="Date Placeholder 6">
+          <p:cNvPr id="11" name="Date Placeholder 10">
             <a:extLst>
               <a:ext uri="{FF2B5EF4-FFF2-40B4-BE49-F238E27FC236}">
-                <a16:creationId xmlns:a16="http://schemas.microsoft.com/office/drawing/2014/main" id="{E2ED1F55-3CE9-F618-3510-EE96FDC54304}"/>
+                <a16:creationId xmlns:a16="http://schemas.microsoft.com/office/drawing/2014/main" id="{CE3B72D0-0A08-8401-1102-DC8B6D528889}"/>
               </a:ext>
             </a:extLst>
           </p:cNvPr>
@@ -11121,10 +11026,10 @@
       </p:sp>
       <p:sp>
         <p:nvSpPr>
-          <p:cNvPr id="8" name="Footer Placeholder 7">
+          <p:cNvPr id="12" name="Footer Placeholder 11">
             <a:extLst>
               <a:ext uri="{FF2B5EF4-FFF2-40B4-BE49-F238E27FC236}">
-                <a16:creationId xmlns:a16="http://schemas.microsoft.com/office/drawing/2014/main" id="{0616AEA6-DD6E-40D4-2DDA-E355C068ABA2}"/>
+                <a16:creationId xmlns:a16="http://schemas.microsoft.com/office/drawing/2014/main" id="{06FDA1F9-F2A3-54A6-D8DB-F94C2CD5C623}"/>
               </a:ext>
             </a:extLst>
           </p:cNvPr>
@@ -11150,10 +11055,10 @@
       </p:sp>
       <p:sp>
         <p:nvSpPr>
-          <p:cNvPr id="9" name="Slide Number Placeholder 8">
+          <p:cNvPr id="13" name="Slide Number Placeholder 12">
             <a:extLst>
               <a:ext uri="{FF2B5EF4-FFF2-40B4-BE49-F238E27FC236}">
-                <a16:creationId xmlns:a16="http://schemas.microsoft.com/office/drawing/2014/main" id="{BD632E70-5D06-CAE0-ED30-149A6C1E3F1E}"/>
+                <a16:creationId xmlns:a16="http://schemas.microsoft.com/office/drawing/2014/main" id="{7FE0A592-9ACE-2460-AAA6-BCEAFC660CD2}"/>
               </a:ext>
             </a:extLst>
           </p:cNvPr>
@@ -11169,14 +11074,9 @@
           <a:bodyPr/>
           <a:lstStyle/>
           <a:p>
-            <a:pPr algn="ctr"/>
-            <a:r>
-              <a:rPr lang="en-US"/>
-              <a:t>Slide </a:t>
-            </a:r>
             <a:fld id="{C5EF2332-01BF-834F-8236-50238282D533}" type="slidenum">
               <a:rPr lang="en-US" smtClean="0"/>
-              <a:pPr algn="ctr"/>
+              <a:pPr/>
               <a:t>‹#›</a:t>
             </a:fld>
             <a:endParaRPr dirty="0" lang="en-US"/>
@@ -11682,10 +11582,10 @@
       </p:sp>
       <p:sp>
         <p:nvSpPr>
-          <p:cNvPr id="7" name="Date Placeholder 6">
+          <p:cNvPr id="11" name="Date Placeholder 10">
             <a:extLst>
               <a:ext uri="{FF2B5EF4-FFF2-40B4-BE49-F238E27FC236}">
-                <a16:creationId xmlns:a16="http://schemas.microsoft.com/office/drawing/2014/main" id="{E2ED1F55-3CE9-F618-3510-EE96FDC54304}"/>
+                <a16:creationId xmlns:a16="http://schemas.microsoft.com/office/drawing/2014/main" id="{CE3B72D0-0A08-8401-1102-DC8B6D528889}"/>
               </a:ext>
             </a:extLst>
           </p:cNvPr>
@@ -11712,10 +11612,10 @@
       </p:sp>
       <p:sp>
         <p:nvSpPr>
-          <p:cNvPr id="8" name="Footer Placeholder 7">
+          <p:cNvPr id="12" name="Footer Placeholder 11">
             <a:extLst>
               <a:ext uri="{FF2B5EF4-FFF2-40B4-BE49-F238E27FC236}">
-                <a16:creationId xmlns:a16="http://schemas.microsoft.com/office/drawing/2014/main" id="{0616AEA6-DD6E-40D4-2DDA-E355C068ABA2}"/>
+                <a16:creationId xmlns:a16="http://schemas.microsoft.com/office/drawing/2014/main" id="{06FDA1F9-F2A3-54A6-D8DB-F94C2CD5C623}"/>
               </a:ext>
             </a:extLst>
           </p:cNvPr>
@@ -11741,10 +11641,10 @@
       </p:sp>
       <p:sp>
         <p:nvSpPr>
-          <p:cNvPr id="9" name="Slide Number Placeholder 8">
+          <p:cNvPr id="13" name="Slide Number Placeholder 12">
             <a:extLst>
               <a:ext uri="{FF2B5EF4-FFF2-40B4-BE49-F238E27FC236}">
-                <a16:creationId xmlns:a16="http://schemas.microsoft.com/office/drawing/2014/main" id="{BD632E70-5D06-CAE0-ED30-149A6C1E3F1E}"/>
+                <a16:creationId xmlns:a16="http://schemas.microsoft.com/office/drawing/2014/main" id="{7FE0A592-9ACE-2460-AAA6-BCEAFC660CD2}"/>
               </a:ext>
             </a:extLst>
           </p:cNvPr>
@@ -11760,14 +11660,9 @@
           <a:bodyPr/>
           <a:lstStyle/>
           <a:p>
-            <a:pPr algn="ctr"/>
-            <a:r>
-              <a:rPr lang="en-US"/>
-              <a:t>Slide </a:t>
-            </a:r>
             <a:fld id="{C5EF2332-01BF-834F-8236-50238282D533}" type="slidenum">
               <a:rPr lang="en-US" smtClean="0"/>
-              <a:pPr algn="ctr"/>
+              <a:pPr/>
               <a:t>‹#›</a:t>
             </a:fld>
             <a:endParaRPr dirty="0" lang="en-US"/>
@@ -12450,10 +12345,10 @@
       </p:graphicFrame>
       <p:sp>
         <p:nvSpPr>
-          <p:cNvPr id="7" name="Date Placeholder 6">
+          <p:cNvPr id="11" name="Date Placeholder 10">
             <a:extLst>
               <a:ext uri="{FF2B5EF4-FFF2-40B4-BE49-F238E27FC236}">
-                <a16:creationId xmlns:a16="http://schemas.microsoft.com/office/drawing/2014/main" id="{E2ED1F55-3CE9-F618-3510-EE96FDC54304}"/>
+                <a16:creationId xmlns:a16="http://schemas.microsoft.com/office/drawing/2014/main" id="{CE3B72D0-0A08-8401-1102-DC8B6D528889}"/>
               </a:ext>
             </a:extLst>
           </p:cNvPr>
@@ -12480,10 +12375,10 @@
       </p:sp>
       <p:sp>
         <p:nvSpPr>
-          <p:cNvPr id="8" name="Footer Placeholder 7">
+          <p:cNvPr id="12" name="Footer Placeholder 11">
             <a:extLst>
               <a:ext uri="{FF2B5EF4-FFF2-40B4-BE49-F238E27FC236}">
-                <a16:creationId xmlns:a16="http://schemas.microsoft.com/office/drawing/2014/main" id="{0616AEA6-DD6E-40D4-2DDA-E355C068ABA2}"/>
+                <a16:creationId xmlns:a16="http://schemas.microsoft.com/office/drawing/2014/main" id="{06FDA1F9-F2A3-54A6-D8DB-F94C2CD5C623}"/>
               </a:ext>
             </a:extLst>
           </p:cNvPr>
@@ -12509,10 +12404,10 @@
       </p:sp>
       <p:sp>
         <p:nvSpPr>
-          <p:cNvPr id="9" name="Slide Number Placeholder 8">
+          <p:cNvPr id="13" name="Slide Number Placeholder 12">
             <a:extLst>
               <a:ext uri="{FF2B5EF4-FFF2-40B4-BE49-F238E27FC236}">
-                <a16:creationId xmlns:a16="http://schemas.microsoft.com/office/drawing/2014/main" id="{BD632E70-5D06-CAE0-ED30-149A6C1E3F1E}"/>
+                <a16:creationId xmlns:a16="http://schemas.microsoft.com/office/drawing/2014/main" id="{7FE0A592-9ACE-2460-AAA6-BCEAFC660CD2}"/>
               </a:ext>
             </a:extLst>
           </p:cNvPr>
@@ -12528,14 +12423,9 @@
           <a:bodyPr/>
           <a:lstStyle/>
           <a:p>
-            <a:pPr algn="ctr"/>
-            <a:r>
-              <a:rPr lang="en-US"/>
-              <a:t>Slide </a:t>
-            </a:r>
             <a:fld id="{C5EF2332-01BF-834F-8236-50238282D533}" type="slidenum">
               <a:rPr lang="en-US" smtClean="0"/>
-              <a:pPr algn="ctr"/>
+              <a:pPr/>
               <a:t>‹#›</a:t>
             </a:fld>
             <a:endParaRPr dirty="0" lang="en-US"/>
@@ -12676,10 +12566,10 @@
       </p:sp>
       <p:sp>
         <p:nvSpPr>
-          <p:cNvPr id="7" name="Date Placeholder 6">
+          <p:cNvPr id="11" name="Date Placeholder 10">
             <a:extLst>
               <a:ext uri="{FF2B5EF4-FFF2-40B4-BE49-F238E27FC236}">
-                <a16:creationId xmlns:a16="http://schemas.microsoft.com/office/drawing/2014/main" id="{E2ED1F55-3CE9-F618-3510-EE96FDC54304}"/>
+                <a16:creationId xmlns:a16="http://schemas.microsoft.com/office/drawing/2014/main" id="{CE3B72D0-0A08-8401-1102-DC8B6D528889}"/>
               </a:ext>
             </a:extLst>
           </p:cNvPr>
@@ -12706,10 +12596,10 @@
       </p:sp>
       <p:sp>
         <p:nvSpPr>
-          <p:cNvPr id="8" name="Footer Placeholder 7">
+          <p:cNvPr id="12" name="Footer Placeholder 11">
             <a:extLst>
               <a:ext uri="{FF2B5EF4-FFF2-40B4-BE49-F238E27FC236}">
-                <a16:creationId xmlns:a16="http://schemas.microsoft.com/office/drawing/2014/main" id="{0616AEA6-DD6E-40D4-2DDA-E355C068ABA2}"/>
+                <a16:creationId xmlns:a16="http://schemas.microsoft.com/office/drawing/2014/main" id="{06FDA1F9-F2A3-54A6-D8DB-F94C2CD5C623}"/>
               </a:ext>
             </a:extLst>
           </p:cNvPr>
@@ -12735,10 +12625,10 @@
       </p:sp>
       <p:sp>
         <p:nvSpPr>
-          <p:cNvPr id="9" name="Slide Number Placeholder 8">
+          <p:cNvPr id="13" name="Slide Number Placeholder 12">
             <a:extLst>
               <a:ext uri="{FF2B5EF4-FFF2-40B4-BE49-F238E27FC236}">
-                <a16:creationId xmlns:a16="http://schemas.microsoft.com/office/drawing/2014/main" id="{BD632E70-5D06-CAE0-ED30-149A6C1E3F1E}"/>
+                <a16:creationId xmlns:a16="http://schemas.microsoft.com/office/drawing/2014/main" id="{7FE0A592-9ACE-2460-AAA6-BCEAFC660CD2}"/>
               </a:ext>
             </a:extLst>
           </p:cNvPr>
@@ -12754,14 +12644,9 @@
           <a:bodyPr/>
           <a:lstStyle/>
           <a:p>
-            <a:pPr algn="ctr"/>
-            <a:r>
-              <a:rPr lang="en-US"/>
-              <a:t>Slide </a:t>
-            </a:r>
             <a:fld id="{C5EF2332-01BF-834F-8236-50238282D533}" type="slidenum">
               <a:rPr lang="en-US" smtClean="0"/>
-              <a:pPr algn="ctr"/>
+              <a:pPr/>
               <a:t>‹#›</a:t>
             </a:fld>
             <a:endParaRPr dirty="0" lang="en-US"/>
@@ -13045,10 +12930,10 @@
       </p:graphicFrame>
       <p:sp>
         <p:nvSpPr>
-          <p:cNvPr id="7" name="Date Placeholder 6">
+          <p:cNvPr id="11" name="Date Placeholder 10">
             <a:extLst>
               <a:ext uri="{FF2B5EF4-FFF2-40B4-BE49-F238E27FC236}">
-                <a16:creationId xmlns:a16="http://schemas.microsoft.com/office/drawing/2014/main" id="{E2ED1F55-3CE9-F618-3510-EE96FDC54304}"/>
+                <a16:creationId xmlns:a16="http://schemas.microsoft.com/office/drawing/2014/main" id="{CE3B72D0-0A08-8401-1102-DC8B6D528889}"/>
               </a:ext>
             </a:extLst>
           </p:cNvPr>
@@ -13075,10 +12960,10 @@
       </p:sp>
       <p:sp>
         <p:nvSpPr>
-          <p:cNvPr id="8" name="Footer Placeholder 7">
+          <p:cNvPr id="12" name="Footer Placeholder 11">
             <a:extLst>
               <a:ext uri="{FF2B5EF4-FFF2-40B4-BE49-F238E27FC236}">
-                <a16:creationId xmlns:a16="http://schemas.microsoft.com/office/drawing/2014/main" id="{0616AEA6-DD6E-40D4-2DDA-E355C068ABA2}"/>
+                <a16:creationId xmlns:a16="http://schemas.microsoft.com/office/drawing/2014/main" id="{06FDA1F9-F2A3-54A6-D8DB-F94C2CD5C623}"/>
               </a:ext>
             </a:extLst>
           </p:cNvPr>
@@ -13104,10 +12989,10 @@
       </p:sp>
       <p:sp>
         <p:nvSpPr>
-          <p:cNvPr id="9" name="Slide Number Placeholder 8">
+          <p:cNvPr id="13" name="Slide Number Placeholder 12">
             <a:extLst>
               <a:ext uri="{FF2B5EF4-FFF2-40B4-BE49-F238E27FC236}">
-                <a16:creationId xmlns:a16="http://schemas.microsoft.com/office/drawing/2014/main" id="{BD632E70-5D06-CAE0-ED30-149A6C1E3F1E}"/>
+                <a16:creationId xmlns:a16="http://schemas.microsoft.com/office/drawing/2014/main" id="{7FE0A592-9ACE-2460-AAA6-BCEAFC660CD2}"/>
               </a:ext>
             </a:extLst>
           </p:cNvPr>
@@ -13123,14 +13008,9 @@
           <a:bodyPr/>
           <a:lstStyle/>
           <a:p>
-            <a:pPr algn="ctr"/>
-            <a:r>
-              <a:rPr lang="en-US"/>
-              <a:t>Slide </a:t>
-            </a:r>
             <a:fld id="{C5EF2332-01BF-834F-8236-50238282D533}" type="slidenum">
               <a:rPr lang="en-US" smtClean="0"/>
-              <a:pPr algn="ctr"/>
+              <a:pPr/>
               <a:t>‹#›</a:t>
             </a:fld>
             <a:endParaRPr dirty="0" lang="en-US"/>
@@ -13219,10 +13099,10 @@
       </p:sp>
       <p:sp>
         <p:nvSpPr>
-          <p:cNvPr id="7" name="Date Placeholder 6">
+          <p:cNvPr id="11" name="Date Placeholder 10">
             <a:extLst>
               <a:ext uri="{FF2B5EF4-FFF2-40B4-BE49-F238E27FC236}">
-                <a16:creationId xmlns:a16="http://schemas.microsoft.com/office/drawing/2014/main" id="{E2ED1F55-3CE9-F618-3510-EE96FDC54304}"/>
+                <a16:creationId xmlns:a16="http://schemas.microsoft.com/office/drawing/2014/main" id="{CE3B72D0-0A08-8401-1102-DC8B6D528889}"/>
               </a:ext>
             </a:extLst>
           </p:cNvPr>
@@ -13249,10 +13129,10 @@
       </p:sp>
       <p:sp>
         <p:nvSpPr>
-          <p:cNvPr id="8" name="Footer Placeholder 7">
+          <p:cNvPr id="12" name="Footer Placeholder 11">
             <a:extLst>
               <a:ext uri="{FF2B5EF4-FFF2-40B4-BE49-F238E27FC236}">
-                <a16:creationId xmlns:a16="http://schemas.microsoft.com/office/drawing/2014/main" id="{0616AEA6-DD6E-40D4-2DDA-E355C068ABA2}"/>
+                <a16:creationId xmlns:a16="http://schemas.microsoft.com/office/drawing/2014/main" id="{06FDA1F9-F2A3-54A6-D8DB-F94C2CD5C623}"/>
               </a:ext>
             </a:extLst>
           </p:cNvPr>
@@ -13278,10 +13158,10 @@
       </p:sp>
       <p:sp>
         <p:nvSpPr>
-          <p:cNvPr id="9" name="Slide Number Placeholder 8">
+          <p:cNvPr id="13" name="Slide Number Placeholder 12">
             <a:extLst>
               <a:ext uri="{FF2B5EF4-FFF2-40B4-BE49-F238E27FC236}">
-                <a16:creationId xmlns:a16="http://schemas.microsoft.com/office/drawing/2014/main" id="{BD632E70-5D06-CAE0-ED30-149A6C1E3F1E}"/>
+                <a16:creationId xmlns:a16="http://schemas.microsoft.com/office/drawing/2014/main" id="{7FE0A592-9ACE-2460-AAA6-BCEAFC660CD2}"/>
               </a:ext>
             </a:extLst>
           </p:cNvPr>
@@ -13297,14 +13177,9 @@
           <a:bodyPr/>
           <a:lstStyle/>
           <a:p>
-            <a:pPr algn="ctr"/>
-            <a:r>
-              <a:rPr lang="en-US"/>
-              <a:t>Slide </a:t>
-            </a:r>
             <a:fld id="{C5EF2332-01BF-834F-8236-50238282D533}" type="slidenum">
               <a:rPr lang="en-US" smtClean="0"/>
-              <a:pPr algn="ctr"/>
+              <a:pPr/>
               <a:t>‹#›</a:t>
             </a:fld>
             <a:endParaRPr dirty="0" lang="en-US"/>
@@ -13444,10 +13319,10 @@
       </p:sp>
       <p:sp>
         <p:nvSpPr>
-          <p:cNvPr id="7" name="Date Placeholder 6">
+          <p:cNvPr id="11" name="Date Placeholder 10">
             <a:extLst>
               <a:ext uri="{FF2B5EF4-FFF2-40B4-BE49-F238E27FC236}">
-                <a16:creationId xmlns:a16="http://schemas.microsoft.com/office/drawing/2014/main" id="{E2ED1F55-3CE9-F618-3510-EE96FDC54304}"/>
+                <a16:creationId xmlns:a16="http://schemas.microsoft.com/office/drawing/2014/main" id="{CE3B72D0-0A08-8401-1102-DC8B6D528889}"/>
               </a:ext>
             </a:extLst>
           </p:cNvPr>
@@ -13474,10 +13349,10 @@
       </p:sp>
       <p:sp>
         <p:nvSpPr>
-          <p:cNvPr id="8" name="Footer Placeholder 7">
+          <p:cNvPr id="12" name="Footer Placeholder 11">
             <a:extLst>
               <a:ext uri="{FF2B5EF4-FFF2-40B4-BE49-F238E27FC236}">
-                <a16:creationId xmlns:a16="http://schemas.microsoft.com/office/drawing/2014/main" id="{0616AEA6-DD6E-40D4-2DDA-E355C068ABA2}"/>
+                <a16:creationId xmlns:a16="http://schemas.microsoft.com/office/drawing/2014/main" id="{06FDA1F9-F2A3-54A6-D8DB-F94C2CD5C623}"/>
               </a:ext>
             </a:extLst>
           </p:cNvPr>
@@ -13503,10 +13378,10 @@
       </p:sp>
       <p:sp>
         <p:nvSpPr>
-          <p:cNvPr id="9" name="Slide Number Placeholder 8">
+          <p:cNvPr id="13" name="Slide Number Placeholder 12">
             <a:extLst>
               <a:ext uri="{FF2B5EF4-FFF2-40B4-BE49-F238E27FC236}">
-                <a16:creationId xmlns:a16="http://schemas.microsoft.com/office/drawing/2014/main" id="{BD632E70-5D06-CAE0-ED30-149A6C1E3F1E}"/>
+                <a16:creationId xmlns:a16="http://schemas.microsoft.com/office/drawing/2014/main" id="{7FE0A592-9ACE-2460-AAA6-BCEAFC660CD2}"/>
               </a:ext>
             </a:extLst>
           </p:cNvPr>
@@ -13522,14 +13397,9 @@
           <a:bodyPr/>
           <a:lstStyle/>
           <a:p>
-            <a:pPr algn="ctr"/>
-            <a:r>
-              <a:rPr lang="en-US"/>
-              <a:t>Slide </a:t>
-            </a:r>
             <a:fld id="{C5EF2332-01BF-834F-8236-50238282D533}" type="slidenum">
               <a:rPr lang="en-US" smtClean="0"/>
-              <a:pPr algn="ctr"/>
+              <a:pPr/>
               <a:t>‹#›</a:t>
             </a:fld>
             <a:endParaRPr dirty="0" lang="en-US"/>
@@ -13873,10 +13743,10 @@
       </p:sp>
       <p:sp>
         <p:nvSpPr>
-          <p:cNvPr id="7" name="Date Placeholder 6">
+          <p:cNvPr id="11" name="Date Placeholder 10">
             <a:extLst>
               <a:ext uri="{FF2B5EF4-FFF2-40B4-BE49-F238E27FC236}">
-                <a16:creationId xmlns:a16="http://schemas.microsoft.com/office/drawing/2014/main" id="{E2ED1F55-3CE9-F618-3510-EE96FDC54304}"/>
+                <a16:creationId xmlns:a16="http://schemas.microsoft.com/office/drawing/2014/main" id="{CE3B72D0-0A08-8401-1102-DC8B6D528889}"/>
               </a:ext>
             </a:extLst>
           </p:cNvPr>
@@ -13903,10 +13773,10 @@
       </p:sp>
       <p:sp>
         <p:nvSpPr>
-          <p:cNvPr id="8" name="Footer Placeholder 7">
+          <p:cNvPr id="12" name="Footer Placeholder 11">
             <a:extLst>
               <a:ext uri="{FF2B5EF4-FFF2-40B4-BE49-F238E27FC236}">
-                <a16:creationId xmlns:a16="http://schemas.microsoft.com/office/drawing/2014/main" id="{0616AEA6-DD6E-40D4-2DDA-E355C068ABA2}"/>
+                <a16:creationId xmlns:a16="http://schemas.microsoft.com/office/drawing/2014/main" id="{06FDA1F9-F2A3-54A6-D8DB-F94C2CD5C623}"/>
               </a:ext>
             </a:extLst>
           </p:cNvPr>
@@ -13932,10 +13802,10 @@
       </p:sp>
       <p:sp>
         <p:nvSpPr>
-          <p:cNvPr id="9" name="Slide Number Placeholder 8">
+          <p:cNvPr id="13" name="Slide Number Placeholder 12">
             <a:extLst>
               <a:ext uri="{FF2B5EF4-FFF2-40B4-BE49-F238E27FC236}">
-                <a16:creationId xmlns:a16="http://schemas.microsoft.com/office/drawing/2014/main" id="{BD632E70-5D06-CAE0-ED30-149A6C1E3F1E}"/>
+                <a16:creationId xmlns:a16="http://schemas.microsoft.com/office/drawing/2014/main" id="{7FE0A592-9ACE-2460-AAA6-BCEAFC660CD2}"/>
               </a:ext>
             </a:extLst>
           </p:cNvPr>
@@ -13951,14 +13821,9 @@
           <a:bodyPr/>
           <a:lstStyle/>
           <a:p>
-            <a:pPr algn="ctr"/>
-            <a:r>
-              <a:rPr lang="en-US"/>
-              <a:t>Slide </a:t>
-            </a:r>
             <a:fld id="{C5EF2332-01BF-834F-8236-50238282D533}" type="slidenum">
               <a:rPr lang="en-US" smtClean="0"/>
-              <a:pPr algn="ctr"/>
+              <a:pPr/>
               <a:t>‹#›</a:t>
             </a:fld>
             <a:endParaRPr dirty="0" lang="en-US"/>
@@ -14341,10 +14206,10 @@
       </p:sp>
       <p:sp>
         <p:nvSpPr>
-          <p:cNvPr id="7" name="Date Placeholder 6">
+          <p:cNvPr id="11" name="Date Placeholder 10">
             <a:extLst>
               <a:ext uri="{FF2B5EF4-FFF2-40B4-BE49-F238E27FC236}">
-                <a16:creationId xmlns:a16="http://schemas.microsoft.com/office/drawing/2014/main" id="{E2ED1F55-3CE9-F618-3510-EE96FDC54304}"/>
+                <a16:creationId xmlns:a16="http://schemas.microsoft.com/office/drawing/2014/main" id="{CE3B72D0-0A08-8401-1102-DC8B6D528889}"/>
               </a:ext>
             </a:extLst>
           </p:cNvPr>
@@ -14371,10 +14236,10 @@
       </p:sp>
       <p:sp>
         <p:nvSpPr>
-          <p:cNvPr id="8" name="Footer Placeholder 7">
+          <p:cNvPr id="12" name="Footer Placeholder 11">
             <a:extLst>
               <a:ext uri="{FF2B5EF4-FFF2-40B4-BE49-F238E27FC236}">
-                <a16:creationId xmlns:a16="http://schemas.microsoft.com/office/drawing/2014/main" id="{0616AEA6-DD6E-40D4-2DDA-E355C068ABA2}"/>
+                <a16:creationId xmlns:a16="http://schemas.microsoft.com/office/drawing/2014/main" id="{06FDA1F9-F2A3-54A6-D8DB-F94C2CD5C623}"/>
               </a:ext>
             </a:extLst>
           </p:cNvPr>
@@ -14400,10 +14265,10 @@
       </p:sp>
       <p:sp>
         <p:nvSpPr>
-          <p:cNvPr id="9" name="Slide Number Placeholder 8">
+          <p:cNvPr id="13" name="Slide Number Placeholder 12">
             <a:extLst>
               <a:ext uri="{FF2B5EF4-FFF2-40B4-BE49-F238E27FC236}">
-                <a16:creationId xmlns:a16="http://schemas.microsoft.com/office/drawing/2014/main" id="{BD632E70-5D06-CAE0-ED30-149A6C1E3F1E}"/>
+                <a16:creationId xmlns:a16="http://schemas.microsoft.com/office/drawing/2014/main" id="{7FE0A592-9ACE-2460-AAA6-BCEAFC660CD2}"/>
               </a:ext>
             </a:extLst>
           </p:cNvPr>
@@ -14419,14 +14284,9 @@
           <a:bodyPr/>
           <a:lstStyle/>
           <a:p>
-            <a:pPr algn="ctr"/>
-            <a:r>
-              <a:rPr lang="en-US"/>
-              <a:t>Slide </a:t>
-            </a:r>
             <a:fld id="{C5EF2332-01BF-834F-8236-50238282D533}" type="slidenum">
               <a:rPr lang="en-US" smtClean="0"/>
-              <a:pPr algn="ctr"/>
+              <a:pPr/>
               <a:t>‹#›</a:t>
             </a:fld>
             <a:endParaRPr dirty="0" lang="en-US"/>
@@ -14487,10 +14347,10 @@
       </p:sp>
       <p:sp>
         <p:nvSpPr>
-          <p:cNvPr id="7" name="Date Placeholder 6">
+          <p:cNvPr id="5" name="Date Placeholder 4">
             <a:extLst>
               <a:ext uri="{FF2B5EF4-FFF2-40B4-BE49-F238E27FC236}">
-                <a16:creationId xmlns:a16="http://schemas.microsoft.com/office/drawing/2014/main" id="{7A3D4B62-A9D4-A224-853C-F47B5EEC33A2}"/>
+                <a16:creationId xmlns:a16="http://schemas.microsoft.com/office/drawing/2014/main" id="{CA956807-87AD-1B61-6635-A4BD697312DD}"/>
               </a:ext>
             </a:extLst>
           </p:cNvPr>
@@ -14517,10 +14377,10 @@
       </p:sp>
       <p:sp>
         <p:nvSpPr>
-          <p:cNvPr id="8" name="Footer Placeholder 7">
+          <p:cNvPr id="6" name="Footer Placeholder 5">
             <a:extLst>
               <a:ext uri="{FF2B5EF4-FFF2-40B4-BE49-F238E27FC236}">
-                <a16:creationId xmlns:a16="http://schemas.microsoft.com/office/drawing/2014/main" id="{FC227C7C-21CB-0721-ADC3-A51EEAD51D56}"/>
+                <a16:creationId xmlns:a16="http://schemas.microsoft.com/office/drawing/2014/main" id="{A848E190-73C6-8A24-D8B9-FC7B080DD00D}"/>
               </a:ext>
             </a:extLst>
           </p:cNvPr>
@@ -14546,10 +14406,10 @@
       </p:sp>
       <p:sp>
         <p:nvSpPr>
-          <p:cNvPr id="9" name="Slide Number Placeholder 8">
+          <p:cNvPr id="10" name="Slide Number Placeholder 9">
             <a:extLst>
               <a:ext uri="{FF2B5EF4-FFF2-40B4-BE49-F238E27FC236}">
-                <a16:creationId xmlns:a16="http://schemas.microsoft.com/office/drawing/2014/main" id="{E630E53C-392D-BD97-174E-961B24066A76}"/>
+                <a16:creationId xmlns:a16="http://schemas.microsoft.com/office/drawing/2014/main" id="{A4B39B83-B2B9-A607-75FD-CC4196FDAB48}"/>
               </a:ext>
             </a:extLst>
           </p:cNvPr>
@@ -14565,14 +14425,9 @@
           <a:bodyPr/>
           <a:lstStyle/>
           <a:p>
-            <a:pPr algn="ctr"/>
-            <a:r>
-              <a:rPr lang="en-US"/>
-              <a:t>Slide </a:t>
-            </a:r>
             <a:fld id="{C5EF2332-01BF-834F-8236-50238282D533}" type="slidenum">
               <a:rPr lang="en-US" smtClean="0"/>
-              <a:pPr algn="ctr"/>
+              <a:pPr/>
               <a:t>‹#›</a:t>
             </a:fld>
             <a:endParaRPr dirty="0" lang="en-US"/>
@@ -14677,10 +14532,10 @@
       </p:sp>
       <p:sp>
         <p:nvSpPr>
-          <p:cNvPr id="7" name="Date Placeholder 6">
+          <p:cNvPr id="11" name="Date Placeholder 10">
             <a:extLst>
               <a:ext uri="{FF2B5EF4-FFF2-40B4-BE49-F238E27FC236}">
-                <a16:creationId xmlns:a16="http://schemas.microsoft.com/office/drawing/2014/main" id="{E2ED1F55-3CE9-F618-3510-EE96FDC54304}"/>
+                <a16:creationId xmlns:a16="http://schemas.microsoft.com/office/drawing/2014/main" id="{CE3B72D0-0A08-8401-1102-DC8B6D528889}"/>
               </a:ext>
             </a:extLst>
           </p:cNvPr>
@@ -14707,10 +14562,10 @@
       </p:sp>
       <p:sp>
         <p:nvSpPr>
-          <p:cNvPr id="8" name="Footer Placeholder 7">
+          <p:cNvPr id="12" name="Footer Placeholder 11">
             <a:extLst>
               <a:ext uri="{FF2B5EF4-FFF2-40B4-BE49-F238E27FC236}">
-                <a16:creationId xmlns:a16="http://schemas.microsoft.com/office/drawing/2014/main" id="{0616AEA6-DD6E-40D4-2DDA-E355C068ABA2}"/>
+                <a16:creationId xmlns:a16="http://schemas.microsoft.com/office/drawing/2014/main" id="{06FDA1F9-F2A3-54A6-D8DB-F94C2CD5C623}"/>
               </a:ext>
             </a:extLst>
           </p:cNvPr>
@@ -14736,10 +14591,10 @@
       </p:sp>
       <p:sp>
         <p:nvSpPr>
-          <p:cNvPr id="9" name="Slide Number Placeholder 8">
+          <p:cNvPr id="13" name="Slide Number Placeholder 12">
             <a:extLst>
               <a:ext uri="{FF2B5EF4-FFF2-40B4-BE49-F238E27FC236}">
-                <a16:creationId xmlns:a16="http://schemas.microsoft.com/office/drawing/2014/main" id="{BD632E70-5D06-CAE0-ED30-149A6C1E3F1E}"/>
+                <a16:creationId xmlns:a16="http://schemas.microsoft.com/office/drawing/2014/main" id="{7FE0A592-9ACE-2460-AAA6-BCEAFC660CD2}"/>
               </a:ext>
             </a:extLst>
           </p:cNvPr>
@@ -14755,14 +14610,9 @@
           <a:bodyPr/>
           <a:lstStyle/>
           <a:p>
-            <a:pPr algn="ctr"/>
-            <a:r>
-              <a:rPr lang="en-US"/>
-              <a:t>Slide </a:t>
-            </a:r>
             <a:fld id="{C5EF2332-01BF-834F-8236-50238282D533}" type="slidenum">
               <a:rPr lang="en-US" smtClean="0"/>
-              <a:pPr algn="ctr"/>
+              <a:pPr/>
               <a:t>‹#›</a:t>
             </a:fld>
             <a:endParaRPr dirty="0" lang="en-US"/>
@@ -15028,10 +14878,10 @@
       </p:pic>
       <p:sp>
         <p:nvSpPr>
-          <p:cNvPr id="7" name="Date Placeholder 6">
+          <p:cNvPr id="11" name="Date Placeholder 10">
             <a:extLst>
               <a:ext uri="{FF2B5EF4-FFF2-40B4-BE49-F238E27FC236}">
-                <a16:creationId xmlns:a16="http://schemas.microsoft.com/office/drawing/2014/main" id="{E2ED1F55-3CE9-F618-3510-EE96FDC54304}"/>
+                <a16:creationId xmlns:a16="http://schemas.microsoft.com/office/drawing/2014/main" id="{CE3B72D0-0A08-8401-1102-DC8B6D528889}"/>
               </a:ext>
             </a:extLst>
           </p:cNvPr>
@@ -15058,10 +14908,10 @@
       </p:sp>
       <p:sp>
         <p:nvSpPr>
-          <p:cNvPr id="8" name="Footer Placeholder 7">
+          <p:cNvPr id="12" name="Footer Placeholder 11">
             <a:extLst>
               <a:ext uri="{FF2B5EF4-FFF2-40B4-BE49-F238E27FC236}">
-                <a16:creationId xmlns:a16="http://schemas.microsoft.com/office/drawing/2014/main" id="{0616AEA6-DD6E-40D4-2DDA-E355C068ABA2}"/>
+                <a16:creationId xmlns:a16="http://schemas.microsoft.com/office/drawing/2014/main" id="{06FDA1F9-F2A3-54A6-D8DB-F94C2CD5C623}"/>
               </a:ext>
             </a:extLst>
           </p:cNvPr>
@@ -15087,10 +14937,10 @@
       </p:sp>
       <p:sp>
         <p:nvSpPr>
-          <p:cNvPr id="9" name="Slide Number Placeholder 8">
+          <p:cNvPr id="13" name="Slide Number Placeholder 12">
             <a:extLst>
               <a:ext uri="{FF2B5EF4-FFF2-40B4-BE49-F238E27FC236}">
-                <a16:creationId xmlns:a16="http://schemas.microsoft.com/office/drawing/2014/main" id="{BD632E70-5D06-CAE0-ED30-149A6C1E3F1E}"/>
+                <a16:creationId xmlns:a16="http://schemas.microsoft.com/office/drawing/2014/main" id="{7FE0A592-9ACE-2460-AAA6-BCEAFC660CD2}"/>
               </a:ext>
             </a:extLst>
           </p:cNvPr>
@@ -15106,14 +14956,9 @@
           <a:bodyPr/>
           <a:lstStyle/>
           <a:p>
-            <a:pPr algn="ctr"/>
-            <a:r>
-              <a:rPr lang="en-US"/>
-              <a:t>Slide </a:t>
-            </a:r>
             <a:fld id="{C5EF2332-01BF-834F-8236-50238282D533}" type="slidenum">
               <a:rPr lang="en-US" smtClean="0"/>
-              <a:pPr algn="ctr"/>
+              <a:pPr/>
               <a:t>‹#›</a:t>
             </a:fld>
             <a:endParaRPr dirty="0" lang="en-US"/>
@@ -15270,10 +15115,10 @@
       </p:sp>
       <p:sp>
         <p:nvSpPr>
-          <p:cNvPr id="7" name="Date Placeholder 6">
+          <p:cNvPr id="11" name="Date Placeholder 10">
             <a:extLst>
               <a:ext uri="{FF2B5EF4-FFF2-40B4-BE49-F238E27FC236}">
-                <a16:creationId xmlns:a16="http://schemas.microsoft.com/office/drawing/2014/main" id="{E2ED1F55-3CE9-F618-3510-EE96FDC54304}"/>
+                <a16:creationId xmlns:a16="http://schemas.microsoft.com/office/drawing/2014/main" id="{CE3B72D0-0A08-8401-1102-DC8B6D528889}"/>
               </a:ext>
             </a:extLst>
           </p:cNvPr>
@@ -15300,10 +15145,10 @@
       </p:sp>
       <p:sp>
         <p:nvSpPr>
-          <p:cNvPr id="8" name="Footer Placeholder 7">
+          <p:cNvPr id="12" name="Footer Placeholder 11">
             <a:extLst>
               <a:ext uri="{FF2B5EF4-FFF2-40B4-BE49-F238E27FC236}">
-                <a16:creationId xmlns:a16="http://schemas.microsoft.com/office/drawing/2014/main" id="{0616AEA6-DD6E-40D4-2DDA-E355C068ABA2}"/>
+                <a16:creationId xmlns:a16="http://schemas.microsoft.com/office/drawing/2014/main" id="{06FDA1F9-F2A3-54A6-D8DB-F94C2CD5C623}"/>
               </a:ext>
             </a:extLst>
           </p:cNvPr>
@@ -15329,10 +15174,10 @@
       </p:sp>
       <p:sp>
         <p:nvSpPr>
-          <p:cNvPr id="9" name="Slide Number Placeholder 8">
+          <p:cNvPr id="13" name="Slide Number Placeholder 12">
             <a:extLst>
               <a:ext uri="{FF2B5EF4-FFF2-40B4-BE49-F238E27FC236}">
-                <a16:creationId xmlns:a16="http://schemas.microsoft.com/office/drawing/2014/main" id="{BD632E70-5D06-CAE0-ED30-149A6C1E3F1E}"/>
+                <a16:creationId xmlns:a16="http://schemas.microsoft.com/office/drawing/2014/main" id="{7FE0A592-9ACE-2460-AAA6-BCEAFC660CD2}"/>
               </a:ext>
             </a:extLst>
           </p:cNvPr>
@@ -15348,14 +15193,9 @@
           <a:bodyPr/>
           <a:lstStyle/>
           <a:p>
-            <a:pPr algn="ctr"/>
-            <a:r>
-              <a:rPr lang="en-US"/>
-              <a:t>Slide </a:t>
-            </a:r>
             <a:fld id="{C5EF2332-01BF-834F-8236-50238282D533}" type="slidenum">
               <a:rPr lang="en-US" smtClean="0"/>
-              <a:pPr algn="ctr"/>
+              <a:pPr/>
               <a:t>‹#›</a:t>
             </a:fld>
             <a:endParaRPr dirty="0" lang="en-US"/>
@@ -15601,10 +15441,10 @@
       </p:sp>
       <p:sp>
         <p:nvSpPr>
-          <p:cNvPr id="7" name="Date Placeholder 6">
+          <p:cNvPr id="11" name="Date Placeholder 10">
             <a:extLst>
               <a:ext uri="{FF2B5EF4-FFF2-40B4-BE49-F238E27FC236}">
-                <a16:creationId xmlns:a16="http://schemas.microsoft.com/office/drawing/2014/main" id="{E2ED1F55-3CE9-F618-3510-EE96FDC54304}"/>
+                <a16:creationId xmlns:a16="http://schemas.microsoft.com/office/drawing/2014/main" id="{CE3B72D0-0A08-8401-1102-DC8B6D528889}"/>
               </a:ext>
             </a:extLst>
           </p:cNvPr>
@@ -15631,10 +15471,10 @@
       </p:sp>
       <p:sp>
         <p:nvSpPr>
-          <p:cNvPr id="8" name="Footer Placeholder 7">
+          <p:cNvPr id="12" name="Footer Placeholder 11">
             <a:extLst>
               <a:ext uri="{FF2B5EF4-FFF2-40B4-BE49-F238E27FC236}">
-                <a16:creationId xmlns:a16="http://schemas.microsoft.com/office/drawing/2014/main" id="{0616AEA6-DD6E-40D4-2DDA-E355C068ABA2}"/>
+                <a16:creationId xmlns:a16="http://schemas.microsoft.com/office/drawing/2014/main" id="{06FDA1F9-F2A3-54A6-D8DB-F94C2CD5C623}"/>
               </a:ext>
             </a:extLst>
           </p:cNvPr>
@@ -15660,10 +15500,10 @@
       </p:sp>
       <p:sp>
         <p:nvSpPr>
-          <p:cNvPr id="9" name="Slide Number Placeholder 8">
+          <p:cNvPr id="13" name="Slide Number Placeholder 12">
             <a:extLst>
               <a:ext uri="{FF2B5EF4-FFF2-40B4-BE49-F238E27FC236}">
-                <a16:creationId xmlns:a16="http://schemas.microsoft.com/office/drawing/2014/main" id="{BD632E70-5D06-CAE0-ED30-149A6C1E3F1E}"/>
+                <a16:creationId xmlns:a16="http://schemas.microsoft.com/office/drawing/2014/main" id="{7FE0A592-9ACE-2460-AAA6-BCEAFC660CD2}"/>
               </a:ext>
             </a:extLst>
           </p:cNvPr>
@@ -15679,14 +15519,9 @@
           <a:bodyPr/>
           <a:lstStyle/>
           <a:p>
-            <a:pPr algn="ctr"/>
-            <a:r>
-              <a:rPr lang="en-US"/>
-              <a:t>Slide </a:t>
-            </a:r>
             <a:fld id="{C5EF2332-01BF-834F-8236-50238282D533}" type="slidenum">
               <a:rPr lang="en-US" smtClean="0"/>
-              <a:pPr algn="ctr"/>
+              <a:pPr/>
               <a:t>‹#›</a:t>
             </a:fld>
             <a:endParaRPr dirty="0" lang="en-US"/>
@@ -16069,10 +15904,10 @@
       </p:sp>
       <p:sp>
         <p:nvSpPr>
-          <p:cNvPr id="7" name="Date Placeholder 6">
+          <p:cNvPr id="11" name="Date Placeholder 10">
             <a:extLst>
               <a:ext uri="{FF2B5EF4-FFF2-40B4-BE49-F238E27FC236}">
-                <a16:creationId xmlns:a16="http://schemas.microsoft.com/office/drawing/2014/main" id="{E2ED1F55-3CE9-F618-3510-EE96FDC54304}"/>
+                <a16:creationId xmlns:a16="http://schemas.microsoft.com/office/drawing/2014/main" id="{CE3B72D0-0A08-8401-1102-DC8B6D528889}"/>
               </a:ext>
             </a:extLst>
           </p:cNvPr>
@@ -16099,10 +15934,10 @@
       </p:sp>
       <p:sp>
         <p:nvSpPr>
-          <p:cNvPr id="8" name="Footer Placeholder 7">
+          <p:cNvPr id="12" name="Footer Placeholder 11">
             <a:extLst>
               <a:ext uri="{FF2B5EF4-FFF2-40B4-BE49-F238E27FC236}">
-                <a16:creationId xmlns:a16="http://schemas.microsoft.com/office/drawing/2014/main" id="{0616AEA6-DD6E-40D4-2DDA-E355C068ABA2}"/>
+                <a16:creationId xmlns:a16="http://schemas.microsoft.com/office/drawing/2014/main" id="{06FDA1F9-F2A3-54A6-D8DB-F94C2CD5C623}"/>
               </a:ext>
             </a:extLst>
           </p:cNvPr>
@@ -16128,10 +15963,10 @@
       </p:sp>
       <p:sp>
         <p:nvSpPr>
-          <p:cNvPr id="9" name="Slide Number Placeholder 8">
+          <p:cNvPr id="13" name="Slide Number Placeholder 12">
             <a:extLst>
               <a:ext uri="{FF2B5EF4-FFF2-40B4-BE49-F238E27FC236}">
-                <a16:creationId xmlns:a16="http://schemas.microsoft.com/office/drawing/2014/main" id="{BD632E70-5D06-CAE0-ED30-149A6C1E3F1E}"/>
+                <a16:creationId xmlns:a16="http://schemas.microsoft.com/office/drawing/2014/main" id="{7FE0A592-9ACE-2460-AAA6-BCEAFC660CD2}"/>
               </a:ext>
             </a:extLst>
           </p:cNvPr>
@@ -16147,14 +15982,9 @@
           <a:bodyPr/>
           <a:lstStyle/>
           <a:p>
-            <a:pPr algn="ctr"/>
-            <a:r>
-              <a:rPr lang="en-US"/>
-              <a:t>Slide </a:t>
-            </a:r>
             <a:fld id="{C5EF2332-01BF-834F-8236-50238282D533}" type="slidenum">
               <a:rPr lang="en-US" smtClean="0"/>
-              <a:pPr algn="ctr"/>
+              <a:pPr/>
               <a:t>‹#›</a:t>
             </a:fld>
             <a:endParaRPr dirty="0" lang="en-US"/>
@@ -16289,10 +16119,10 @@
       </p:sp>
       <p:sp>
         <p:nvSpPr>
-          <p:cNvPr id="7" name="Date Placeholder 6">
+          <p:cNvPr id="11" name="Date Placeholder 10">
             <a:extLst>
               <a:ext uri="{FF2B5EF4-FFF2-40B4-BE49-F238E27FC236}">
-                <a16:creationId xmlns:a16="http://schemas.microsoft.com/office/drawing/2014/main" id="{E2ED1F55-3CE9-F618-3510-EE96FDC54304}"/>
+                <a16:creationId xmlns:a16="http://schemas.microsoft.com/office/drawing/2014/main" id="{CE3B72D0-0A08-8401-1102-DC8B6D528889}"/>
               </a:ext>
             </a:extLst>
           </p:cNvPr>
@@ -16319,10 +16149,10 @@
       </p:sp>
       <p:sp>
         <p:nvSpPr>
-          <p:cNvPr id="8" name="Footer Placeholder 7">
+          <p:cNvPr id="12" name="Footer Placeholder 11">
             <a:extLst>
               <a:ext uri="{FF2B5EF4-FFF2-40B4-BE49-F238E27FC236}">
-                <a16:creationId xmlns:a16="http://schemas.microsoft.com/office/drawing/2014/main" id="{0616AEA6-DD6E-40D4-2DDA-E355C068ABA2}"/>
+                <a16:creationId xmlns:a16="http://schemas.microsoft.com/office/drawing/2014/main" id="{06FDA1F9-F2A3-54A6-D8DB-F94C2CD5C623}"/>
               </a:ext>
             </a:extLst>
           </p:cNvPr>
@@ -16348,10 +16178,10 @@
       </p:sp>
       <p:sp>
         <p:nvSpPr>
-          <p:cNvPr id="9" name="Slide Number Placeholder 8">
+          <p:cNvPr id="13" name="Slide Number Placeholder 12">
             <a:extLst>
               <a:ext uri="{FF2B5EF4-FFF2-40B4-BE49-F238E27FC236}">
-                <a16:creationId xmlns:a16="http://schemas.microsoft.com/office/drawing/2014/main" id="{BD632E70-5D06-CAE0-ED30-149A6C1E3F1E}"/>
+                <a16:creationId xmlns:a16="http://schemas.microsoft.com/office/drawing/2014/main" id="{7FE0A592-9ACE-2460-AAA6-BCEAFC660CD2}"/>
               </a:ext>
             </a:extLst>
           </p:cNvPr>
@@ -16367,14 +16197,9 @@
           <a:bodyPr/>
           <a:lstStyle/>
           <a:p>
-            <a:pPr algn="ctr"/>
-            <a:r>
-              <a:rPr lang="en-US"/>
-              <a:t>Slide </a:t>
-            </a:r>
             <a:fld id="{C5EF2332-01BF-834F-8236-50238282D533}" type="slidenum">
               <a:rPr lang="en-US" smtClean="0"/>
-              <a:pPr algn="ctr"/>
+              <a:pPr/>
               <a:t>‹#›</a:t>
             </a:fld>
             <a:endParaRPr dirty="0" lang="en-US"/>
@@ -16788,10 +16613,10 @@
       </p:sp>
       <p:sp>
         <p:nvSpPr>
-          <p:cNvPr id="7" name="Date Placeholder 6">
+          <p:cNvPr id="11" name="Date Placeholder 10">
             <a:extLst>
               <a:ext uri="{FF2B5EF4-FFF2-40B4-BE49-F238E27FC236}">
-                <a16:creationId xmlns:a16="http://schemas.microsoft.com/office/drawing/2014/main" id="{E2ED1F55-3CE9-F618-3510-EE96FDC54304}"/>
+                <a16:creationId xmlns:a16="http://schemas.microsoft.com/office/drawing/2014/main" id="{CE3B72D0-0A08-8401-1102-DC8B6D528889}"/>
               </a:ext>
             </a:extLst>
           </p:cNvPr>
@@ -16818,10 +16643,10 @@
       </p:sp>
       <p:sp>
         <p:nvSpPr>
-          <p:cNvPr id="8" name="Footer Placeholder 7">
+          <p:cNvPr id="12" name="Footer Placeholder 11">
             <a:extLst>
               <a:ext uri="{FF2B5EF4-FFF2-40B4-BE49-F238E27FC236}">
-                <a16:creationId xmlns:a16="http://schemas.microsoft.com/office/drawing/2014/main" id="{0616AEA6-DD6E-40D4-2DDA-E355C068ABA2}"/>
+                <a16:creationId xmlns:a16="http://schemas.microsoft.com/office/drawing/2014/main" id="{06FDA1F9-F2A3-54A6-D8DB-F94C2CD5C623}"/>
               </a:ext>
             </a:extLst>
           </p:cNvPr>
@@ -16847,10 +16672,10 @@
       </p:sp>
       <p:sp>
         <p:nvSpPr>
-          <p:cNvPr id="9" name="Slide Number Placeholder 8">
+          <p:cNvPr id="13" name="Slide Number Placeholder 12">
             <a:extLst>
               <a:ext uri="{FF2B5EF4-FFF2-40B4-BE49-F238E27FC236}">
-                <a16:creationId xmlns:a16="http://schemas.microsoft.com/office/drawing/2014/main" id="{BD632E70-5D06-CAE0-ED30-149A6C1E3F1E}"/>
+                <a16:creationId xmlns:a16="http://schemas.microsoft.com/office/drawing/2014/main" id="{7FE0A592-9ACE-2460-AAA6-BCEAFC660CD2}"/>
               </a:ext>
             </a:extLst>
           </p:cNvPr>
@@ -16866,14 +16691,9 @@
           <a:bodyPr/>
           <a:lstStyle/>
           <a:p>
-            <a:pPr algn="ctr"/>
-            <a:r>
-              <a:rPr lang="en-US"/>
-              <a:t>Slide </a:t>
-            </a:r>
             <a:fld id="{C5EF2332-01BF-834F-8236-50238282D533}" type="slidenum">
               <a:rPr lang="en-US" smtClean="0"/>
-              <a:pPr algn="ctr"/>
+              <a:pPr/>
               <a:t>‹#›</a:t>
             </a:fld>
             <a:endParaRPr dirty="0" lang="en-US"/>
@@ -17140,10 +16960,10 @@
       </p:sp>
       <p:sp>
         <p:nvSpPr>
-          <p:cNvPr id="7" name="Date Placeholder 6">
+          <p:cNvPr id="11" name="Date Placeholder 10">
             <a:extLst>
               <a:ext uri="{FF2B5EF4-FFF2-40B4-BE49-F238E27FC236}">
-                <a16:creationId xmlns:a16="http://schemas.microsoft.com/office/drawing/2014/main" id="{E2ED1F55-3CE9-F618-3510-EE96FDC54304}"/>
+                <a16:creationId xmlns:a16="http://schemas.microsoft.com/office/drawing/2014/main" id="{CE3B72D0-0A08-8401-1102-DC8B6D528889}"/>
               </a:ext>
             </a:extLst>
           </p:cNvPr>
@@ -17170,10 +16990,10 @@
       </p:sp>
       <p:sp>
         <p:nvSpPr>
-          <p:cNvPr id="8" name="Footer Placeholder 7">
+          <p:cNvPr id="12" name="Footer Placeholder 11">
             <a:extLst>
               <a:ext uri="{FF2B5EF4-FFF2-40B4-BE49-F238E27FC236}">
-                <a16:creationId xmlns:a16="http://schemas.microsoft.com/office/drawing/2014/main" id="{0616AEA6-DD6E-40D4-2DDA-E355C068ABA2}"/>
+                <a16:creationId xmlns:a16="http://schemas.microsoft.com/office/drawing/2014/main" id="{06FDA1F9-F2A3-54A6-D8DB-F94C2CD5C623}"/>
               </a:ext>
             </a:extLst>
           </p:cNvPr>
@@ -17199,10 +17019,10 @@
       </p:sp>
       <p:sp>
         <p:nvSpPr>
-          <p:cNvPr id="9" name="Slide Number Placeholder 8">
+          <p:cNvPr id="13" name="Slide Number Placeholder 12">
             <a:extLst>
               <a:ext uri="{FF2B5EF4-FFF2-40B4-BE49-F238E27FC236}">
-                <a16:creationId xmlns:a16="http://schemas.microsoft.com/office/drawing/2014/main" id="{BD632E70-5D06-CAE0-ED30-149A6C1E3F1E}"/>
+                <a16:creationId xmlns:a16="http://schemas.microsoft.com/office/drawing/2014/main" id="{7FE0A592-9ACE-2460-AAA6-BCEAFC660CD2}"/>
               </a:ext>
             </a:extLst>
           </p:cNvPr>
@@ -17218,14 +17038,9 @@
           <a:bodyPr/>
           <a:lstStyle/>
           <a:p>
-            <a:pPr algn="ctr"/>
-            <a:r>
-              <a:rPr lang="en-US"/>
-              <a:t>Slide </a:t>
-            </a:r>
             <a:fld id="{C5EF2332-01BF-834F-8236-50238282D533}" type="slidenum">
               <a:rPr lang="en-US" smtClean="0"/>
-              <a:pPr algn="ctr"/>
+              <a:pPr/>
               <a:t>‹#›</a:t>
             </a:fld>
             <a:endParaRPr dirty="0" lang="en-US"/>
@@ -17559,10 +17374,10 @@
       </p:sp>
       <p:sp>
         <p:nvSpPr>
-          <p:cNvPr id="7" name="Date Placeholder 6">
+          <p:cNvPr id="11" name="Date Placeholder 10">
             <a:extLst>
               <a:ext uri="{FF2B5EF4-FFF2-40B4-BE49-F238E27FC236}">
-                <a16:creationId xmlns:a16="http://schemas.microsoft.com/office/drawing/2014/main" id="{E2ED1F55-3CE9-F618-3510-EE96FDC54304}"/>
+                <a16:creationId xmlns:a16="http://schemas.microsoft.com/office/drawing/2014/main" id="{CE3B72D0-0A08-8401-1102-DC8B6D528889}"/>
               </a:ext>
             </a:extLst>
           </p:cNvPr>
@@ -17589,10 +17404,10 @@
       </p:sp>
       <p:sp>
         <p:nvSpPr>
-          <p:cNvPr id="8" name="Footer Placeholder 7">
+          <p:cNvPr id="12" name="Footer Placeholder 11">
             <a:extLst>
               <a:ext uri="{FF2B5EF4-FFF2-40B4-BE49-F238E27FC236}">
-                <a16:creationId xmlns:a16="http://schemas.microsoft.com/office/drawing/2014/main" id="{0616AEA6-DD6E-40D4-2DDA-E355C068ABA2}"/>
+                <a16:creationId xmlns:a16="http://schemas.microsoft.com/office/drawing/2014/main" id="{06FDA1F9-F2A3-54A6-D8DB-F94C2CD5C623}"/>
               </a:ext>
             </a:extLst>
           </p:cNvPr>
@@ -17618,10 +17433,10 @@
       </p:sp>
       <p:sp>
         <p:nvSpPr>
-          <p:cNvPr id="9" name="Slide Number Placeholder 8">
+          <p:cNvPr id="13" name="Slide Number Placeholder 12">
             <a:extLst>
               <a:ext uri="{FF2B5EF4-FFF2-40B4-BE49-F238E27FC236}">
-                <a16:creationId xmlns:a16="http://schemas.microsoft.com/office/drawing/2014/main" id="{BD632E70-5D06-CAE0-ED30-149A6C1E3F1E}"/>
+                <a16:creationId xmlns:a16="http://schemas.microsoft.com/office/drawing/2014/main" id="{7FE0A592-9ACE-2460-AAA6-BCEAFC660CD2}"/>
               </a:ext>
             </a:extLst>
           </p:cNvPr>
@@ -17637,14 +17452,9 @@
           <a:bodyPr/>
           <a:lstStyle/>
           <a:p>
-            <a:pPr algn="ctr"/>
-            <a:r>
-              <a:rPr lang="en-US"/>
-              <a:t>Slide </a:t>
-            </a:r>
             <a:fld id="{C5EF2332-01BF-834F-8236-50238282D533}" type="slidenum">
               <a:rPr lang="en-US" smtClean="0"/>
-              <a:pPr algn="ctr"/>
+              <a:pPr/>
               <a:t>‹#›</a:t>
             </a:fld>
             <a:endParaRPr dirty="0" lang="en-US"/>
@@ -17736,10 +17546,10 @@
       </p:sp>
       <p:sp>
         <p:nvSpPr>
-          <p:cNvPr id="7" name="Date Placeholder 6">
+          <p:cNvPr id="11" name="Date Placeholder 10">
             <a:extLst>
               <a:ext uri="{FF2B5EF4-FFF2-40B4-BE49-F238E27FC236}">
-                <a16:creationId xmlns:a16="http://schemas.microsoft.com/office/drawing/2014/main" id="{E2ED1F55-3CE9-F618-3510-EE96FDC54304}"/>
+                <a16:creationId xmlns:a16="http://schemas.microsoft.com/office/drawing/2014/main" id="{CE3B72D0-0A08-8401-1102-DC8B6D528889}"/>
               </a:ext>
             </a:extLst>
           </p:cNvPr>
@@ -17766,10 +17576,10 @@
       </p:sp>
       <p:sp>
         <p:nvSpPr>
-          <p:cNvPr id="8" name="Footer Placeholder 7">
+          <p:cNvPr id="12" name="Footer Placeholder 11">
             <a:extLst>
               <a:ext uri="{FF2B5EF4-FFF2-40B4-BE49-F238E27FC236}">
-                <a16:creationId xmlns:a16="http://schemas.microsoft.com/office/drawing/2014/main" id="{0616AEA6-DD6E-40D4-2DDA-E355C068ABA2}"/>
+                <a16:creationId xmlns:a16="http://schemas.microsoft.com/office/drawing/2014/main" id="{06FDA1F9-F2A3-54A6-D8DB-F94C2CD5C623}"/>
               </a:ext>
             </a:extLst>
           </p:cNvPr>
@@ -17795,10 +17605,10 @@
       </p:sp>
       <p:sp>
         <p:nvSpPr>
-          <p:cNvPr id="9" name="Slide Number Placeholder 8">
+          <p:cNvPr id="13" name="Slide Number Placeholder 12">
             <a:extLst>
               <a:ext uri="{FF2B5EF4-FFF2-40B4-BE49-F238E27FC236}">
-                <a16:creationId xmlns:a16="http://schemas.microsoft.com/office/drawing/2014/main" id="{BD632E70-5D06-CAE0-ED30-149A6C1E3F1E}"/>
+                <a16:creationId xmlns:a16="http://schemas.microsoft.com/office/drawing/2014/main" id="{7FE0A592-9ACE-2460-AAA6-BCEAFC660CD2}"/>
               </a:ext>
             </a:extLst>
           </p:cNvPr>
@@ -17814,14 +17624,9 @@
           <a:bodyPr/>
           <a:lstStyle/>
           <a:p>
-            <a:pPr algn="ctr"/>
-            <a:r>
-              <a:rPr lang="en-US"/>
-              <a:t>Slide </a:t>
-            </a:r>
             <a:fld id="{C5EF2332-01BF-834F-8236-50238282D533}" type="slidenum">
               <a:rPr lang="en-US" smtClean="0"/>
-              <a:pPr algn="ctr"/>
+              <a:pPr/>
               <a:t>‹#›</a:t>
             </a:fld>
             <a:endParaRPr dirty="0" lang="en-US"/>
@@ -18159,10 +17964,10 @@
       </p:sp>
       <p:sp>
         <p:nvSpPr>
-          <p:cNvPr id="7" name="Date Placeholder 6">
+          <p:cNvPr id="11" name="Date Placeholder 10">
             <a:extLst>
               <a:ext uri="{FF2B5EF4-FFF2-40B4-BE49-F238E27FC236}">
-                <a16:creationId xmlns:a16="http://schemas.microsoft.com/office/drawing/2014/main" id="{E2ED1F55-3CE9-F618-3510-EE96FDC54304}"/>
+                <a16:creationId xmlns:a16="http://schemas.microsoft.com/office/drawing/2014/main" id="{CE3B72D0-0A08-8401-1102-DC8B6D528889}"/>
               </a:ext>
             </a:extLst>
           </p:cNvPr>
@@ -18189,10 +17994,10 @@
       </p:sp>
       <p:sp>
         <p:nvSpPr>
-          <p:cNvPr id="8" name="Footer Placeholder 7">
+          <p:cNvPr id="12" name="Footer Placeholder 11">
             <a:extLst>
               <a:ext uri="{FF2B5EF4-FFF2-40B4-BE49-F238E27FC236}">
-                <a16:creationId xmlns:a16="http://schemas.microsoft.com/office/drawing/2014/main" id="{0616AEA6-DD6E-40D4-2DDA-E355C068ABA2}"/>
+                <a16:creationId xmlns:a16="http://schemas.microsoft.com/office/drawing/2014/main" id="{06FDA1F9-F2A3-54A6-D8DB-F94C2CD5C623}"/>
               </a:ext>
             </a:extLst>
           </p:cNvPr>
@@ -18218,10 +18023,10 @@
       </p:sp>
       <p:sp>
         <p:nvSpPr>
-          <p:cNvPr id="9" name="Slide Number Placeholder 8">
+          <p:cNvPr id="13" name="Slide Number Placeholder 12">
             <a:extLst>
               <a:ext uri="{FF2B5EF4-FFF2-40B4-BE49-F238E27FC236}">
-                <a16:creationId xmlns:a16="http://schemas.microsoft.com/office/drawing/2014/main" id="{BD632E70-5D06-CAE0-ED30-149A6C1E3F1E}"/>
+                <a16:creationId xmlns:a16="http://schemas.microsoft.com/office/drawing/2014/main" id="{7FE0A592-9ACE-2460-AAA6-BCEAFC660CD2}"/>
               </a:ext>
             </a:extLst>
           </p:cNvPr>
@@ -18237,14 +18042,9 @@
           <a:bodyPr/>
           <a:lstStyle/>
           <a:p>
-            <a:pPr algn="ctr"/>
-            <a:r>
-              <a:rPr lang="en-US"/>
-              <a:t>Slide </a:t>
-            </a:r>
             <a:fld id="{C5EF2332-01BF-834F-8236-50238282D533}" type="slidenum">
               <a:rPr lang="en-US" smtClean="0"/>
-              <a:pPr algn="ctr"/>
+              <a:pPr/>
               <a:t>‹#›</a:t>
             </a:fld>
             <a:endParaRPr dirty="0" lang="en-US"/>
@@ -18603,10 +18403,10 @@
       </p:sp>
       <p:sp>
         <p:nvSpPr>
-          <p:cNvPr id="7" name="Date Placeholder 6">
+          <p:cNvPr id="11" name="Date Placeholder 10">
             <a:extLst>
               <a:ext uri="{FF2B5EF4-FFF2-40B4-BE49-F238E27FC236}">
-                <a16:creationId xmlns:a16="http://schemas.microsoft.com/office/drawing/2014/main" id="{E2ED1F55-3CE9-F618-3510-EE96FDC54304}"/>
+                <a16:creationId xmlns:a16="http://schemas.microsoft.com/office/drawing/2014/main" id="{CE3B72D0-0A08-8401-1102-DC8B6D528889}"/>
               </a:ext>
             </a:extLst>
           </p:cNvPr>
@@ -18633,10 +18433,10 @@
       </p:sp>
       <p:sp>
         <p:nvSpPr>
-          <p:cNvPr id="8" name="Footer Placeholder 7">
+          <p:cNvPr id="12" name="Footer Placeholder 11">
             <a:extLst>
               <a:ext uri="{FF2B5EF4-FFF2-40B4-BE49-F238E27FC236}">
-                <a16:creationId xmlns:a16="http://schemas.microsoft.com/office/drawing/2014/main" id="{0616AEA6-DD6E-40D4-2DDA-E355C068ABA2}"/>
+                <a16:creationId xmlns:a16="http://schemas.microsoft.com/office/drawing/2014/main" id="{06FDA1F9-F2A3-54A6-D8DB-F94C2CD5C623}"/>
               </a:ext>
             </a:extLst>
           </p:cNvPr>
@@ -18662,10 +18462,10 @@
       </p:sp>
       <p:sp>
         <p:nvSpPr>
-          <p:cNvPr id="9" name="Slide Number Placeholder 8">
+          <p:cNvPr id="13" name="Slide Number Placeholder 12">
             <a:extLst>
               <a:ext uri="{FF2B5EF4-FFF2-40B4-BE49-F238E27FC236}">
-                <a16:creationId xmlns:a16="http://schemas.microsoft.com/office/drawing/2014/main" id="{BD632E70-5D06-CAE0-ED30-149A6C1E3F1E}"/>
+                <a16:creationId xmlns:a16="http://schemas.microsoft.com/office/drawing/2014/main" id="{7FE0A592-9ACE-2460-AAA6-BCEAFC660CD2}"/>
               </a:ext>
             </a:extLst>
           </p:cNvPr>
@@ -18681,14 +18481,9 @@
           <a:bodyPr/>
           <a:lstStyle/>
           <a:p>
-            <a:pPr algn="ctr"/>
-            <a:r>
-              <a:rPr lang="en-US"/>
-              <a:t>Slide </a:t>
-            </a:r>
             <a:fld id="{C5EF2332-01BF-834F-8236-50238282D533}" type="slidenum">
               <a:rPr lang="en-US" smtClean="0"/>
-              <a:pPr algn="ctr"/>
+              <a:pPr/>
               <a:t>‹#›</a:t>
             </a:fld>
             <a:endParaRPr dirty="0" lang="en-US"/>
@@ -18744,10 +18539,10 @@
       </p:sp>
       <p:sp>
         <p:nvSpPr>
-          <p:cNvPr id="7" name="Date Placeholder 6">
+          <p:cNvPr id="11" name="Date Placeholder 10">
             <a:extLst>
               <a:ext uri="{FF2B5EF4-FFF2-40B4-BE49-F238E27FC236}">
-                <a16:creationId xmlns:a16="http://schemas.microsoft.com/office/drawing/2014/main" id="{E2ED1F55-3CE9-F618-3510-EE96FDC54304}"/>
+                <a16:creationId xmlns:a16="http://schemas.microsoft.com/office/drawing/2014/main" id="{CE3B72D0-0A08-8401-1102-DC8B6D528889}"/>
               </a:ext>
             </a:extLst>
           </p:cNvPr>
@@ -18774,10 +18569,10 @@
       </p:sp>
       <p:sp>
         <p:nvSpPr>
-          <p:cNvPr id="8" name="Footer Placeholder 7">
+          <p:cNvPr id="12" name="Footer Placeholder 11">
             <a:extLst>
               <a:ext uri="{FF2B5EF4-FFF2-40B4-BE49-F238E27FC236}">
-                <a16:creationId xmlns:a16="http://schemas.microsoft.com/office/drawing/2014/main" id="{0616AEA6-DD6E-40D4-2DDA-E355C068ABA2}"/>
+                <a16:creationId xmlns:a16="http://schemas.microsoft.com/office/drawing/2014/main" id="{06FDA1F9-F2A3-54A6-D8DB-F94C2CD5C623}"/>
               </a:ext>
             </a:extLst>
           </p:cNvPr>
@@ -18803,10 +18598,10 @@
       </p:sp>
       <p:sp>
         <p:nvSpPr>
-          <p:cNvPr id="9" name="Slide Number Placeholder 8">
+          <p:cNvPr id="13" name="Slide Number Placeholder 12">
             <a:extLst>
               <a:ext uri="{FF2B5EF4-FFF2-40B4-BE49-F238E27FC236}">
-                <a16:creationId xmlns:a16="http://schemas.microsoft.com/office/drawing/2014/main" id="{BD632E70-5D06-CAE0-ED30-149A6C1E3F1E}"/>
+                <a16:creationId xmlns:a16="http://schemas.microsoft.com/office/drawing/2014/main" id="{7FE0A592-9ACE-2460-AAA6-BCEAFC660CD2}"/>
               </a:ext>
             </a:extLst>
           </p:cNvPr>
@@ -18822,14 +18617,9 @@
           <a:bodyPr/>
           <a:lstStyle/>
           <a:p>
-            <a:pPr algn="ctr"/>
-            <a:r>
-              <a:rPr lang="en-US"/>
-              <a:t>Slide </a:t>
-            </a:r>
             <a:fld id="{C5EF2332-01BF-834F-8236-50238282D533}" type="slidenum">
               <a:rPr lang="en-US" smtClean="0"/>
-              <a:pPr algn="ctr"/>
+              <a:pPr/>
               <a:t>‹#›</a:t>
             </a:fld>
             <a:endParaRPr dirty="0" lang="en-US"/>
@@ -18910,10 +18700,10 @@
       </p:sp>
       <p:sp>
         <p:nvSpPr>
-          <p:cNvPr id="7" name="Date Placeholder 6">
+          <p:cNvPr id="11" name="Date Placeholder 10">
             <a:extLst>
               <a:ext uri="{FF2B5EF4-FFF2-40B4-BE49-F238E27FC236}">
-                <a16:creationId xmlns:a16="http://schemas.microsoft.com/office/drawing/2014/main" id="{E2ED1F55-3CE9-F618-3510-EE96FDC54304}"/>
+                <a16:creationId xmlns:a16="http://schemas.microsoft.com/office/drawing/2014/main" id="{CE3B72D0-0A08-8401-1102-DC8B6D528889}"/>
               </a:ext>
             </a:extLst>
           </p:cNvPr>
@@ -18940,10 +18730,10 @@
       </p:sp>
       <p:sp>
         <p:nvSpPr>
-          <p:cNvPr id="8" name="Footer Placeholder 7">
+          <p:cNvPr id="12" name="Footer Placeholder 11">
             <a:extLst>
               <a:ext uri="{FF2B5EF4-FFF2-40B4-BE49-F238E27FC236}">
-                <a16:creationId xmlns:a16="http://schemas.microsoft.com/office/drawing/2014/main" id="{0616AEA6-DD6E-40D4-2DDA-E355C068ABA2}"/>
+                <a16:creationId xmlns:a16="http://schemas.microsoft.com/office/drawing/2014/main" id="{06FDA1F9-F2A3-54A6-D8DB-F94C2CD5C623}"/>
               </a:ext>
             </a:extLst>
           </p:cNvPr>
@@ -18969,10 +18759,10 @@
       </p:sp>
       <p:sp>
         <p:nvSpPr>
-          <p:cNvPr id="9" name="Slide Number Placeholder 8">
+          <p:cNvPr id="13" name="Slide Number Placeholder 12">
             <a:extLst>
               <a:ext uri="{FF2B5EF4-FFF2-40B4-BE49-F238E27FC236}">
-                <a16:creationId xmlns:a16="http://schemas.microsoft.com/office/drawing/2014/main" id="{BD632E70-5D06-CAE0-ED30-149A6C1E3F1E}"/>
+                <a16:creationId xmlns:a16="http://schemas.microsoft.com/office/drawing/2014/main" id="{7FE0A592-9ACE-2460-AAA6-BCEAFC660CD2}"/>
               </a:ext>
             </a:extLst>
           </p:cNvPr>
@@ -18988,14 +18778,9 @@
           <a:bodyPr/>
           <a:lstStyle/>
           <a:p>
-            <a:pPr algn="ctr"/>
-            <a:r>
-              <a:rPr lang="en-US"/>
-              <a:t>Slide </a:t>
-            </a:r>
             <a:fld id="{C5EF2332-01BF-834F-8236-50238282D533}" type="slidenum">
               <a:rPr lang="en-US" smtClean="0"/>
-              <a:pPr algn="ctr"/>
+              <a:pPr/>
               <a:t>‹#›</a:t>
             </a:fld>
             <a:endParaRPr dirty="0" lang="en-US"/>
@@ -19078,10 +18863,10 @@
       </p:sp>
       <p:sp>
         <p:nvSpPr>
-          <p:cNvPr id="7" name="Date Placeholder 6">
+          <p:cNvPr id="11" name="Date Placeholder 10">
             <a:extLst>
               <a:ext uri="{FF2B5EF4-FFF2-40B4-BE49-F238E27FC236}">
-                <a16:creationId xmlns:a16="http://schemas.microsoft.com/office/drawing/2014/main" id="{E2ED1F55-3CE9-F618-3510-EE96FDC54304}"/>
+                <a16:creationId xmlns:a16="http://schemas.microsoft.com/office/drawing/2014/main" id="{CE3B72D0-0A08-8401-1102-DC8B6D528889}"/>
               </a:ext>
             </a:extLst>
           </p:cNvPr>
@@ -19108,10 +18893,10 @@
       </p:sp>
       <p:sp>
         <p:nvSpPr>
-          <p:cNvPr id="8" name="Footer Placeholder 7">
+          <p:cNvPr id="12" name="Footer Placeholder 11">
             <a:extLst>
               <a:ext uri="{FF2B5EF4-FFF2-40B4-BE49-F238E27FC236}">
-                <a16:creationId xmlns:a16="http://schemas.microsoft.com/office/drawing/2014/main" id="{0616AEA6-DD6E-40D4-2DDA-E355C068ABA2}"/>
+                <a16:creationId xmlns:a16="http://schemas.microsoft.com/office/drawing/2014/main" id="{06FDA1F9-F2A3-54A6-D8DB-F94C2CD5C623}"/>
               </a:ext>
             </a:extLst>
           </p:cNvPr>
@@ -19137,10 +18922,10 @@
       </p:sp>
       <p:sp>
         <p:nvSpPr>
-          <p:cNvPr id="9" name="Slide Number Placeholder 8">
+          <p:cNvPr id="13" name="Slide Number Placeholder 12">
             <a:extLst>
               <a:ext uri="{FF2B5EF4-FFF2-40B4-BE49-F238E27FC236}">
-                <a16:creationId xmlns:a16="http://schemas.microsoft.com/office/drawing/2014/main" id="{BD632E70-5D06-CAE0-ED30-149A6C1E3F1E}"/>
+                <a16:creationId xmlns:a16="http://schemas.microsoft.com/office/drawing/2014/main" id="{7FE0A592-9ACE-2460-AAA6-BCEAFC660CD2}"/>
               </a:ext>
             </a:extLst>
           </p:cNvPr>
@@ -19156,14 +18941,9 @@
           <a:bodyPr/>
           <a:lstStyle/>
           <a:p>
-            <a:pPr algn="ctr"/>
-            <a:r>
-              <a:rPr lang="en-US"/>
-              <a:t>Slide </a:t>
-            </a:r>
             <a:fld id="{C5EF2332-01BF-834F-8236-50238282D533}" type="slidenum">
               <a:rPr lang="en-US" smtClean="0"/>
-              <a:pPr algn="ctr"/>
+              <a:pPr/>
               <a:t>‹#›</a:t>
             </a:fld>
             <a:endParaRPr dirty="0" lang="en-US"/>
@@ -19561,10 +19341,10 @@
       </p:graphicFrame>
       <p:sp>
         <p:nvSpPr>
-          <p:cNvPr id="8" name="Date Placeholder 7">
+          <p:cNvPr id="6" name="Date Placeholder 5">
             <a:extLst>
               <a:ext uri="{FF2B5EF4-FFF2-40B4-BE49-F238E27FC236}">
-                <a16:creationId xmlns:a16="http://schemas.microsoft.com/office/drawing/2014/main" id="{E6D5126F-053F-910F-7F76-D928AC61372D}"/>
+                <a16:creationId xmlns:a16="http://schemas.microsoft.com/office/drawing/2014/main" id="{4D4823E0-4AC4-556E-D341-7EC0B24627F1}"/>
               </a:ext>
             </a:extLst>
           </p:cNvPr>
@@ -19591,10 +19371,10 @@
       </p:sp>
       <p:sp>
         <p:nvSpPr>
-          <p:cNvPr id="9" name="Footer Placeholder 8">
+          <p:cNvPr id="7" name="Footer Placeholder 6">
             <a:extLst>
               <a:ext uri="{FF2B5EF4-FFF2-40B4-BE49-F238E27FC236}">
-                <a16:creationId xmlns:a16="http://schemas.microsoft.com/office/drawing/2014/main" id="{8EEF7D04-FF72-0698-CE48-A9A4F70D774F}"/>
+                <a16:creationId xmlns:a16="http://schemas.microsoft.com/office/drawing/2014/main" id="{DA033808-7DA7-BCE5-7841-A080B9791E38}"/>
               </a:ext>
             </a:extLst>
           </p:cNvPr>
@@ -19620,10 +19400,10 @@
       </p:sp>
       <p:sp>
         <p:nvSpPr>
-          <p:cNvPr id="10" name="Slide Number Placeholder 9">
+          <p:cNvPr id="11" name="Slide Number Placeholder 10">
             <a:extLst>
               <a:ext uri="{FF2B5EF4-FFF2-40B4-BE49-F238E27FC236}">
-                <a16:creationId xmlns:a16="http://schemas.microsoft.com/office/drawing/2014/main" id="{C8B1F07D-59FC-87D1-1BB5-7C86711059AF}"/>
+                <a16:creationId xmlns:a16="http://schemas.microsoft.com/office/drawing/2014/main" id="{F114B9F3-9BDF-91CE-CDEA-A368776345DA}"/>
               </a:ext>
             </a:extLst>
           </p:cNvPr>
@@ -19639,14 +19419,9 @@
           <a:bodyPr/>
           <a:lstStyle/>
           <a:p>
-            <a:pPr algn="ctr"/>
-            <a:r>
-              <a:rPr lang="en-US"/>
-              <a:t>Slide </a:t>
-            </a:r>
             <a:fld id="{C5EF2332-01BF-834F-8236-50238282D533}" type="slidenum">
               <a:rPr lang="en-US" smtClean="0"/>
-              <a:pPr algn="ctr"/>
+              <a:pPr/>
               <a:t>‹#›</a:t>
             </a:fld>
             <a:endParaRPr dirty="0" lang="en-US"/>
@@ -19756,10 +19531,10 @@
       </p:sp>
       <p:sp>
         <p:nvSpPr>
-          <p:cNvPr id="7" name="Date Placeholder 6">
+          <p:cNvPr id="11" name="Date Placeholder 10">
             <a:extLst>
               <a:ext uri="{FF2B5EF4-FFF2-40B4-BE49-F238E27FC236}">
-                <a16:creationId xmlns:a16="http://schemas.microsoft.com/office/drawing/2014/main" id="{E2ED1F55-3CE9-F618-3510-EE96FDC54304}"/>
+                <a16:creationId xmlns:a16="http://schemas.microsoft.com/office/drawing/2014/main" id="{CE3B72D0-0A08-8401-1102-DC8B6D528889}"/>
               </a:ext>
             </a:extLst>
           </p:cNvPr>
@@ -19786,10 +19561,10 @@
       </p:sp>
       <p:sp>
         <p:nvSpPr>
-          <p:cNvPr id="8" name="Footer Placeholder 7">
+          <p:cNvPr id="12" name="Footer Placeholder 11">
             <a:extLst>
               <a:ext uri="{FF2B5EF4-FFF2-40B4-BE49-F238E27FC236}">
-                <a16:creationId xmlns:a16="http://schemas.microsoft.com/office/drawing/2014/main" id="{0616AEA6-DD6E-40D4-2DDA-E355C068ABA2}"/>
+                <a16:creationId xmlns:a16="http://schemas.microsoft.com/office/drawing/2014/main" id="{06FDA1F9-F2A3-54A6-D8DB-F94C2CD5C623}"/>
               </a:ext>
             </a:extLst>
           </p:cNvPr>
@@ -19815,10 +19590,10 @@
       </p:sp>
       <p:sp>
         <p:nvSpPr>
-          <p:cNvPr id="9" name="Slide Number Placeholder 8">
+          <p:cNvPr id="13" name="Slide Number Placeholder 12">
             <a:extLst>
               <a:ext uri="{FF2B5EF4-FFF2-40B4-BE49-F238E27FC236}">
-                <a16:creationId xmlns:a16="http://schemas.microsoft.com/office/drawing/2014/main" id="{BD632E70-5D06-CAE0-ED30-149A6C1E3F1E}"/>
+                <a16:creationId xmlns:a16="http://schemas.microsoft.com/office/drawing/2014/main" id="{7FE0A592-9ACE-2460-AAA6-BCEAFC660CD2}"/>
               </a:ext>
             </a:extLst>
           </p:cNvPr>
@@ -19834,14 +19609,9 @@
           <a:bodyPr/>
           <a:lstStyle/>
           <a:p>
-            <a:pPr algn="ctr"/>
-            <a:r>
-              <a:rPr lang="en-US"/>
-              <a:t>Slide </a:t>
-            </a:r>
             <a:fld id="{C5EF2332-01BF-834F-8236-50238282D533}" type="slidenum">
               <a:rPr lang="en-US" smtClean="0"/>
-              <a:pPr algn="ctr"/>
+              <a:pPr/>
               <a:t>‹#›</a:t>
             </a:fld>
             <a:endParaRPr dirty="0" lang="en-US"/>
@@ -19971,10 +19741,10 @@
       </p:pic>
       <p:sp>
         <p:nvSpPr>
-          <p:cNvPr id="8" name="Date Placeholder 7">
+          <p:cNvPr id="6" name="Date Placeholder 5">
             <a:extLst>
               <a:ext uri="{FF2B5EF4-FFF2-40B4-BE49-F238E27FC236}">
-                <a16:creationId xmlns:a16="http://schemas.microsoft.com/office/drawing/2014/main" id="{E6D5126F-053F-910F-7F76-D928AC61372D}"/>
+                <a16:creationId xmlns:a16="http://schemas.microsoft.com/office/drawing/2014/main" id="{4D4823E0-4AC4-556E-D341-7EC0B24627F1}"/>
               </a:ext>
             </a:extLst>
           </p:cNvPr>
@@ -20001,10 +19771,10 @@
       </p:sp>
       <p:sp>
         <p:nvSpPr>
-          <p:cNvPr id="9" name="Footer Placeholder 8">
+          <p:cNvPr id="7" name="Footer Placeholder 6">
             <a:extLst>
               <a:ext uri="{FF2B5EF4-FFF2-40B4-BE49-F238E27FC236}">
-                <a16:creationId xmlns:a16="http://schemas.microsoft.com/office/drawing/2014/main" id="{8EEF7D04-FF72-0698-CE48-A9A4F70D774F}"/>
+                <a16:creationId xmlns:a16="http://schemas.microsoft.com/office/drawing/2014/main" id="{DA033808-7DA7-BCE5-7841-A080B9791E38}"/>
               </a:ext>
             </a:extLst>
           </p:cNvPr>
@@ -20030,10 +19800,10 @@
       </p:sp>
       <p:sp>
         <p:nvSpPr>
-          <p:cNvPr id="10" name="Slide Number Placeholder 9">
+          <p:cNvPr id="11" name="Slide Number Placeholder 10">
             <a:extLst>
               <a:ext uri="{FF2B5EF4-FFF2-40B4-BE49-F238E27FC236}">
-                <a16:creationId xmlns:a16="http://schemas.microsoft.com/office/drawing/2014/main" id="{C8B1F07D-59FC-87D1-1BB5-7C86711059AF}"/>
+                <a16:creationId xmlns:a16="http://schemas.microsoft.com/office/drawing/2014/main" id="{F114B9F3-9BDF-91CE-CDEA-A368776345DA}"/>
               </a:ext>
             </a:extLst>
           </p:cNvPr>
@@ -20049,14 +19819,9 @@
           <a:bodyPr/>
           <a:lstStyle/>
           <a:p>
-            <a:pPr algn="ctr"/>
-            <a:r>
-              <a:rPr lang="en-US"/>
-              <a:t>Slide </a:t>
-            </a:r>
             <a:fld id="{C5EF2332-01BF-834F-8236-50238282D533}" type="slidenum">
               <a:rPr lang="en-US" smtClean="0"/>
-              <a:pPr algn="ctr"/>
+              <a:pPr/>
               <a:t>‹#›</a:t>
             </a:fld>
             <a:endParaRPr dirty="0" lang="en-US"/>
@@ -20194,10 +19959,10 @@
       </p:sp>
       <p:sp>
         <p:nvSpPr>
-          <p:cNvPr id="7" name="Date Placeholder 6">
+          <p:cNvPr id="11" name="Date Placeholder 10">
             <a:extLst>
               <a:ext uri="{FF2B5EF4-FFF2-40B4-BE49-F238E27FC236}">
-                <a16:creationId xmlns:a16="http://schemas.microsoft.com/office/drawing/2014/main" id="{E2ED1F55-3CE9-F618-3510-EE96FDC54304}"/>
+                <a16:creationId xmlns:a16="http://schemas.microsoft.com/office/drawing/2014/main" id="{CE3B72D0-0A08-8401-1102-DC8B6D528889}"/>
               </a:ext>
             </a:extLst>
           </p:cNvPr>
@@ -20224,10 +19989,10 @@
       </p:sp>
       <p:sp>
         <p:nvSpPr>
-          <p:cNvPr id="8" name="Footer Placeholder 7">
+          <p:cNvPr id="12" name="Footer Placeholder 11">
             <a:extLst>
               <a:ext uri="{FF2B5EF4-FFF2-40B4-BE49-F238E27FC236}">
-                <a16:creationId xmlns:a16="http://schemas.microsoft.com/office/drawing/2014/main" id="{0616AEA6-DD6E-40D4-2DDA-E355C068ABA2}"/>
+                <a16:creationId xmlns:a16="http://schemas.microsoft.com/office/drawing/2014/main" id="{06FDA1F9-F2A3-54A6-D8DB-F94C2CD5C623}"/>
               </a:ext>
             </a:extLst>
           </p:cNvPr>
@@ -20253,10 +20018,10 @@
       </p:sp>
       <p:sp>
         <p:nvSpPr>
-          <p:cNvPr id="9" name="Slide Number Placeholder 8">
+          <p:cNvPr id="13" name="Slide Number Placeholder 12">
             <a:extLst>
               <a:ext uri="{FF2B5EF4-FFF2-40B4-BE49-F238E27FC236}">
-                <a16:creationId xmlns:a16="http://schemas.microsoft.com/office/drawing/2014/main" id="{BD632E70-5D06-CAE0-ED30-149A6C1E3F1E}"/>
+                <a16:creationId xmlns:a16="http://schemas.microsoft.com/office/drawing/2014/main" id="{7FE0A592-9ACE-2460-AAA6-BCEAFC660CD2}"/>
               </a:ext>
             </a:extLst>
           </p:cNvPr>
@@ -20272,14 +20037,9 @@
           <a:bodyPr/>
           <a:lstStyle/>
           <a:p>
-            <a:pPr algn="ctr"/>
-            <a:r>
-              <a:rPr lang="en-US"/>
-              <a:t>Slide </a:t>
-            </a:r>
             <a:fld id="{C5EF2332-01BF-834F-8236-50238282D533}" type="slidenum">
               <a:rPr lang="en-US" smtClean="0"/>
-              <a:pPr algn="ctr"/>
+              <a:pPr/>
               <a:t>‹#›</a:t>
             </a:fld>
             <a:endParaRPr dirty="0" lang="en-US"/>
@@ -20335,10 +20095,10 @@
       </p:sp>
       <p:sp>
         <p:nvSpPr>
-          <p:cNvPr id="7" name="Date Placeholder 6">
+          <p:cNvPr id="11" name="Date Placeholder 10">
             <a:extLst>
               <a:ext uri="{FF2B5EF4-FFF2-40B4-BE49-F238E27FC236}">
-                <a16:creationId xmlns:a16="http://schemas.microsoft.com/office/drawing/2014/main" id="{E2ED1F55-3CE9-F618-3510-EE96FDC54304}"/>
+                <a16:creationId xmlns:a16="http://schemas.microsoft.com/office/drawing/2014/main" id="{CE3B72D0-0A08-8401-1102-DC8B6D528889}"/>
               </a:ext>
             </a:extLst>
           </p:cNvPr>
@@ -20365,10 +20125,10 @@
       </p:sp>
       <p:sp>
         <p:nvSpPr>
-          <p:cNvPr id="8" name="Footer Placeholder 7">
+          <p:cNvPr id="12" name="Footer Placeholder 11">
             <a:extLst>
               <a:ext uri="{FF2B5EF4-FFF2-40B4-BE49-F238E27FC236}">
-                <a16:creationId xmlns:a16="http://schemas.microsoft.com/office/drawing/2014/main" id="{0616AEA6-DD6E-40D4-2DDA-E355C068ABA2}"/>
+                <a16:creationId xmlns:a16="http://schemas.microsoft.com/office/drawing/2014/main" id="{06FDA1F9-F2A3-54A6-D8DB-F94C2CD5C623}"/>
               </a:ext>
             </a:extLst>
           </p:cNvPr>
@@ -20394,10 +20154,10 @@
       </p:sp>
       <p:sp>
         <p:nvSpPr>
-          <p:cNvPr id="9" name="Slide Number Placeholder 8">
+          <p:cNvPr id="13" name="Slide Number Placeholder 12">
             <a:extLst>
               <a:ext uri="{FF2B5EF4-FFF2-40B4-BE49-F238E27FC236}">
-                <a16:creationId xmlns:a16="http://schemas.microsoft.com/office/drawing/2014/main" id="{BD632E70-5D06-CAE0-ED30-149A6C1E3F1E}"/>
+                <a16:creationId xmlns:a16="http://schemas.microsoft.com/office/drawing/2014/main" id="{7FE0A592-9ACE-2460-AAA6-BCEAFC660CD2}"/>
               </a:ext>
             </a:extLst>
           </p:cNvPr>
@@ -20413,14 +20173,9 @@
           <a:bodyPr/>
           <a:lstStyle/>
           <a:p>
-            <a:pPr algn="ctr"/>
-            <a:r>
-              <a:rPr lang="en-US"/>
-              <a:t>Slide </a:t>
-            </a:r>
             <a:fld id="{C5EF2332-01BF-834F-8236-50238282D533}" type="slidenum">
               <a:rPr lang="en-US" smtClean="0"/>
-              <a:pPr algn="ctr"/>
+              <a:pPr/>
               <a:t>‹#›</a:t>
             </a:fld>
             <a:endParaRPr dirty="0" lang="en-US"/>
@@ -20512,10 +20267,10 @@
       </p:sp>
       <p:sp>
         <p:nvSpPr>
-          <p:cNvPr id="7" name="Date Placeholder 6">
+          <p:cNvPr id="11" name="Date Placeholder 10">
             <a:extLst>
               <a:ext uri="{FF2B5EF4-FFF2-40B4-BE49-F238E27FC236}">
-                <a16:creationId xmlns:a16="http://schemas.microsoft.com/office/drawing/2014/main" id="{E2ED1F55-3CE9-F618-3510-EE96FDC54304}"/>
+                <a16:creationId xmlns:a16="http://schemas.microsoft.com/office/drawing/2014/main" id="{CE3B72D0-0A08-8401-1102-DC8B6D528889}"/>
               </a:ext>
             </a:extLst>
           </p:cNvPr>
@@ -20542,10 +20297,10 @@
       </p:sp>
       <p:sp>
         <p:nvSpPr>
-          <p:cNvPr id="8" name="Footer Placeholder 7">
+          <p:cNvPr id="12" name="Footer Placeholder 11">
             <a:extLst>
               <a:ext uri="{FF2B5EF4-FFF2-40B4-BE49-F238E27FC236}">
-                <a16:creationId xmlns:a16="http://schemas.microsoft.com/office/drawing/2014/main" id="{0616AEA6-DD6E-40D4-2DDA-E355C068ABA2}"/>
+                <a16:creationId xmlns:a16="http://schemas.microsoft.com/office/drawing/2014/main" id="{06FDA1F9-F2A3-54A6-D8DB-F94C2CD5C623}"/>
               </a:ext>
             </a:extLst>
           </p:cNvPr>
@@ -20571,10 +20326,10 @@
       </p:sp>
       <p:sp>
         <p:nvSpPr>
-          <p:cNvPr id="9" name="Slide Number Placeholder 8">
+          <p:cNvPr id="13" name="Slide Number Placeholder 12">
             <a:extLst>
               <a:ext uri="{FF2B5EF4-FFF2-40B4-BE49-F238E27FC236}">
-                <a16:creationId xmlns:a16="http://schemas.microsoft.com/office/drawing/2014/main" id="{BD632E70-5D06-CAE0-ED30-149A6C1E3F1E}"/>
+                <a16:creationId xmlns:a16="http://schemas.microsoft.com/office/drawing/2014/main" id="{7FE0A592-9ACE-2460-AAA6-BCEAFC660CD2}"/>
               </a:ext>
             </a:extLst>
           </p:cNvPr>
@@ -20590,14 +20345,9 @@
           <a:bodyPr/>
           <a:lstStyle/>
           <a:p>
-            <a:pPr algn="ctr"/>
-            <a:r>
-              <a:rPr lang="en-US"/>
-              <a:t>Slide </a:t>
-            </a:r>
             <a:fld id="{C5EF2332-01BF-834F-8236-50238282D533}" type="slidenum">
               <a:rPr lang="en-US" smtClean="0"/>
-              <a:pPr algn="ctr"/>
+              <a:pPr/>
               <a:t>‹#›</a:t>
             </a:fld>
             <a:endParaRPr dirty="0" lang="en-US"/>
@@ -20935,10 +20685,10 @@
       </p:sp>
       <p:sp>
         <p:nvSpPr>
-          <p:cNvPr id="7" name="Date Placeholder 6">
+          <p:cNvPr id="11" name="Date Placeholder 10">
             <a:extLst>
               <a:ext uri="{FF2B5EF4-FFF2-40B4-BE49-F238E27FC236}">
-                <a16:creationId xmlns:a16="http://schemas.microsoft.com/office/drawing/2014/main" id="{E2ED1F55-3CE9-F618-3510-EE96FDC54304}"/>
+                <a16:creationId xmlns:a16="http://schemas.microsoft.com/office/drawing/2014/main" id="{CE3B72D0-0A08-8401-1102-DC8B6D528889}"/>
               </a:ext>
             </a:extLst>
           </p:cNvPr>
@@ -20965,10 +20715,10 @@
       </p:sp>
       <p:sp>
         <p:nvSpPr>
-          <p:cNvPr id="8" name="Footer Placeholder 7">
+          <p:cNvPr id="12" name="Footer Placeholder 11">
             <a:extLst>
               <a:ext uri="{FF2B5EF4-FFF2-40B4-BE49-F238E27FC236}">
-                <a16:creationId xmlns:a16="http://schemas.microsoft.com/office/drawing/2014/main" id="{0616AEA6-DD6E-40D4-2DDA-E355C068ABA2}"/>
+                <a16:creationId xmlns:a16="http://schemas.microsoft.com/office/drawing/2014/main" id="{06FDA1F9-F2A3-54A6-D8DB-F94C2CD5C623}"/>
               </a:ext>
             </a:extLst>
           </p:cNvPr>
@@ -20994,10 +20744,10 @@
       </p:sp>
       <p:sp>
         <p:nvSpPr>
-          <p:cNvPr id="9" name="Slide Number Placeholder 8">
+          <p:cNvPr id="13" name="Slide Number Placeholder 12">
             <a:extLst>
               <a:ext uri="{FF2B5EF4-FFF2-40B4-BE49-F238E27FC236}">
-                <a16:creationId xmlns:a16="http://schemas.microsoft.com/office/drawing/2014/main" id="{BD632E70-5D06-CAE0-ED30-149A6C1E3F1E}"/>
+                <a16:creationId xmlns:a16="http://schemas.microsoft.com/office/drawing/2014/main" id="{7FE0A592-9ACE-2460-AAA6-BCEAFC660CD2}"/>
               </a:ext>
             </a:extLst>
           </p:cNvPr>
@@ -21013,14 +20763,9 @@
           <a:bodyPr/>
           <a:lstStyle/>
           <a:p>
-            <a:pPr algn="ctr"/>
-            <a:r>
-              <a:rPr lang="en-US"/>
-              <a:t>Slide </a:t>
-            </a:r>
             <a:fld id="{C5EF2332-01BF-834F-8236-50238282D533}" type="slidenum">
               <a:rPr lang="en-US" smtClean="0"/>
-              <a:pPr algn="ctr"/>
+              <a:pPr/>
               <a:t>‹#›</a:t>
             </a:fld>
             <a:endParaRPr dirty="0" lang="en-US"/>

--- a/working-output.pptx
+++ b/working-output.pptx
@@ -4733,35 +4733,35 @@
           <a:p>
             <a:pPr lvl="0"/>
             <a:r>
-              <a:rPr lang="en-US"/>
+              <a:rPr lang="en-US" dirty="0"/>
               <a:t>Click to edit Master text styles</a:t>
             </a:r>
           </a:p>
           <a:p>
             <a:pPr lvl="1"/>
             <a:r>
-              <a:rPr lang="en-US"/>
+              <a:rPr lang="en-US" dirty="0"/>
               <a:t>Second level</a:t>
             </a:r>
           </a:p>
           <a:p>
             <a:pPr lvl="2"/>
             <a:r>
-              <a:rPr lang="en-US"/>
+              <a:rPr lang="en-US" dirty="0"/>
               <a:t>Third level</a:t>
             </a:r>
           </a:p>
           <a:p>
             <a:pPr lvl="3"/>
             <a:r>
-              <a:rPr lang="en-US"/>
+              <a:rPr lang="en-US" dirty="0"/>
               <a:t>Fourth level</a:t>
             </a:r>
           </a:p>
           <a:p>
             <a:pPr lvl="4"/>
             <a:r>
-              <a:rPr lang="en-US"/>
+              <a:rPr lang="en-US" dirty="0"/>
               <a:t>Fifth level</a:t>
             </a:r>
           </a:p>
@@ -4985,35 +4985,35 @@
           <a:p>
             <a:pPr lvl="0"/>
             <a:r>
-              <a:rPr lang="en-US"/>
+              <a:rPr lang="en-US" dirty="0"/>
               <a:t>Click to edit Master text styles</a:t>
             </a:r>
           </a:p>
           <a:p>
             <a:pPr lvl="1"/>
             <a:r>
-              <a:rPr lang="en-US"/>
+              <a:rPr lang="en-US" dirty="0"/>
               <a:t>Second level</a:t>
             </a:r>
           </a:p>
           <a:p>
             <a:pPr lvl="2"/>
             <a:r>
-              <a:rPr lang="en-US"/>
+              <a:rPr lang="en-US" dirty="0"/>
               <a:t>Third level</a:t>
             </a:r>
           </a:p>
           <a:p>
             <a:pPr lvl="3"/>
             <a:r>
-              <a:rPr lang="en-US"/>
+              <a:rPr lang="en-US" dirty="0"/>
               <a:t>Fourth level</a:t>
             </a:r>
           </a:p>
           <a:p>
             <a:pPr lvl="4"/>
             <a:r>
-              <a:rPr lang="en-US"/>
+              <a:rPr lang="en-US" dirty="0"/>
               <a:t>Fifth level</a:t>
             </a:r>
           </a:p>
@@ -5791,19 +5791,19 @@
           <a:bodyPr/>
           <a:lstStyle>
             <a:lvl1pPr>
-              <a:defRPr sz="2800"/>
+              <a:defRPr sz="2200"/>
             </a:lvl1pPr>
             <a:lvl2pPr>
-              <a:defRPr sz="2400"/>
+              <a:defRPr sz="2000"/>
             </a:lvl2pPr>
             <a:lvl3pPr>
-              <a:defRPr sz="2000"/>
+              <a:defRPr sz="1800"/>
             </a:lvl3pPr>
             <a:lvl4pPr>
-              <a:defRPr sz="1800"/>
+              <a:defRPr sz="1600"/>
             </a:lvl4pPr>
             <a:lvl5pPr>
-              <a:defRPr sz="1800"/>
+              <a:defRPr sz="1600"/>
             </a:lvl5pPr>
             <a:lvl6pPr>
               <a:defRPr sz="1800"/>
@@ -5821,35 +5821,35 @@
           <a:p>
             <a:pPr lvl="0"/>
             <a:r>
-              <a:rPr lang="en-US"/>
+              <a:rPr lang="en-US" dirty="0"/>
               <a:t>Click to edit Master text styles</a:t>
             </a:r>
           </a:p>
           <a:p>
             <a:pPr lvl="1"/>
             <a:r>
-              <a:rPr lang="en-US"/>
+              <a:rPr lang="en-US" dirty="0"/>
               <a:t>Second level</a:t>
             </a:r>
           </a:p>
           <a:p>
             <a:pPr lvl="2"/>
             <a:r>
-              <a:rPr lang="en-US"/>
+              <a:rPr lang="en-US" dirty="0"/>
               <a:t>Third level</a:t>
             </a:r>
           </a:p>
           <a:p>
             <a:pPr lvl="3"/>
             <a:r>
-              <a:rPr lang="en-US"/>
+              <a:rPr lang="en-US" dirty="0"/>
               <a:t>Fourth level</a:t>
             </a:r>
           </a:p>
           <a:p>
             <a:pPr lvl="4"/>
             <a:r>
-              <a:rPr lang="en-US"/>
+              <a:rPr lang="en-US" dirty="0"/>
               <a:t>Fifth level</a:t>
             </a:r>
           </a:p>
@@ -5875,19 +5875,19 @@
           <a:bodyPr/>
           <a:lstStyle>
             <a:lvl1pPr>
-              <a:defRPr sz="2800"/>
+              <a:defRPr sz="2200"/>
             </a:lvl1pPr>
             <a:lvl2pPr>
-              <a:defRPr sz="2400"/>
+              <a:defRPr sz="2000"/>
             </a:lvl2pPr>
             <a:lvl3pPr>
-              <a:defRPr sz="2000"/>
+              <a:defRPr sz="1800"/>
             </a:lvl3pPr>
             <a:lvl4pPr>
-              <a:defRPr sz="1800"/>
+              <a:defRPr sz="1600"/>
             </a:lvl4pPr>
             <a:lvl5pPr>
-              <a:defRPr sz="1800"/>
+              <a:defRPr sz="1600"/>
             </a:lvl5pPr>
             <a:lvl6pPr>
               <a:defRPr sz="1800"/>
@@ -5905,35 +5905,35 @@
           <a:p>
             <a:pPr lvl="0"/>
             <a:r>
-              <a:rPr lang="en-US"/>
+              <a:rPr lang="en-US" dirty="0"/>
               <a:t>Click to edit Master text styles</a:t>
             </a:r>
           </a:p>
           <a:p>
             <a:pPr lvl="1"/>
             <a:r>
-              <a:rPr lang="en-US"/>
+              <a:rPr lang="en-US" dirty="0"/>
               <a:t>Second level</a:t>
             </a:r>
           </a:p>
           <a:p>
             <a:pPr lvl="2"/>
             <a:r>
-              <a:rPr lang="en-US"/>
+              <a:rPr lang="en-US" dirty="0"/>
               <a:t>Third level</a:t>
             </a:r>
           </a:p>
           <a:p>
             <a:pPr lvl="3"/>
             <a:r>
-              <a:rPr lang="en-US"/>
+              <a:rPr lang="en-US" dirty="0"/>
               <a:t>Fourth level</a:t>
             </a:r>
           </a:p>
           <a:p>
             <a:pPr lvl="4"/>
             <a:r>
-              <a:rPr lang="en-US"/>
+              <a:rPr lang="en-US" dirty="0"/>
               <a:t>Fifth level</a:t>
             </a:r>
           </a:p>
@@ -6128,7 +6128,7 @@
           </a:lstStyle>
           <a:p>
             <a:r>
-              <a:rPr lang="en-US"/>
+              <a:rPr lang="en-US" dirty="0"/>
               <a:t>Click to edit Master title style</a:t>
             </a:r>
           </a:p>
@@ -6219,7 +6219,7 @@
           <a:bodyPr/>
           <a:lstStyle>
             <a:lvl1pPr>
-              <a:defRPr sz="2400"/>
+              <a:defRPr sz="2200"/>
             </a:lvl1pPr>
             <a:lvl2pPr>
               <a:defRPr sz="2000"/>
@@ -6249,35 +6249,35 @@
           <a:p>
             <a:pPr lvl="0"/>
             <a:r>
-              <a:rPr lang="en-US"/>
+              <a:rPr lang="en-US" dirty="0"/>
               <a:t>Click to edit Master text styles</a:t>
             </a:r>
           </a:p>
           <a:p>
             <a:pPr lvl="1"/>
             <a:r>
-              <a:rPr lang="en-US"/>
+              <a:rPr lang="en-US" dirty="0"/>
               <a:t>Second level</a:t>
             </a:r>
           </a:p>
           <a:p>
             <a:pPr lvl="2"/>
             <a:r>
-              <a:rPr lang="en-US"/>
+              <a:rPr lang="en-US" dirty="0"/>
               <a:t>Third level</a:t>
             </a:r>
           </a:p>
           <a:p>
             <a:pPr lvl="3"/>
             <a:r>
-              <a:rPr lang="en-US"/>
+              <a:rPr lang="en-US" dirty="0"/>
               <a:t>Fourth level</a:t>
             </a:r>
           </a:p>
           <a:p>
             <a:pPr lvl="4"/>
             <a:r>
-              <a:rPr lang="en-US"/>
+              <a:rPr lang="en-US" dirty="0"/>
               <a:t>Fifth level</a:t>
             </a:r>
           </a:p>
@@ -6368,7 +6368,7 @@
           <a:bodyPr/>
           <a:lstStyle>
             <a:lvl1pPr>
-              <a:defRPr sz="2400"/>
+              <a:defRPr sz="2200"/>
             </a:lvl1pPr>
             <a:lvl2pPr>
               <a:defRPr sz="2000"/>
@@ -6398,35 +6398,35 @@
           <a:p>
             <a:pPr lvl="0"/>
             <a:r>
-              <a:rPr lang="en-US"/>
+              <a:rPr lang="en-US" dirty="0"/>
               <a:t>Click to edit Master text styles</a:t>
             </a:r>
           </a:p>
           <a:p>
             <a:pPr lvl="1"/>
             <a:r>
-              <a:rPr lang="en-US"/>
+              <a:rPr lang="en-US" dirty="0"/>
               <a:t>Second level</a:t>
             </a:r>
           </a:p>
           <a:p>
             <a:pPr lvl="2"/>
             <a:r>
-              <a:rPr lang="en-US"/>
+              <a:rPr lang="en-US" dirty="0"/>
               <a:t>Third level</a:t>
             </a:r>
           </a:p>
           <a:p>
             <a:pPr lvl="3"/>
             <a:r>
-              <a:rPr lang="en-US"/>
+              <a:rPr lang="en-US" dirty="0"/>
               <a:t>Fourth level</a:t>
             </a:r>
           </a:p>
           <a:p>
             <a:pPr lvl="4"/>
             <a:r>
-              <a:rPr lang="en-US"/>
+              <a:rPr lang="en-US" dirty="0"/>
               <a:t>Fifth level</a:t>
             </a:r>
           </a:p>
@@ -6981,12 +6981,12 @@
           <a:bodyPr anchor="b"/>
           <a:lstStyle>
             <a:lvl1pPr algn="l">
-              <a:defRPr sz="2000" b="1"/>
+              <a:defRPr sz="2200" b="1"/>
             </a:lvl1pPr>
           </a:lstStyle>
           <a:p>
             <a:r>
-              <a:rPr lang="en-US"/>
+              <a:rPr lang="en-US" dirty="0"/>
               <a:t>Click to edit Master title style</a:t>
             </a:r>
           </a:p>
@@ -7004,27 +7004,27 @@
         </p:nvSpPr>
         <p:spPr>
           <a:xfrm>
-            <a:off x="4766733" y="273052"/>
-            <a:ext cx="6815667" cy="5853113"/>
+            <a:off x="4766733" y="1435100"/>
+            <a:ext cx="6815667" cy="4691065"/>
           </a:xfrm>
         </p:spPr>
         <p:txBody>
           <a:bodyPr anchor="ctr"/>
           <a:lstStyle>
             <a:lvl1pPr>
-              <a:defRPr sz="3200"/>
+              <a:defRPr sz="2200"/>
             </a:lvl1pPr>
             <a:lvl2pPr>
-              <a:defRPr sz="2800"/>
+              <a:defRPr sz="2000"/>
             </a:lvl2pPr>
             <a:lvl3pPr>
-              <a:defRPr sz="2400"/>
+              <a:defRPr sz="1800"/>
             </a:lvl3pPr>
             <a:lvl4pPr>
-              <a:defRPr sz="2000"/>
+              <a:defRPr sz="1600"/>
             </a:lvl4pPr>
             <a:lvl5pPr>
-              <a:defRPr sz="2000"/>
+              <a:defRPr sz="1600"/>
             </a:lvl5pPr>
             <a:lvl6pPr>
               <a:defRPr sz="2000"/>
@@ -7097,7 +7097,7 @@
           <a:lstStyle>
             <a:lvl1pPr marL="0" indent="0">
               <a:buNone/>
-              <a:defRPr sz="1400"/>
+              <a:defRPr sz="1600"/>
             </a:lvl1pPr>
             <a:lvl2pPr marL="457189" indent="0">
               <a:buNone/>
@@ -7135,7 +7135,7 @@
           <a:p>
             <a:pPr lvl="0"/>
             <a:r>
-              <a:rPr lang="en-US"/>
+              <a:rPr lang="en-US" dirty="0"/>
               <a:t>Click to edit Master text styles</a:t>
             </a:r>
           </a:p>
@@ -7335,7 +7335,7 @@
           </a:lstStyle>
           <a:p>
             <a:r>
-              <a:rPr lang="en-US"/>
+              <a:rPr lang="en-US" dirty="0"/>
               <a:t>Click to edit Master title style</a:t>
             </a:r>
           </a:p>
@@ -9565,12 +9565,7 @@
             <p:ph type="title"/>
           </p:nvPr>
         </p:nvSpPr>
-        <p:spPr>
-          <a:xfrm>
-            <a:off x="609602" y="273049"/>
-            <a:ext cx="4011084" cy="1162051"/>
-          </a:xfrm>
-        </p:spPr>
+        <p:spPr/>
         <p:txBody>
           <a:bodyPr/>
           <a:lstStyle/>
@@ -9587,12 +9582,12 @@
       </p:sp>
       <p:sp>
         <p:nvSpPr>
-          <p:cNvPr id="4" name="Text Placeholder 3"/>
-          <p:cNvSpPr>
-            <a:spLocks noGrp="1"/>
-          </p:cNvSpPr>
-          <p:nvPr>
-            <p:ph idx="2" sz="half" type="body"/>
+          <p:cNvPr id="3" name="Content Placeholder 2"/>
+          <p:cNvSpPr>
+            <a:spLocks noGrp="1"/>
+          </p:cNvSpPr>
+          <p:nvPr>
+            <p:ph idx="1" sz="half"/>
           </p:nvPr>
         </p:nvSpPr>
         <p:spPr/>
@@ -9647,8 +9642,8 @@
         </p:blipFill>
         <p:spPr bwMode="auto">
           <a:xfrm>
-            <a:off x="4762500" y="1739900"/>
-            <a:ext cx="6807200" cy="2387600"/>
+            <a:off x="6197600" y="2667000"/>
+            <a:ext cx="5384800" cy="1892300"/>
           </a:xfrm>
           <a:prstGeom prst="rect">
             <a:avLst/>
@@ -9671,8 +9666,8 @@
         </p:nvSpPr>
         <p:spPr>
           <a:xfrm>
-            <a:off x="4762500" y="5600700"/>
-            <a:ext cx="6807200" cy="508000"/>
+            <a:off x="6197600" y="5613400"/>
+            <a:ext cx="5384800" cy="508000"/>
           </a:xfrm>
           <a:prstGeom prst="rect">
             <a:avLst/>
@@ -9695,12 +9690,12 @@
       </p:sp>
       <p:sp>
         <p:nvSpPr>
-          <p:cNvPr id="3" name="Content Placeholder 2"/>
-          <p:cNvSpPr>
-            <a:spLocks noGrp="1"/>
-          </p:cNvSpPr>
-          <p:nvPr>
-            <p:ph idx="1"/>
+          <p:cNvPr id="4" name="Content Placeholder 3"/>
+          <p:cNvSpPr>
+            <a:spLocks noGrp="1"/>
+          </p:cNvSpPr>
+          <p:nvPr>
+            <p:ph idx="2" sz="half"/>
           </p:nvPr>
         </p:nvSpPr>
         <p:spPr/>
@@ -9731,7 +9726,7 @@
           <p:cNvPr id="6" name="Date Placeholder 5">
             <a:extLst>
               <a:ext uri="{FF2B5EF4-FFF2-40B4-BE49-F238E27FC236}">
-                <a16:creationId xmlns:a16="http://schemas.microsoft.com/office/drawing/2014/main" id="{4D4823E0-4AC4-556E-D341-7EC0B24627F1}"/>
+                <a16:creationId xmlns:a16="http://schemas.microsoft.com/office/drawing/2014/main" id="{DB9C105D-2DC4-B9F4-C1FE-2CAFAE38DB01}"/>
               </a:ext>
             </a:extLst>
           </p:cNvPr>
@@ -9761,7 +9756,7 @@
           <p:cNvPr id="7" name="Footer Placeholder 6">
             <a:extLst>
               <a:ext uri="{FF2B5EF4-FFF2-40B4-BE49-F238E27FC236}">
-                <a16:creationId xmlns:a16="http://schemas.microsoft.com/office/drawing/2014/main" id="{DA033808-7DA7-BCE5-7841-A080B9791E38}"/>
+                <a16:creationId xmlns:a16="http://schemas.microsoft.com/office/drawing/2014/main" id="{B6159A58-99BB-FD20-30B4-B65A749EE7DB}"/>
               </a:ext>
             </a:extLst>
           </p:cNvPr>
@@ -9790,7 +9785,7 @@
           <p:cNvPr id="11" name="Slide Number Placeholder 10">
             <a:extLst>
               <a:ext uri="{FF2B5EF4-FFF2-40B4-BE49-F238E27FC236}">
-                <a16:creationId xmlns:a16="http://schemas.microsoft.com/office/drawing/2014/main" id="{F114B9F3-9BDF-91CE-CDEA-A368776345DA}"/>
+                <a16:creationId xmlns:a16="http://schemas.microsoft.com/office/drawing/2014/main" id="{91EB764C-C70A-BBB6-D634-50E6464DB304}"/>
               </a:ext>
             </a:extLst>
           </p:cNvPr>
@@ -9918,7 +9913,7 @@
         </p:blipFill>
         <p:spPr bwMode="auto">
           <a:xfrm>
-            <a:off x="4762500" y="2806700"/>
+            <a:off x="4762500" y="3390900"/>
             <a:ext cx="6807200" cy="774700"/>
           </a:xfrm>
           <a:prstGeom prst="rect">
@@ -10218,7 +10213,7 @@
         </p:blipFill>
         <p:spPr bwMode="auto">
           <a:xfrm>
-            <a:off x="4762500" y="2400300"/>
+            <a:off x="4762500" y="2984500"/>
             <a:ext cx="6807200" cy="1574800"/>
           </a:xfrm>
           <a:prstGeom prst="rect">
@@ -19124,8 +19119,8 @@
           </p:nvPr>
         </p:nvGraphicFramePr>
         <p:xfrm>
-          <a:off x="4762500" y="266700"/>
-          <a:ext cx="6807200" cy="5842000"/>
+          <a:off x="4762500" y="1435100"/>
+          <a:ext cx="6807200" cy="4686300"/>
         </p:xfrm>
         <a:graphic>
           <a:graphicData uri="http://schemas.openxmlformats.org/drawingml/2006/table">
@@ -19725,7 +19720,7 @@
         </p:blipFill>
         <p:spPr bwMode="auto">
           <a:xfrm>
-            <a:off x="4762500" y="1143000"/>
+            <a:off x="4762500" y="1739900"/>
             <a:ext cx="6807200" cy="4076700"/>
           </a:xfrm>
           <a:prstGeom prst="rect">
